--- a/it/slides/13-Architettura_dei_Calcolatori-Macchine_Sequenziali.pptx
+++ b/it/slides/13-Architettura_dei_Calcolatori-Macchine_Sequenziali.pptx
@@ -126,19 +126,19 @@
   <p:extLst>
     <p:ext uri="{521415D9-36F7-43E2-AB2F-B90AF26B5E84}">
       <p14:sectionLst xmlns:p14="http://schemas.microsoft.com/office/powerpoint/2010/main">
-        <p14:section name="Apertura" id="{d1420a01-9cad-5c82-f70f-cfdc19f64be5}">
+        <p14:section name="Apertura" id="{443b4a33-4b95-c13e-c8d3-4a15d89eab1e}">
           <p14:sldIdLst>
             <p14:sldId id="256"/>
             <p14:sldId id="257"/>
           </p14:sldIdLst>
         </p14:section>
-        <p14:section name="Tempo e stato" id="{635fc1b3-5df7-eb2b-7694-4a4f8780546c}">
+        <p14:section name="Tempo e stato" id="{1e721fdd-ecc1-79f2-9cd9-07cd8cb66e7d}">
           <p14:sldIdLst>
             <p14:sldId id="258"/>
             <p14:sldId id="259"/>
           </p14:sldIdLst>
         </p14:section>
-        <p14:section name="Macchine a stati finiti" id="{41e81f65-60f9-8456-f1ef-866d3f037601}">
+        <p14:section name="Macchine a stati finiti" id="{aace85ce-052e-0776-dfd9-0b041e2e50aa}">
           <p14:sldIdLst>
             <p14:sldId id="260"/>
             <p14:sldId id="261"/>
@@ -146,22 +146,22 @@
             <p14:sldId id="263"/>
           </p14:sldIdLst>
         </p14:section>
-        <p14:section name="Latch" id="{0d156fbc-8872-00df-aeb1-cc5f77a50f5c}">
+        <p14:section name="Latch" id="{17d6bc21-97c9-8bcd-8ada-5dbaffaee4b7}">
           <p14:sldIdLst>
             <p14:sldId id="264"/>
             <p14:sldId id="265"/>
             <p14:sldId id="266"/>
             <p14:sldId id="267"/>
+            <p14:sldId id="268"/>
           </p14:sldIdLst>
         </p14:section>
-        <p14:section name="Flip-flop" id="{0ca1bf4a-ff65-e02b-647c-448da2e91971}">
+        <p14:section name="Flip-flop" id="{7ddf2e3d-1af8-ea03-0ccf-6c1afaf9448b}">
           <p14:sldIdLst>
-            <p14:sldId id="268"/>
             <p14:sldId id="269"/>
             <p14:sldId id="270"/>
           </p14:sldIdLst>
         </p14:section>
-        <p14:section name="Ritorno alla macchina" id="{4d09d424-57e3-0e15-b51f-6ac04706a951}">
+        <p14:section name="Ritorno alla macchina" id="{8ee297eb-4851-c456-e84f-e6cf9b98a8ac}">
           <p14:sldIdLst>
             <p14:sldId id="271"/>
             <p14:sldId id="272"/>
@@ -752,8 +752,8 @@
           <a:p>
             <a:r>
               <a:rPr lang="en-US" dirty="0"/>
-              <a:t>In un circuito asincrono le uscite possono cambiare ogni volta che cambia un ingresso. In uno sincrono è il clock a decidere quando. Per rendere sincrono il latch SR, S e R passano per due porte AND insieme al clock. Quando il clock vale 0 entrambe le porte danno 0 e il latch non può cambiare; quando vale 1 si comporta come il latch semplice. Il clock decide quando gli ingressi vengono ascoltati.
-Per il docente: Latch sincroni e asincroni. La presentazione originale suggerisce un simulatore: de-iitr.vlabs.ac.in/exp/truth-tables-flip-flops.</a:t>
+              <a:t>Con S e R entrambi a 1, entrambe le porte NOR danno 0, quindi Q e il suo complemento non sono più complementari. Peggio: se poi i due ingressi tornano a 0 insieme, le porte fanno a gara, e lo stato finale dipende da quale è più veloce. Il risultato è imprevedibile, e il latch può perfino oscillare. Chi usa un latch SR deve garantire che S e R non siano mai a 1 insieme. Gli elementi JK e D sono stati inventati per eliminare il problema alla radice.
+Per il docente: Le conclusioni della presentazione originale scambiavano set e reset in una slide: set dà Q = 1, reset dà Q = 0.</a:t>
             </a:r>
             <a:endParaRPr lang="en-US" dirty="0"/>
           </a:p>
@@ -841,8 +841,8 @@
           <a:p>
             <a:r>
               <a:rPr lang="en-US" dirty="0"/>
-              <a:t>Due miglioramenti del latch. Nel latch JK le uscite sono riportate alle porte di ingresso, così che set e reset interni non possano mai valere 1 insieme; la combinazione J = K = 1, invece di essere vietata, inverte l'uscita: la fa commutare. Il latch D ha un solo ingresso: D va al set e la sua negazione al reset, quindi l'uscita prende semplicemente il valore di D finché il clock è attivo. D sta per delay, ritardo, o per dato.
-Per il docente: JK: le uscite sono riportate alle porte di ingresso, S = J . Q' e R = K . Q; poiché Q e Q' sono complementari, S e R non possono mai valere entrambi 1. D: un solo ingresso va a S e, attraverso un invertitore, a R, quindi sono possibili solo i casi S = 0, R = 1 e S = 1, R = 0.</a:t>
+              <a:t>In un circuito asincrono le uscite possono cambiare ogni volta che cambia un ingresso. In uno sincrono è il clock a decidere quando. Per rendere sincrono il latch SR, S e R passano per due porte AND insieme al clock. Quando il clock vale 0 entrambe le porte danno 0 e il latch non può cambiare; quando vale 1 si comporta come il latch semplice. Il clock decide quando gli ingressi vengono ascoltati.
+Per il docente: Latch sincroni e asincroni. La presentazione originale suggerisce un simulatore: de-iitr.vlabs.ac.in/exp/truth-tables-flip-flops.</a:t>
             </a:r>
             <a:endParaRPr lang="en-US" dirty="0"/>
           </a:p>
@@ -930,8 +930,8 @@
           <a:p>
             <a:r>
               <a:rPr lang="en-US" dirty="0"/>
-              <a:t>Il flip-flop master-slave è fatto di due latch in serie, controllati da livelli opposti del clock. Quando il clock vale 0 il master è aperto e segue l'ingresso, mentre lo slave è chiuso. Quando il clock passa a 1 il master si chiude, conservando ciò che aveva, e lo slave si apre e lo mostra. I due non sono mai trasparenti insieme, quindi l'ingresso non può mai correre dritto fino all'uscita. L'effetto è che l'uscita cambia solo sul fronte di salita: il flip-flop è sensibile al fronte.
-Per il docente: Flip-flop master-slave. La presentazione originale mostrava la versione JK, fatta di due latch JK sincroni; la versione D è quella usata nei registri di un processore.</a:t>
+              <a:t>Due miglioramenti del latch. Nel latch JK le uscite sono riportate alle porte di ingresso, così che set e reset interni non possano mai valere 1 insieme; la combinazione J = K = 1, invece di essere vietata, inverte l'uscita: la fa commutare. Il latch D ha un solo ingresso: D va al set e la sua negazione al reset, quindi l'uscita prende semplicemente il valore di D finché il clock è attivo. D sta per delay, ritardo, o per dato.
+Per il docente: JK: le uscite sono riportate alle porte di ingresso, S = J . Q' e R = K . Q; poiché Q e Q' sono complementari, S e R non possono mai valere entrambi 1. D: un solo ingresso va a S e, attraverso un invertitore, a R, quindi sono possibili solo i casi S = 0, R = 1 e S = 1, R = 0.</a:t>
             </a:r>
             <a:endParaRPr lang="en-US" dirty="0"/>
           </a:p>
@@ -1019,8 +1019,8 @@
           <a:p>
             <a:r>
               <a:rPr lang="en-US" dirty="0"/>
-              <a:t>La differenza, vista sulle forme d'onda. Il clock e l'ingresso D sono gli stessi per entrambi. L'uscita del latch segue D per tutta la fase alta del clock: cambia a metà di una fase. L'uscita del flip-flop cambia solo sui fronti di salita, prendendo il valore che D ha in quell'istante; gli impulsi brevi di D tra due fronti sono ignorati. L'uscita del flip-flop è ferma per un intero periodo, che è esattamente ciò che serve a un registro di stato.
-Per il docente: Sensibile al livello contro sensibile al fronte. Le forme d'onda sono calcolate, non disegnate a mano: l'uscita del latch cambia a metà di una fase alta, quella del flip-flop solo sui fronti di salita.</a:t>
+              <a:t>Il flip-flop master-slave è fatto di due latch in serie, controllati da livelli opposti del clock. Quando il clock vale 0 il master è aperto e segue l'ingresso, mentre lo slave è chiuso. Quando il clock passa a 1 il master si chiude, conservando ciò che aveva, e lo slave si apre e lo mostra. I due non sono mai trasparenti insieme, quindi l'ingresso non può mai correre dritto fino all'uscita. L'effetto è che l'uscita cambia solo sul fronte di salita: il flip-flop è sensibile al fronte.
+Per il docente: Flip-flop master-slave. La presentazione originale mostrava la versione JK, fatta di due latch JK sincroni; la versione D è quella usata nei registri di un processore.</a:t>
             </a:r>
             <a:endParaRPr lang="en-US" dirty="0"/>
           </a:p>
@@ -1108,8 +1108,8 @@
           <a:p>
             <a:r>
               <a:rPr lang="en-US" dirty="0"/>
-              <a:t>Un riepilogo degli elementi di memoria. La colonna stato prossimo dà la regola in forma compatta, dove Q+ è lo stato dopo il cambio; l'ultima colonna dice quando il cambio può avvenire: in ogni momento per il latch semplice, durante il livello attivo per i latch sincroni, sul fronte per i flip-flop. Il flip-flop T, che commuta quando T vale 1, è un JK con i due ingressi uniti. Tenete a mente la riga del flip-flop D: è l'elemento di memoria dei processori di oggi.
-Per il docente: Q+ è lo stato prossimo (tabella caratteristica). Un flip-flop T è un JK con J = K = T. Il flip-flop D è l'elemento di memoria standard dei processori di oggi.</a:t>
+              <a:t>La differenza, vista sulle forme d'onda. Il clock e l'ingresso D sono gli stessi per entrambi. L'uscita del latch segue D per tutta la fase alta del clock: cambia a metà di una fase. L'uscita del flip-flop cambia solo sui fronti di salita, prendendo il valore che D ha in quell'istante; gli impulsi brevi di D tra due fronti sono ignorati. L'uscita del flip-flop è ferma per un intero periodo, che è esattamente ciò che serve a un registro di stato.
+Per il docente: Sensibile al livello contro sensibile al fronte. Le forme d'onda sono calcolate, non disegnate a mano: l'uscita del latch cambia a metà di una fase alta, quella del flip-flop solo sui fronti di salita.</a:t>
             </a:r>
             <a:endParaRPr lang="en-US" dirty="0"/>
           </a:p>
@@ -3298,7 +3298,63 @@
       </p:sp>
       <p:sp>
         <p:nvSpPr>
-          <p:cNvPr id="12" name="Shape 10"/>
+          <p:cNvPr id="12" name="Text 10"/>
+          <p:cNvSpPr txBox="1"/>
+          <p:nvPr/>
+        </p:nvSpPr>
+        <p:spPr>
+          <a:xfrm>
+            <a:off x="4693615" y="566928"/>
+            <a:ext cx="6949440" cy="640080"/>
+          </a:xfrm>
+          <a:prstGeom prst="rect">
+            <a:avLst/>
+          </a:prstGeom>
+          <a:noFill/>
+          <a:ln/>
+        </p:spPr>
+        <p:txBody>
+          <a:bodyPr wrap="square" lIns="0" tIns="0" rIns="0" bIns="0" rtlCol="0" anchor="t"/>
+          <a:lstStyle/>
+          <a:p>
+            <a:pPr algn="r" indent="0" marL="0">
+              <a:buNone/>
+            </a:pPr>
+            <a:r>
+              <a:rPr lang="en-US" sz="1300" dirty="0">
+                <a:solidFill>
+                  <a:srgbClr val="CFE3EA"/>
+                </a:solidFill>
+                <a:latin typeface="Calibri" pitchFamily="34" charset="0"/>
+                <a:ea typeface="Calibri" pitchFamily="34" charset="-122"/>
+                <a:cs typeface="Calibri" pitchFamily="34" charset="-120"/>
+              </a:rPr>
+              <a:t>Presentazione della lezione. I listati, il programma completo e come provarlo sono nella presentazione del codice:</a:t>
+            </a:r>
+            <a:endParaRPr lang="en-US" sz="1300" dirty="0"/>
+          </a:p>
+          <a:p>
+            <a:pPr algn="r" indent="0" marL="0">
+              <a:buNone/>
+            </a:pPr>
+            <a:r>
+              <a:rPr lang="en-US" sz="1300" dirty="0">
+                <a:solidFill>
+                  <a:srgbClr val="CFE3EA"/>
+                </a:solidFill>
+                <a:latin typeface="Calibri" pitchFamily="34" charset="0"/>
+                <a:ea typeface="Calibri" pitchFamily="34" charset="-122"/>
+                <a:cs typeface="Calibri" pitchFamily="34" charset="-120"/>
+              </a:rPr>
+              <a:t>13-Architettura_dei_Calcolatori-Macchine_Sequenziali-Codice.pptx</a:t>
+            </a:r>
+            <a:endParaRPr lang="en-US" sz="1300" dirty="0"/>
+          </a:p>
+        </p:txBody>
+      </p:sp>
+      <p:sp>
+        <p:nvSpPr>
+          <p:cNvPr id="13" name="Shape 11"/>
           <p:cNvSpPr/>
           <p:nvPr/>
         </p:nvSpPr>
@@ -3325,7 +3381,7 @@
       </p:sp>
       <p:pic>
         <p:nvPicPr>
-          <p:cNvPr id="13" name="Image 0" descr="/Users/raffaelemontella/devel/riscv-prg32/computer-architecture-with-prg32/tools/assets/game_pacman.png">    </p:cNvPr>
+          <p:cNvPr id="14" name="Image 0" descr="/Users/raffaelemontella/devel/riscv-prg32/computer-architecture-with-prg32/tools/assets/game_pacman.png">    </p:cNvPr>
           <p:cNvPicPr>
             <a:picLocks noChangeAspect="1"/>
           </p:cNvPicPr>
@@ -3821,7 +3877,7 @@
                 <a:ea typeface="Cambria" pitchFamily="34" charset="-122"/>
                 <a:cs typeface="Cambria" pitchFamily="34" charset="-120"/>
               </a:rPr>
-              <a:t>Latch sincroni: si aggiunge un clock</a:t>
+              <a:t>Perché S = R = 1 non è ammesso</a:t>
             </a:r>
             <a:endParaRPr lang="en-US" sz="3200" dirty="0"/>
           </a:p>
@@ -3835,97 +3891,7 @@
         </p:nvSpPr>
         <p:spPr>
           <a:xfrm>
-            <a:off x="6492240" y="1417320"/>
-            <a:ext cx="5150815" cy="4754880"/>
-          </a:xfrm>
-          <a:prstGeom prst="roundRect">
-            <a:avLst>
-              <a:gd name="adj" fmla="val 1538"/>
-            </a:avLst>
-          </a:prstGeom>
-          <a:solidFill>
-            <a:srgbClr val="EEF2F4"/>
-          </a:solidFill>
-          <a:ln w="12700">
-            <a:solidFill>
-              <a:srgbClr val="EEF2F4"/>
-            </a:solidFill>
-            <a:prstDash val="solid"/>
-          </a:ln>
-        </p:spPr>
-      </p:sp>
-      <p:pic>
-        <p:nvPicPr>
-          <p:cNvPr id="5" name="Image 0" descr="preencoded.png">    </p:cNvPr>
-          <p:cNvPicPr>
-            <a:picLocks noChangeAspect="1"/>
-          </p:cNvPicPr>
-          <p:nvPr/>
-        </p:nvPicPr>
-        <p:blipFill>
-          <a:blip r:embed="rId1"/>
-          <a:stretch>
-            <a:fillRect/>
-          </a:stretch>
-        </p:blipFill>
-        <p:spPr>
-          <a:xfrm>
-            <a:off x="6629400" y="2370572"/>
-            <a:ext cx="4876495" cy="2208296"/>
-          </a:xfrm>
-          <a:prstGeom prst="rect">
-            <a:avLst/>
-          </a:prstGeom>
-        </p:spPr>
-      </p:pic>
-      <p:sp>
-        <p:nvSpPr>
-          <p:cNvPr id="6" name="Text 2"/>
-          <p:cNvSpPr txBox="1"/>
-          <p:nvPr/>
-        </p:nvSpPr>
-        <p:spPr>
-          <a:xfrm>
-            <a:off x="6629400" y="5349240"/>
-            <a:ext cx="4876495" cy="640080"/>
-          </a:xfrm>
-          <a:prstGeom prst="rect">
-            <a:avLst/>
-          </a:prstGeom>
-          <a:noFill/>
-          <a:ln/>
-        </p:spPr>
-        <p:txBody>
-          <a:bodyPr wrap="square" lIns="0" tIns="0" rIns="0" bIns="0" rtlCol="0" anchor="ctr"/>
-          <a:lstStyle/>
-          <a:p>
-            <a:pPr algn="ctr" indent="0" marL="0">
-              <a:buNone/>
-            </a:pPr>
-            <a:r>
-              <a:rPr lang="en-US" sz="1350" i="1" dirty="0">
-                <a:solidFill>
-                  <a:srgbClr val="5B6B78"/>
-                </a:solidFill>
-                <a:latin typeface="Calibri" pitchFamily="34" charset="0"/>
-                <a:ea typeface="Calibri" pitchFamily="34" charset="-122"/>
-                <a:cs typeface="Calibri" pitchFamily="34" charset="-120"/>
-              </a:rPr>
-              <a:t>Un latch SR sincrono: gli ingressi di eccitazione passano per due porte AND controllate da CK</a:t>
-            </a:r>
-            <a:endParaRPr lang="en-US" sz="1350" dirty="0"/>
-          </a:p>
-        </p:txBody>
-      </p:sp>
-      <p:sp>
-        <p:nvSpPr>
-          <p:cNvPr id="7" name="Shape 3"/>
-          <p:cNvSpPr/>
-          <p:nvPr/>
-        </p:nvSpPr>
-        <p:spPr>
-          <a:xfrm>
-            <a:off x="548640" y="1508252"/>
+            <a:off x="548640" y="1515999"/>
             <a:ext cx="146304" cy="146304"/>
           </a:xfrm>
           <a:prstGeom prst="rect">
@@ -3944,14 +3910,14 @@
       </p:sp>
       <p:sp>
         <p:nvSpPr>
-          <p:cNvPr id="8" name="Text 4"/>
+          <p:cNvPr id="4" name="Text 2"/>
           <p:cNvSpPr txBox="1"/>
           <p:nvPr/>
         </p:nvSpPr>
         <p:spPr>
           <a:xfrm>
             <a:off x="932688" y="1417320"/>
-            <a:ext cx="5285232" cy="929640"/>
+            <a:ext cx="6565392" cy="650748"/>
           </a:xfrm>
           <a:prstGeom prst="rect">
             <a:avLst/>
@@ -3970,7 +3936,7 @@
               <a:buNone/>
             </a:pPr>
             <a:r>
-              <a:rPr lang="en-US" sz="2000" dirty="0">
+              <a:rPr lang="en-US" sz="2100" dirty="0">
                 <a:solidFill>
                   <a:srgbClr val="1B2530"/>
                 </a:solidFill>
@@ -3978,21 +3944,21 @@
                 <a:ea typeface="Calibri" pitchFamily="34" charset="-122"/>
                 <a:cs typeface="Calibri" pitchFamily="34" charset="-120"/>
               </a:rPr>
-              <a:t>Sistemi asincroni: le uscite possono cambiare ogni volta che cambia un ingresso</a:t>
-            </a:r>
-            <a:endParaRPr lang="en-US" sz="2000" dirty="0"/>
-          </a:p>
-        </p:txBody>
-      </p:sp>
-      <p:sp>
-        <p:nvSpPr>
-          <p:cNvPr id="9" name="Shape 5"/>
+              <a:t>Con entrambi gli ingressi a 1 entrambe le porte NOR danno 0: Q e Q' non sono più complementari</a:t>
+            </a:r>
+            <a:endParaRPr lang="en-US" sz="2100" dirty="0"/>
+          </a:p>
+        </p:txBody>
+      </p:sp>
+      <p:sp>
+        <p:nvSpPr>
+          <p:cNvPr id="5" name="Shape 3"/>
           <p:cNvSpPr/>
           <p:nvPr/>
         </p:nvSpPr>
         <p:spPr>
           <a:xfrm>
-            <a:off x="548640" y="2614337"/>
+            <a:off x="548640" y="2379345"/>
             <a:ext cx="146304" cy="146304"/>
           </a:xfrm>
           <a:prstGeom prst="rect">
@@ -4011,14 +3977,14 @@
       </p:sp>
       <p:sp>
         <p:nvSpPr>
-          <p:cNvPr id="10" name="Text 6"/>
+          <p:cNvPr id="6" name="Text 4"/>
           <p:cNvSpPr txBox="1"/>
           <p:nvPr/>
         </p:nvSpPr>
         <p:spPr>
           <a:xfrm>
-            <a:off x="932688" y="2523405"/>
-            <a:ext cx="5285232" cy="929640"/>
+            <a:off x="932688" y="2280666"/>
+            <a:ext cx="6565392" cy="976122"/>
           </a:xfrm>
           <a:prstGeom prst="rect">
             <a:avLst/>
@@ -4037,7 +4003,7 @@
               <a:buNone/>
             </a:pPr>
             <a:r>
-              <a:rPr lang="en-US" sz="2000" dirty="0">
+              <a:rPr lang="en-US" sz="2100" dirty="0">
                 <a:solidFill>
                   <a:srgbClr val="1B2530"/>
                 </a:solidFill>
@@ -4045,21 +4011,21 @@
                 <a:ea typeface="Calibri" pitchFamily="34" charset="-122"/>
                 <a:cs typeface="Calibri" pitchFamily="34" charset="-120"/>
               </a:rPr>
-              <a:t>Sistemi sincroni: l'istante in cui le uscite possono cambiare è deciso dal clock</a:t>
-            </a:r>
-            <a:endParaRPr lang="en-US" sz="2000" dirty="0"/>
-          </a:p>
-        </p:txBody>
-      </p:sp>
-      <p:sp>
-        <p:nvSpPr>
-          <p:cNvPr id="11" name="Shape 7"/>
+              <a:t>Se poi S e R tornano a 0 insieme, le due porte fanno a gara: lo stato finale dipende da quale è più veloce</a:t>
+            </a:r>
+            <a:endParaRPr lang="en-US" sz="2100" dirty="0"/>
+          </a:p>
+        </p:txBody>
+      </p:sp>
+      <p:sp>
+        <p:nvSpPr>
+          <p:cNvPr id="7" name="Shape 5"/>
           <p:cNvSpPr/>
           <p:nvPr/>
         </p:nvSpPr>
         <p:spPr>
           <a:xfrm>
-            <a:off x="548640" y="3720423"/>
+            <a:off x="548640" y="3568065"/>
             <a:ext cx="146304" cy="146304"/>
           </a:xfrm>
           <a:prstGeom prst="rect">
@@ -4078,14 +4044,14 @@
       </p:sp>
       <p:sp>
         <p:nvSpPr>
-          <p:cNvPr id="12" name="Text 8"/>
+          <p:cNvPr id="8" name="Text 6"/>
           <p:cNvSpPr txBox="1"/>
           <p:nvPr/>
         </p:nvSpPr>
         <p:spPr>
           <a:xfrm>
-            <a:off x="932688" y="3629491"/>
-            <a:ext cx="5285232" cy="1746504"/>
+            <a:off x="932688" y="3469386"/>
+            <a:ext cx="6565392" cy="650748"/>
           </a:xfrm>
           <a:prstGeom prst="rect">
             <a:avLst/>
@@ -4104,7 +4070,7 @@
               <a:buNone/>
             </a:pPr>
             <a:r>
-              <a:rPr lang="en-US" sz="2000" dirty="0">
+              <a:rPr lang="en-US" sz="2100" dirty="0">
                 <a:solidFill>
                   <a:srgbClr val="1B2530"/>
                 </a:solidFill>
@@ -4112,61 +4078,21 @@
                 <a:ea typeface="Calibri" pitchFamily="34" charset="-122"/>
                 <a:cs typeface="Calibri" pitchFamily="34" charset="-120"/>
               </a:rPr>
-              <a:t>In un latch SR sincrono, S e R sono messi in AND con il clock</a:t>
-            </a:r>
-            <a:endParaRPr lang="en-US" sz="2000" dirty="0"/>
-          </a:p>
-          <a:p>
-            <a:pPr indent="0" marL="0">
-              <a:spcAft>
-                <a:spcPts val="200"/>
-              </a:spcAft>
-              <a:buNone/>
-            </a:pPr>
-            <a:r>
-              <a:rPr lang="en-US" sz="1700" dirty="0">
-                <a:solidFill>
-                  <a:srgbClr val="5B6B78"/>
-                </a:solidFill>
-                <a:latin typeface="Calibri" pitchFamily="34" charset="0"/>
-                <a:ea typeface="Calibri" pitchFamily="34" charset="-122"/>
-                <a:cs typeface="Calibri" pitchFamily="34" charset="-120"/>
-              </a:rPr>
-              <a:t>– CK = 0: entrambe le porte AND danno 0 e il latch non può cambiare stato</a:t>
-            </a:r>
-            <a:endParaRPr lang="en-US" sz="2000" dirty="0"/>
-          </a:p>
-          <a:p>
-            <a:pPr indent="0" marL="0">
-              <a:spcAft>
-                <a:spcPts val="200"/>
-              </a:spcAft>
-              <a:buNone/>
-            </a:pPr>
-            <a:r>
-              <a:rPr lang="en-US" sz="1700" dirty="0">
-                <a:solidFill>
-                  <a:srgbClr val="5B6B78"/>
-                </a:solidFill>
-                <a:latin typeface="Calibri" pitchFamily="34" charset="0"/>
-                <a:ea typeface="Calibri" pitchFamily="34" charset="-122"/>
-                <a:cs typeface="Calibri" pitchFamily="34" charset="-120"/>
-              </a:rPr>
-              <a:t>– CK = 1: il latch è sensibile a S e R, esattamente come quello asincrono</a:t>
-            </a:r>
-            <a:endParaRPr lang="en-US" sz="2000" dirty="0"/>
-          </a:p>
-        </p:txBody>
-      </p:sp>
-      <p:sp>
-        <p:nvSpPr>
-          <p:cNvPr id="13" name="Shape 9"/>
+              <a:t>L'uscita è imprevedibile, e il latch può perfino oscillare</a:t>
+            </a:r>
+            <a:endParaRPr lang="en-US" sz="2100" dirty="0"/>
+          </a:p>
+        </p:txBody>
+      </p:sp>
+      <p:sp>
+        <p:nvSpPr>
+          <p:cNvPr id="9" name="Shape 7"/>
           <p:cNvSpPr/>
           <p:nvPr/>
         </p:nvSpPr>
         <p:spPr>
           <a:xfrm>
-            <a:off x="548640" y="5643372"/>
+            <a:off x="548640" y="4431411"/>
             <a:ext cx="146304" cy="146304"/>
           </a:xfrm>
           <a:prstGeom prst="rect">
@@ -4185,14 +4111,14 @@
       </p:sp>
       <p:sp>
         <p:nvSpPr>
-          <p:cNvPr id="14" name="Text 10"/>
+          <p:cNvPr id="10" name="Text 8"/>
           <p:cNvSpPr txBox="1"/>
           <p:nvPr/>
         </p:nvSpPr>
         <p:spPr>
           <a:xfrm>
-            <a:off x="932688" y="5552440"/>
-            <a:ext cx="5285232" cy="619760"/>
+            <a:off x="932688" y="4332732"/>
+            <a:ext cx="6565392" cy="976122"/>
           </a:xfrm>
           <a:prstGeom prst="rect">
             <a:avLst/>
@@ -4211,7 +4137,7 @@
               <a:buNone/>
             </a:pPr>
             <a:r>
-              <a:rPr lang="en-US" sz="2000" dirty="0">
+              <a:rPr lang="en-US" sz="2100" dirty="0">
                 <a:solidFill>
                   <a:srgbClr val="1B2530"/>
                 </a:solidFill>
@@ -4219,9 +4145,181 @@
                 <a:ea typeface="Calibri" pitchFamily="34" charset="-122"/>
                 <a:cs typeface="Calibri" pitchFamily="34" charset="-120"/>
               </a:rPr>
-              <a:t>Il clock decide quando gli ingressi vengono ascoltati</a:t>
-            </a:r>
-            <a:endParaRPr lang="en-US" sz="2000" dirty="0"/>
+              <a:t>S e R si chiamano ingressi di eccitazione; il progettista deve garantire che non siano mai a 1 insieme</a:t>
+            </a:r>
+            <a:endParaRPr lang="en-US" sz="2100" dirty="0"/>
+          </a:p>
+        </p:txBody>
+      </p:sp>
+      <p:sp>
+        <p:nvSpPr>
+          <p:cNvPr id="11" name="Shape 9"/>
+          <p:cNvSpPr/>
+          <p:nvPr/>
+        </p:nvSpPr>
+        <p:spPr>
+          <a:xfrm>
+            <a:off x="548640" y="5620131"/>
+            <a:ext cx="146304" cy="146304"/>
+          </a:xfrm>
+          <a:prstGeom prst="rect">
+            <a:avLst/>
+          </a:prstGeom>
+          <a:solidFill>
+            <a:srgbClr val="0E7C86"/>
+          </a:solidFill>
+          <a:ln w="12700">
+            <a:solidFill>
+              <a:srgbClr val="0E7C86"/>
+            </a:solidFill>
+            <a:prstDash val="solid"/>
+          </a:ln>
+        </p:spPr>
+      </p:sp>
+      <p:sp>
+        <p:nvSpPr>
+          <p:cNvPr id="12" name="Text 10"/>
+          <p:cNvSpPr txBox="1"/>
+          <p:nvPr/>
+        </p:nvSpPr>
+        <p:spPr>
+          <a:xfrm>
+            <a:off x="932688" y="5521452"/>
+            <a:ext cx="6565392" cy="650748"/>
+          </a:xfrm>
+          <a:prstGeom prst="rect">
+            <a:avLst/>
+          </a:prstGeom>
+          <a:noFill/>
+          <a:ln/>
+        </p:spPr>
+        <p:txBody>
+          <a:bodyPr wrap="square" lIns="0" tIns="0" rIns="0" bIns="0" rtlCol="0" anchor="t"/>
+          <a:lstStyle/>
+          <a:p>
+            <a:pPr indent="0" marL="0">
+              <a:spcAft>
+                <a:spcPts val="200"/>
+              </a:spcAft>
+              <a:buNone/>
+            </a:pPr>
+            <a:r>
+              <a:rPr lang="en-US" sz="2100" dirty="0">
+                <a:solidFill>
+                  <a:srgbClr val="1B2530"/>
+                </a:solidFill>
+                <a:latin typeface="Calibri" pitchFamily="34" charset="0"/>
+                <a:ea typeface="Calibri" pitchFamily="34" charset="-122"/>
+                <a:cs typeface="Calibri" pitchFamily="34" charset="-120"/>
+              </a:rPr>
+              <a:t>Gli elementi JK e D esistono per eliminare questo problema</a:t>
+            </a:r>
+            <a:endParaRPr lang="en-US" sz="2100" dirty="0"/>
+          </a:p>
+        </p:txBody>
+      </p:sp>
+      <p:sp>
+        <p:nvSpPr>
+          <p:cNvPr id="13" name="Shape 11"/>
+          <p:cNvSpPr/>
+          <p:nvPr/>
+        </p:nvSpPr>
+        <p:spPr>
+          <a:xfrm>
+            <a:off x="7863840" y="1417320"/>
+            <a:ext cx="3779215" cy="4754880"/>
+          </a:xfrm>
+          <a:prstGeom prst="roundRect">
+            <a:avLst>
+              <a:gd name="adj" fmla="val 1936"/>
+            </a:avLst>
+          </a:prstGeom>
+          <a:solidFill>
+            <a:srgbClr val="1B2530"/>
+          </a:solidFill>
+          <a:ln w="12700">
+            <a:solidFill>
+              <a:srgbClr val="1B2530"/>
+            </a:solidFill>
+            <a:prstDash val="solid"/>
+          </a:ln>
+        </p:spPr>
+      </p:sp>
+      <p:sp>
+        <p:nvSpPr>
+          <p:cNvPr id="14" name="Text 12"/>
+          <p:cNvSpPr txBox="1"/>
+          <p:nvPr/>
+        </p:nvSpPr>
+        <p:spPr>
+          <a:xfrm>
+            <a:off x="8046720" y="2148840"/>
+            <a:ext cx="3413455" cy="1828800"/>
+          </a:xfrm>
+          <a:prstGeom prst="rect">
+            <a:avLst/>
+          </a:prstGeom>
+          <a:noFill/>
+          <a:ln/>
+        </p:spPr>
+        <p:txBody>
+          <a:bodyPr wrap="square" lIns="0" tIns="0" rIns="0" bIns="0" rtlCol="0" anchor="ctr"/>
+          <a:lstStyle/>
+          <a:p>
+            <a:pPr algn="ctr" indent="0" marL="0">
+              <a:buNone/>
+            </a:pPr>
+            <a:r>
+              <a:rPr lang="en-US" sz="5900" b="1" dirty="0">
+                <a:solidFill>
+                  <a:srgbClr val="FFFFFF"/>
+                </a:solidFill>
+                <a:latin typeface="Cambria" pitchFamily="34" charset="0"/>
+                <a:ea typeface="Cambria" pitchFamily="34" charset="-122"/>
+                <a:cs typeface="Cambria" pitchFamily="34" charset="-120"/>
+              </a:rPr>
+              <a:t>S . R = 0</a:t>
+            </a:r>
+            <a:endParaRPr lang="en-US" sz="5900" dirty="0"/>
+          </a:p>
+        </p:txBody>
+      </p:sp>
+      <p:sp>
+        <p:nvSpPr>
+          <p:cNvPr id="15" name="Text 13"/>
+          <p:cNvSpPr txBox="1"/>
+          <p:nvPr/>
+        </p:nvSpPr>
+        <p:spPr>
+          <a:xfrm>
+            <a:off x="8138160" y="4160520"/>
+            <a:ext cx="3230575" cy="1554480"/>
+          </a:xfrm>
+          <a:prstGeom prst="rect">
+            <a:avLst/>
+          </a:prstGeom>
+          <a:noFill/>
+          <a:ln/>
+        </p:spPr>
+        <p:txBody>
+          <a:bodyPr wrap="square" lIns="0" tIns="0" rIns="0" bIns="0" rtlCol="0" anchor="t"/>
+          <a:lstStyle/>
+          <a:p>
+            <a:pPr algn="ctr" indent="0" marL="0">
+              <a:buNone/>
+            </a:pPr>
+            <a:r>
+              <a:rPr lang="en-US" sz="1900" dirty="0">
+                <a:solidFill>
+                  <a:srgbClr val="CFE3EA"/>
+                </a:solidFill>
+                <a:latin typeface="Calibri" pitchFamily="34" charset="0"/>
+                <a:ea typeface="Calibri" pitchFamily="34" charset="-122"/>
+                <a:cs typeface="Calibri" pitchFamily="34" charset="-120"/>
+              </a:rPr>
+              <a:t>la condizione che deve rispettare ogni circuito che pilota un latch SR</a:t>
+            </a:r>
+            <a:endParaRPr lang="en-US" sz="1900" dirty="0"/>
           </a:p>
         </p:txBody>
       </p:sp>
@@ -4333,6 +4431,518 @@
                 <a:ea typeface="Cambria" pitchFamily="34" charset="-122"/>
                 <a:cs typeface="Cambria" pitchFamily="34" charset="-120"/>
               </a:rPr>
+              <a:t>Latch sincroni: si aggiunge un clock</a:t>
+            </a:r>
+            <a:endParaRPr lang="en-US" sz="3200" dirty="0"/>
+          </a:p>
+        </p:txBody>
+      </p:sp>
+      <p:sp>
+        <p:nvSpPr>
+          <p:cNvPr id="3" name="Shape 1"/>
+          <p:cNvSpPr/>
+          <p:nvPr/>
+        </p:nvSpPr>
+        <p:spPr>
+          <a:xfrm>
+            <a:off x="6492240" y="1417320"/>
+            <a:ext cx="5150815" cy="4754880"/>
+          </a:xfrm>
+          <a:prstGeom prst="roundRect">
+            <a:avLst>
+              <a:gd name="adj" fmla="val 1538"/>
+            </a:avLst>
+          </a:prstGeom>
+          <a:solidFill>
+            <a:srgbClr val="EEF2F4"/>
+          </a:solidFill>
+          <a:ln w="12700">
+            <a:solidFill>
+              <a:srgbClr val="EEF2F4"/>
+            </a:solidFill>
+            <a:prstDash val="solid"/>
+          </a:ln>
+        </p:spPr>
+      </p:sp>
+      <p:pic>
+        <p:nvPicPr>
+          <p:cNvPr id="5" name="Image 0" descr="preencoded.png">    </p:cNvPr>
+          <p:cNvPicPr>
+            <a:picLocks noChangeAspect="1"/>
+          </p:cNvPicPr>
+          <p:nvPr/>
+        </p:nvPicPr>
+        <p:blipFill>
+          <a:blip r:embed="rId1"/>
+          <a:stretch>
+            <a:fillRect/>
+          </a:stretch>
+        </p:blipFill>
+        <p:spPr>
+          <a:xfrm>
+            <a:off x="6629400" y="2370572"/>
+            <a:ext cx="4876495" cy="2208296"/>
+          </a:xfrm>
+          <a:prstGeom prst="rect">
+            <a:avLst/>
+          </a:prstGeom>
+        </p:spPr>
+      </p:pic>
+      <p:sp>
+        <p:nvSpPr>
+          <p:cNvPr id="6" name="Text 2"/>
+          <p:cNvSpPr txBox="1"/>
+          <p:nvPr/>
+        </p:nvSpPr>
+        <p:spPr>
+          <a:xfrm>
+            <a:off x="6629400" y="5349240"/>
+            <a:ext cx="4876495" cy="640080"/>
+          </a:xfrm>
+          <a:prstGeom prst="rect">
+            <a:avLst/>
+          </a:prstGeom>
+          <a:noFill/>
+          <a:ln/>
+        </p:spPr>
+        <p:txBody>
+          <a:bodyPr wrap="square" lIns="0" tIns="0" rIns="0" bIns="0" rtlCol="0" anchor="ctr"/>
+          <a:lstStyle/>
+          <a:p>
+            <a:pPr algn="ctr" indent="0" marL="0">
+              <a:buNone/>
+            </a:pPr>
+            <a:r>
+              <a:rPr lang="en-US" sz="1350" i="1" dirty="0">
+                <a:solidFill>
+                  <a:srgbClr val="5B6B78"/>
+                </a:solidFill>
+                <a:latin typeface="Calibri" pitchFamily="34" charset="0"/>
+                <a:ea typeface="Calibri" pitchFamily="34" charset="-122"/>
+                <a:cs typeface="Calibri" pitchFamily="34" charset="-120"/>
+              </a:rPr>
+              <a:t>Un latch SR sincrono: gli ingressi di eccitazione passano per due porte AND controllate da CK</a:t>
+            </a:r>
+            <a:endParaRPr lang="en-US" sz="1350" dirty="0"/>
+          </a:p>
+        </p:txBody>
+      </p:sp>
+      <p:sp>
+        <p:nvSpPr>
+          <p:cNvPr id="7" name="Shape 3"/>
+          <p:cNvSpPr/>
+          <p:nvPr/>
+        </p:nvSpPr>
+        <p:spPr>
+          <a:xfrm>
+            <a:off x="548640" y="1508252"/>
+            <a:ext cx="146304" cy="146304"/>
+          </a:xfrm>
+          <a:prstGeom prst="rect">
+            <a:avLst/>
+          </a:prstGeom>
+          <a:solidFill>
+            <a:srgbClr val="0E7C86"/>
+          </a:solidFill>
+          <a:ln w="12700">
+            <a:solidFill>
+              <a:srgbClr val="0E7C86"/>
+            </a:solidFill>
+            <a:prstDash val="solid"/>
+          </a:ln>
+        </p:spPr>
+      </p:sp>
+      <p:sp>
+        <p:nvSpPr>
+          <p:cNvPr id="8" name="Text 4"/>
+          <p:cNvSpPr txBox="1"/>
+          <p:nvPr/>
+        </p:nvSpPr>
+        <p:spPr>
+          <a:xfrm>
+            <a:off x="932688" y="1417320"/>
+            <a:ext cx="5285232" cy="929640"/>
+          </a:xfrm>
+          <a:prstGeom prst="rect">
+            <a:avLst/>
+          </a:prstGeom>
+          <a:noFill/>
+          <a:ln/>
+        </p:spPr>
+        <p:txBody>
+          <a:bodyPr wrap="square" lIns="0" tIns="0" rIns="0" bIns="0" rtlCol="0" anchor="t"/>
+          <a:lstStyle/>
+          <a:p>
+            <a:pPr indent="0" marL="0">
+              <a:spcAft>
+                <a:spcPts val="200"/>
+              </a:spcAft>
+              <a:buNone/>
+            </a:pPr>
+            <a:r>
+              <a:rPr lang="en-US" sz="2000" dirty="0">
+                <a:solidFill>
+                  <a:srgbClr val="1B2530"/>
+                </a:solidFill>
+                <a:latin typeface="Calibri" pitchFamily="34" charset="0"/>
+                <a:ea typeface="Calibri" pitchFamily="34" charset="-122"/>
+                <a:cs typeface="Calibri" pitchFamily="34" charset="-120"/>
+              </a:rPr>
+              <a:t>Sistemi asincroni: le uscite possono cambiare ogni volta che cambia un ingresso</a:t>
+            </a:r>
+            <a:endParaRPr lang="en-US" sz="2000" dirty="0"/>
+          </a:p>
+        </p:txBody>
+      </p:sp>
+      <p:sp>
+        <p:nvSpPr>
+          <p:cNvPr id="9" name="Shape 5"/>
+          <p:cNvSpPr/>
+          <p:nvPr/>
+        </p:nvSpPr>
+        <p:spPr>
+          <a:xfrm>
+            <a:off x="548640" y="2614337"/>
+            <a:ext cx="146304" cy="146304"/>
+          </a:xfrm>
+          <a:prstGeom prst="rect">
+            <a:avLst/>
+          </a:prstGeom>
+          <a:solidFill>
+            <a:srgbClr val="C7791B"/>
+          </a:solidFill>
+          <a:ln w="12700">
+            <a:solidFill>
+              <a:srgbClr val="C7791B"/>
+            </a:solidFill>
+            <a:prstDash val="solid"/>
+          </a:ln>
+        </p:spPr>
+      </p:sp>
+      <p:sp>
+        <p:nvSpPr>
+          <p:cNvPr id="10" name="Text 6"/>
+          <p:cNvSpPr txBox="1"/>
+          <p:nvPr/>
+        </p:nvSpPr>
+        <p:spPr>
+          <a:xfrm>
+            <a:off x="932688" y="2523405"/>
+            <a:ext cx="5285232" cy="929640"/>
+          </a:xfrm>
+          <a:prstGeom prst="rect">
+            <a:avLst/>
+          </a:prstGeom>
+          <a:noFill/>
+          <a:ln/>
+        </p:spPr>
+        <p:txBody>
+          <a:bodyPr wrap="square" lIns="0" tIns="0" rIns="0" bIns="0" rtlCol="0" anchor="t"/>
+          <a:lstStyle/>
+          <a:p>
+            <a:pPr indent="0" marL="0">
+              <a:spcAft>
+                <a:spcPts val="200"/>
+              </a:spcAft>
+              <a:buNone/>
+            </a:pPr>
+            <a:r>
+              <a:rPr lang="en-US" sz="2000" dirty="0">
+                <a:solidFill>
+                  <a:srgbClr val="1B2530"/>
+                </a:solidFill>
+                <a:latin typeface="Calibri" pitchFamily="34" charset="0"/>
+                <a:ea typeface="Calibri" pitchFamily="34" charset="-122"/>
+                <a:cs typeface="Calibri" pitchFamily="34" charset="-120"/>
+              </a:rPr>
+              <a:t>Sistemi sincroni: l'istante in cui le uscite possono cambiare è deciso dal clock</a:t>
+            </a:r>
+            <a:endParaRPr lang="en-US" sz="2000" dirty="0"/>
+          </a:p>
+        </p:txBody>
+      </p:sp>
+      <p:sp>
+        <p:nvSpPr>
+          <p:cNvPr id="11" name="Shape 7"/>
+          <p:cNvSpPr/>
+          <p:nvPr/>
+        </p:nvSpPr>
+        <p:spPr>
+          <a:xfrm>
+            <a:off x="548640" y="3720423"/>
+            <a:ext cx="146304" cy="146304"/>
+          </a:xfrm>
+          <a:prstGeom prst="rect">
+            <a:avLst/>
+          </a:prstGeom>
+          <a:solidFill>
+            <a:srgbClr val="0E7C86"/>
+          </a:solidFill>
+          <a:ln w="12700">
+            <a:solidFill>
+              <a:srgbClr val="0E7C86"/>
+            </a:solidFill>
+            <a:prstDash val="solid"/>
+          </a:ln>
+        </p:spPr>
+      </p:sp>
+      <p:sp>
+        <p:nvSpPr>
+          <p:cNvPr id="12" name="Text 8"/>
+          <p:cNvSpPr txBox="1"/>
+          <p:nvPr/>
+        </p:nvSpPr>
+        <p:spPr>
+          <a:xfrm>
+            <a:off x="932688" y="3629491"/>
+            <a:ext cx="5285232" cy="1746504"/>
+          </a:xfrm>
+          <a:prstGeom prst="rect">
+            <a:avLst/>
+          </a:prstGeom>
+          <a:noFill/>
+          <a:ln/>
+        </p:spPr>
+        <p:txBody>
+          <a:bodyPr wrap="square" lIns="0" tIns="0" rIns="0" bIns="0" rtlCol="0" anchor="t"/>
+          <a:lstStyle/>
+          <a:p>
+            <a:pPr indent="0" marL="0">
+              <a:spcAft>
+                <a:spcPts val="200"/>
+              </a:spcAft>
+              <a:buNone/>
+            </a:pPr>
+            <a:r>
+              <a:rPr lang="en-US" sz="2000" dirty="0">
+                <a:solidFill>
+                  <a:srgbClr val="1B2530"/>
+                </a:solidFill>
+                <a:latin typeface="Calibri" pitchFamily="34" charset="0"/>
+                <a:ea typeface="Calibri" pitchFamily="34" charset="-122"/>
+                <a:cs typeface="Calibri" pitchFamily="34" charset="-120"/>
+              </a:rPr>
+              <a:t>In un latch SR sincrono, S e R sono messi in AND con il clock</a:t>
+            </a:r>
+            <a:endParaRPr lang="en-US" sz="2000" dirty="0"/>
+          </a:p>
+          <a:p>
+            <a:pPr indent="0" marL="0">
+              <a:spcAft>
+                <a:spcPts val="200"/>
+              </a:spcAft>
+              <a:buNone/>
+            </a:pPr>
+            <a:r>
+              <a:rPr lang="en-US" sz="1700" dirty="0">
+                <a:solidFill>
+                  <a:srgbClr val="5B6B78"/>
+                </a:solidFill>
+                <a:latin typeface="Calibri" pitchFamily="34" charset="0"/>
+                <a:ea typeface="Calibri" pitchFamily="34" charset="-122"/>
+                <a:cs typeface="Calibri" pitchFamily="34" charset="-120"/>
+              </a:rPr>
+              <a:t>– CK = 0: entrambe le porte AND danno 0 e il latch non può cambiare stato</a:t>
+            </a:r>
+            <a:endParaRPr lang="en-US" sz="2000" dirty="0"/>
+          </a:p>
+          <a:p>
+            <a:pPr indent="0" marL="0">
+              <a:spcAft>
+                <a:spcPts val="200"/>
+              </a:spcAft>
+              <a:buNone/>
+            </a:pPr>
+            <a:r>
+              <a:rPr lang="en-US" sz="1700" dirty="0">
+                <a:solidFill>
+                  <a:srgbClr val="5B6B78"/>
+                </a:solidFill>
+                <a:latin typeface="Calibri" pitchFamily="34" charset="0"/>
+                <a:ea typeface="Calibri" pitchFamily="34" charset="-122"/>
+                <a:cs typeface="Calibri" pitchFamily="34" charset="-120"/>
+              </a:rPr>
+              <a:t>– CK = 1: il latch è sensibile a S e R, esattamente come quello asincrono</a:t>
+            </a:r>
+            <a:endParaRPr lang="en-US" sz="2000" dirty="0"/>
+          </a:p>
+        </p:txBody>
+      </p:sp>
+      <p:sp>
+        <p:nvSpPr>
+          <p:cNvPr id="13" name="Shape 9"/>
+          <p:cNvSpPr/>
+          <p:nvPr/>
+        </p:nvSpPr>
+        <p:spPr>
+          <a:xfrm>
+            <a:off x="548640" y="5643372"/>
+            <a:ext cx="146304" cy="146304"/>
+          </a:xfrm>
+          <a:prstGeom prst="rect">
+            <a:avLst/>
+          </a:prstGeom>
+          <a:solidFill>
+            <a:srgbClr val="C7791B"/>
+          </a:solidFill>
+          <a:ln w="12700">
+            <a:solidFill>
+              <a:srgbClr val="C7791B"/>
+            </a:solidFill>
+            <a:prstDash val="solid"/>
+          </a:ln>
+        </p:spPr>
+      </p:sp>
+      <p:sp>
+        <p:nvSpPr>
+          <p:cNvPr id="14" name="Text 10"/>
+          <p:cNvSpPr txBox="1"/>
+          <p:nvPr/>
+        </p:nvSpPr>
+        <p:spPr>
+          <a:xfrm>
+            <a:off x="932688" y="5552440"/>
+            <a:ext cx="5285232" cy="619760"/>
+          </a:xfrm>
+          <a:prstGeom prst="rect">
+            <a:avLst/>
+          </a:prstGeom>
+          <a:noFill/>
+          <a:ln/>
+        </p:spPr>
+        <p:txBody>
+          <a:bodyPr wrap="square" lIns="0" tIns="0" rIns="0" bIns="0" rtlCol="0" anchor="t"/>
+          <a:lstStyle/>
+          <a:p>
+            <a:pPr indent="0" marL="0">
+              <a:spcAft>
+                <a:spcPts val="200"/>
+              </a:spcAft>
+              <a:buNone/>
+            </a:pPr>
+            <a:r>
+              <a:rPr lang="en-US" sz="2000" dirty="0">
+                <a:solidFill>
+                  <a:srgbClr val="1B2530"/>
+                </a:solidFill>
+                <a:latin typeface="Calibri" pitchFamily="34" charset="0"/>
+                <a:ea typeface="Calibri" pitchFamily="34" charset="-122"/>
+                <a:cs typeface="Calibri" pitchFamily="34" charset="-120"/>
+              </a:rPr>
+              <a:t>Il clock decide quando gli ingressi vengono ascoltati</a:t>
+            </a:r>
+            <a:endParaRPr lang="en-US" sz="2000" dirty="0"/>
+          </a:p>
+        </p:txBody>
+      </p:sp>
+      <p:sp>
+        <p:nvSpPr>
+          <p:cNvPr id="25" name="Slide Number Placeholder 0"/>
+          <p:cNvSpPr>
+            <a:spLocks noGrp="1"/>
+          </p:cNvSpPr>
+          <p:nvPr>
+            <p:ph type="sldNum" sz="quarter" idx="4294967295"/>
+          </p:nvPr>
+        </p:nvSpPr>
+        <p:spPr>
+          <a:xfrm>
+            <a:off x="11002975" y="6419088"/>
+            <a:ext cx="640080" cy="274320"/>
+          </a:xfrm>
+          <a:prstGeom prst="rect">
+            <a:avLst/>
+          </a:prstGeom>
+          <a:extLst>
+            <a:ext uri="{C572A759-6A51-4108-AA02-DFA0A04FC94B}">
+              <ma14:wrappingTextBoxFlag xmlns:ma14="http://schemas.microsoft.com/office/mac/drawingml/2011/main" val="0"/>
+            </a:ext>
+          </a:extLst>
+        </p:spPr>
+        <p:txBody>
+          <a:bodyPr/>
+          <a:lstStyle>
+            <a:lvl1pPr>
+              <a:defRPr sz="1000">
+                <a:solidFill>
+                  <a:srgbClr val="5B6B78"/>
+                </a:solidFill>
+                <a:latin typeface="Calibri"/>
+                <a:ea typeface="Calibri"/>
+                <a:cs typeface="Calibri"/>
+              </a:defRPr>
+            </a:lvl1pPr>
+          </a:lstStyle>
+          <a:p>
+            <a:pPr algn="r"/>
+            <a:fld id="{F7021451-1387-4CA6-816F-3879F97B5CBC}" type="slidenum">
+              <a:rPr b="0" lang="en-US"/>
+              <a:t>12</a:t>
+            </a:fld>
+            <a:endParaRPr lang="en-US"/>
+          </a:p>
+        </p:txBody>
+      </p:sp>
+    </p:spTree>
+  </p:cSld>
+  <p:clrMapOvr>
+    <a:masterClrMapping/>
+  </p:clrMapOvr>
+</p:sld>
+</file>
+
+<file path=ppt/slides/slide13.xml><?xml version="1.0" encoding="utf-8"?>
+<p:sld xmlns:a="http://schemas.openxmlformats.org/drawingml/2006/main" xmlns:r="http://schemas.openxmlformats.org/officeDocument/2006/relationships" xmlns:p="http://schemas.openxmlformats.org/presentationml/2006/main">
+  <p:cSld name="Slide 13">
+    <p:spTree>
+      <p:nvGrpSpPr>
+        <p:cNvPr id="1" name=""/>
+        <p:cNvGrpSpPr/>
+        <p:nvPr/>
+      </p:nvGrpSpPr>
+      <p:grpSpPr>
+        <a:xfrm>
+          <a:off x="0" y="0"/>
+          <a:ext cx="0" cy="0"/>
+          <a:chOff x="0" y="0"/>
+          <a:chExt cx="0" cy="0"/>
+        </a:xfrm>
+      </p:grpSpPr>
+      <p:sp>
+        <p:nvSpPr>
+          <p:cNvPr id="2" name="Text 1"/>
+          <p:cNvSpPr/>
+          <p:nvPr>
+            <p:ph idx="101" type="title" hasCustomPrompt="1"/>
+          </p:nvPr>
+        </p:nvSpPr>
+        <p:spPr>
+          <a:xfrm>
+            <a:off x="548640" y="365760"/>
+            <a:ext cx="11094415" cy="868680"/>
+          </a:xfrm>
+          <a:prstGeom prst="rect">
+            <a:avLst/>
+          </a:prstGeom>
+          <a:noFill/>
+          <a:ln/>
+        </p:spPr>
+        <p:txBody>
+          <a:bodyPr wrap="square" lIns="0" tIns="0" rIns="0" bIns="0" rtlCol="0" anchor="ctr"/>
+          <a:lstStyle/>
+          <a:p>
+            <a:pPr algn="l" indent="0" marL="0">
+              <a:buNone/>
+            </a:pPr>
+            <a:r>
+              <a:rPr lang="en-US" sz="3200" b="1" dirty="0">
+                <a:solidFill>
+                  <a:srgbClr val="2E4A62"/>
+                </a:solidFill>
+                <a:latin typeface="Cambria" pitchFamily="34" charset="0"/>
+                <a:ea typeface="Cambria" pitchFamily="34" charset="-122"/>
+                <a:cs typeface="Cambria" pitchFamily="34" charset="-120"/>
+              </a:rPr>
               <a:t>I latch JK e D</a:t>
             </a:r>
             <a:endParaRPr lang="en-US" sz="3200" dirty="0"/>
@@ -4341,7 +4951,7 @@
       </p:sp>
       <p:graphicFrame>
         <p:nvGraphicFramePr>
-          <p:cNvPr id="13" name="Table 0"/>
+          <p:cNvPr id="14" name="Table 0"/>
           <p:cNvGraphicFramePr>
             <a:graphicFrameLocks noGrp="1"/>
           </p:cNvGraphicFramePr>
@@ -5778,1021 +6388,6 @@
             <a:pPr algn="r"/>
             <a:fld id="{F7021451-1387-4CA6-816F-3879F97B5CBC}" type="slidenum">
               <a:rPr b="0" lang="en-US"/>
-              <a:t>12</a:t>
-            </a:fld>
-            <a:endParaRPr lang="en-US"/>
-          </a:p>
-        </p:txBody>
-      </p:sp>
-    </p:spTree>
-  </p:cSld>
-  <p:clrMapOvr>
-    <a:masterClrMapping/>
-  </p:clrMapOvr>
-</p:sld>
-</file>
-
-<file path=ppt/slides/slide13.xml><?xml version="1.0" encoding="utf-8"?>
-<p:sld xmlns:a="http://schemas.openxmlformats.org/drawingml/2006/main" xmlns:r="http://schemas.openxmlformats.org/officeDocument/2006/relationships" xmlns:p="http://schemas.openxmlformats.org/presentationml/2006/main">
-  <p:cSld name="Slide 13">
-    <p:spTree>
-      <p:nvGrpSpPr>
-        <p:cNvPr id="1" name=""/>
-        <p:cNvGrpSpPr/>
-        <p:nvPr/>
-      </p:nvGrpSpPr>
-      <p:grpSpPr>
-        <a:xfrm>
-          <a:off x="0" y="0"/>
-          <a:ext cx="0" cy="0"/>
-          <a:chOff x="0" y="0"/>
-          <a:chExt cx="0" cy="0"/>
-        </a:xfrm>
-      </p:grpSpPr>
-      <p:sp>
-        <p:nvSpPr>
-          <p:cNvPr id="2" name="Text 1"/>
-          <p:cNvSpPr/>
-          <p:nvPr>
-            <p:ph idx="101" type="title" hasCustomPrompt="1"/>
-          </p:nvPr>
-        </p:nvSpPr>
-        <p:spPr>
-          <a:xfrm>
-            <a:off x="548640" y="365760"/>
-            <a:ext cx="11094415" cy="868680"/>
-          </a:xfrm>
-          <a:prstGeom prst="rect">
-            <a:avLst/>
-          </a:prstGeom>
-          <a:noFill/>
-          <a:ln/>
-        </p:spPr>
-        <p:txBody>
-          <a:bodyPr wrap="square" lIns="0" tIns="0" rIns="0" bIns="0" rtlCol="0" anchor="ctr"/>
-          <a:lstStyle/>
-          <a:p>
-            <a:pPr algn="l" indent="0" marL="0">
-              <a:buNone/>
-            </a:pPr>
-            <a:r>
-              <a:rPr lang="en-US" sz="3200" b="1" dirty="0">
-                <a:solidFill>
-                  <a:srgbClr val="2E4A62"/>
-                </a:solidFill>
-                <a:latin typeface="Cambria" pitchFamily="34" charset="0"/>
-                <a:ea typeface="Cambria" pitchFamily="34" charset="-122"/>
-                <a:cs typeface="Cambria" pitchFamily="34" charset="-120"/>
-              </a:rPr>
-              <a:t>Il flip-flop master-slave</a:t>
-            </a:r>
-            <a:endParaRPr lang="en-US" sz="3200" dirty="0"/>
-          </a:p>
-        </p:txBody>
-      </p:sp>
-      <p:sp>
-        <p:nvSpPr>
-          <p:cNvPr id="3" name="Text 1"/>
-          <p:cNvSpPr txBox="1"/>
-          <p:nvPr/>
-        </p:nvSpPr>
-        <p:spPr>
-          <a:xfrm>
-            <a:off x="1371600" y="1874520"/>
-            <a:ext cx="2011680" cy="1463040"/>
-          </a:xfrm>
-          <a:prstGeom prst="roundRect">
-            <a:avLst>
-              <a:gd name="adj" fmla="val 3750"/>
-            </a:avLst>
-          </a:prstGeom>
-          <a:solidFill>
-            <a:srgbClr val="0E7C86"/>
-          </a:solidFill>
-          <a:ln>
-            <a:solidFill>
-              <a:srgbClr val="0E7C86"/>
-            </a:solidFill>
-          </a:ln>
-        </p:spPr>
-        <p:txBody>
-          <a:bodyPr wrap="square" lIns="38100" tIns="38100" rIns="38100" bIns="38100" rtlCol="0" anchor="ctr"/>
-          <a:lstStyle/>
-          <a:p>
-            <a:pPr algn="ctr" indent="0" marL="0">
-              <a:buNone/>
-            </a:pPr>
-            <a:r>
-              <a:rPr lang="en-US" sz="1500" b="1" dirty="0">
-                <a:solidFill>
-                  <a:srgbClr val="FFFFFF"/>
-                </a:solidFill>
-                <a:latin typeface="Calibri" pitchFamily="34" charset="0"/>
-                <a:ea typeface="Calibri" pitchFamily="34" charset="-122"/>
-                <a:cs typeface="Calibri" pitchFamily="34" charset="-120"/>
-              </a:rPr>
-              <a:t>MASTER</a:t>
-            </a:r>
-            <a:endParaRPr lang="en-US" sz="1500" dirty="0"/>
-          </a:p>
-          <a:p>
-            <a:pPr algn="ctr" indent="0" marL="0">
-              <a:buNone/>
-            </a:pPr>
-            <a:r>
-              <a:rPr lang="en-US" sz="1500" b="1" dirty="0">
-                <a:solidFill>
-                  <a:srgbClr val="FFFFFF"/>
-                </a:solidFill>
-                <a:latin typeface="Calibri" pitchFamily="34" charset="0"/>
-                <a:ea typeface="Calibri" pitchFamily="34" charset="-122"/>
-                <a:cs typeface="Calibri" pitchFamily="34" charset="-120"/>
-              </a:rPr>
-              <a:t>latch D</a:t>
-            </a:r>
-            <a:endParaRPr lang="en-US" sz="1500" dirty="0"/>
-          </a:p>
-          <a:p>
-            <a:pPr algn="ctr" indent="0" marL="0">
-              <a:buNone/>
-            </a:pPr>
-            <a:r>
-              <a:rPr lang="en-US" sz="1500" b="1" dirty="0">
-                <a:solidFill>
-                  <a:srgbClr val="FFFFFF"/>
-                </a:solidFill>
-                <a:latin typeface="Calibri" pitchFamily="34" charset="0"/>
-                <a:ea typeface="Calibri" pitchFamily="34" charset="-122"/>
-                <a:cs typeface="Calibri" pitchFamily="34" charset="-120"/>
-              </a:rPr>
-              <a:t>attivo con CK = 0</a:t>
-            </a:r>
-            <a:endParaRPr lang="en-US" sz="1500" dirty="0"/>
-          </a:p>
-        </p:txBody>
-      </p:sp>
-      <p:sp>
-        <p:nvSpPr>
-          <p:cNvPr id="4" name="Text 2"/>
-          <p:cNvSpPr txBox="1"/>
-          <p:nvPr/>
-        </p:nvSpPr>
-        <p:spPr>
-          <a:xfrm>
-            <a:off x="4389120" y="1874520"/>
-            <a:ext cx="2011680" cy="1463040"/>
-          </a:xfrm>
-          <a:prstGeom prst="roundRect">
-            <a:avLst>
-              <a:gd name="adj" fmla="val 3750"/>
-            </a:avLst>
-          </a:prstGeom>
-          <a:solidFill>
-            <a:srgbClr val="C7791B"/>
-          </a:solidFill>
-          <a:ln>
-            <a:solidFill>
-              <a:srgbClr val="C7791B"/>
-            </a:solidFill>
-          </a:ln>
-        </p:spPr>
-        <p:txBody>
-          <a:bodyPr wrap="square" lIns="38100" tIns="38100" rIns="38100" bIns="38100" rtlCol="0" anchor="ctr"/>
-          <a:lstStyle/>
-          <a:p>
-            <a:pPr algn="ctr" indent="0" marL="0">
-              <a:buNone/>
-            </a:pPr>
-            <a:r>
-              <a:rPr lang="en-US" sz="1500" b="1" dirty="0">
-                <a:solidFill>
-                  <a:srgbClr val="FFFFFF"/>
-                </a:solidFill>
-                <a:latin typeface="Calibri" pitchFamily="34" charset="0"/>
-                <a:ea typeface="Calibri" pitchFamily="34" charset="-122"/>
-                <a:cs typeface="Calibri" pitchFamily="34" charset="-120"/>
-              </a:rPr>
-              <a:t>SLAVE</a:t>
-            </a:r>
-            <a:endParaRPr lang="en-US" sz="1500" dirty="0"/>
-          </a:p>
-          <a:p>
-            <a:pPr algn="ctr" indent="0" marL="0">
-              <a:buNone/>
-            </a:pPr>
-            <a:r>
-              <a:rPr lang="en-US" sz="1500" b="1" dirty="0">
-                <a:solidFill>
-                  <a:srgbClr val="FFFFFF"/>
-                </a:solidFill>
-                <a:latin typeface="Calibri" pitchFamily="34" charset="0"/>
-                <a:ea typeface="Calibri" pitchFamily="34" charset="-122"/>
-                <a:cs typeface="Calibri" pitchFamily="34" charset="-120"/>
-              </a:rPr>
-              <a:t>latch D</a:t>
-            </a:r>
-            <a:endParaRPr lang="en-US" sz="1500" dirty="0"/>
-          </a:p>
-          <a:p>
-            <a:pPr algn="ctr" indent="0" marL="0">
-              <a:buNone/>
-            </a:pPr>
-            <a:r>
-              <a:rPr lang="en-US" sz="1500" b="1" dirty="0">
-                <a:solidFill>
-                  <a:srgbClr val="FFFFFF"/>
-                </a:solidFill>
-                <a:latin typeface="Calibri" pitchFamily="34" charset="0"/>
-                <a:ea typeface="Calibri" pitchFamily="34" charset="-122"/>
-                <a:cs typeface="Calibri" pitchFamily="34" charset="-120"/>
-              </a:rPr>
-              <a:t>attivo con CK = 1</a:t>
-            </a:r>
-            <a:endParaRPr lang="en-US" sz="1500" dirty="0"/>
-          </a:p>
-        </p:txBody>
-      </p:sp>
-      <p:sp>
-        <p:nvSpPr>
-          <p:cNvPr id="5" name="Shape 3"/>
-          <p:cNvSpPr/>
-          <p:nvPr/>
-        </p:nvSpPr>
-        <p:spPr>
-          <a:xfrm>
-            <a:off x="640080" y="2331720"/>
-            <a:ext cx="704088" cy="0"/>
-          </a:xfrm>
-          <a:prstGeom prst="line">
-            <a:avLst/>
-          </a:prstGeom>
-          <a:noFill/>
-          <a:ln w="28575">
-            <a:solidFill>
-              <a:srgbClr val="5B6B78"/>
-            </a:solidFill>
-            <a:prstDash val="solid"/>
-            <a:tailEnd type="triangle"/>
-          </a:ln>
-        </p:spPr>
-      </p:sp>
-      <p:sp>
-        <p:nvSpPr>
-          <p:cNvPr id="6" name="Text 4"/>
-          <p:cNvSpPr txBox="1"/>
-          <p:nvPr/>
-        </p:nvSpPr>
-        <p:spPr>
-          <a:xfrm>
-            <a:off x="640080" y="1965960"/>
-            <a:ext cx="457200" cy="274320"/>
-          </a:xfrm>
-          <a:prstGeom prst="rect">
-            <a:avLst/>
-          </a:prstGeom>
-          <a:noFill/>
-          <a:ln/>
-        </p:spPr>
-        <p:txBody>
-          <a:bodyPr wrap="square" lIns="0" tIns="0" rIns="0" bIns="0" rtlCol="0" anchor="t"/>
-          <a:lstStyle/>
-          <a:p>
-            <a:pPr indent="0" marL="0">
-              <a:buNone/>
-            </a:pPr>
-            <a:r>
-              <a:rPr lang="en-US" sz="1700" b="1" dirty="0">
-                <a:solidFill>
-                  <a:srgbClr val="1B2530"/>
-                </a:solidFill>
-                <a:latin typeface="Courier New" pitchFamily="34" charset="0"/>
-                <a:ea typeface="Courier New" pitchFamily="34" charset="-122"/>
-                <a:cs typeface="Courier New" pitchFamily="34" charset="-120"/>
-              </a:rPr>
-              <a:t>D</a:t>
-            </a:r>
-            <a:endParaRPr lang="en-US" sz="1700" dirty="0"/>
-          </a:p>
-        </p:txBody>
-      </p:sp>
-      <p:sp>
-        <p:nvSpPr>
-          <p:cNvPr id="7" name="Shape 5"/>
-          <p:cNvSpPr/>
-          <p:nvPr/>
-        </p:nvSpPr>
-        <p:spPr>
-          <a:xfrm>
-            <a:off x="3410712" y="2331720"/>
-            <a:ext cx="950976" cy="0"/>
-          </a:xfrm>
-          <a:prstGeom prst="line">
-            <a:avLst/>
-          </a:prstGeom>
-          <a:noFill/>
-          <a:ln w="28575">
-            <a:solidFill>
-              <a:srgbClr val="5B6B78"/>
-            </a:solidFill>
-            <a:prstDash val="solid"/>
-            <a:tailEnd type="triangle"/>
-          </a:ln>
-        </p:spPr>
-      </p:sp>
-      <p:sp>
-        <p:nvSpPr>
-          <p:cNvPr id="8" name="Text 6"/>
-          <p:cNvSpPr txBox="1"/>
-          <p:nvPr/>
-        </p:nvSpPr>
-        <p:spPr>
-          <a:xfrm>
-            <a:off x="3566160" y="1965960"/>
-            <a:ext cx="640080" cy="274320"/>
-          </a:xfrm>
-          <a:prstGeom prst="rect">
-            <a:avLst/>
-          </a:prstGeom>
-          <a:noFill/>
-          <a:ln/>
-        </p:spPr>
-        <p:txBody>
-          <a:bodyPr wrap="square" lIns="0" tIns="0" rIns="0" bIns="0" rtlCol="0" anchor="t"/>
-          <a:lstStyle/>
-          <a:p>
-            <a:pPr indent="0" marL="0">
-              <a:buNone/>
-            </a:pPr>
-            <a:r>
-              <a:rPr lang="en-US" sz="1500" b="1" dirty="0">
-                <a:solidFill>
-                  <a:srgbClr val="1B2530"/>
-                </a:solidFill>
-                <a:latin typeface="Courier New" pitchFamily="34" charset="0"/>
-                <a:ea typeface="Courier New" pitchFamily="34" charset="-122"/>
-                <a:cs typeface="Courier New" pitchFamily="34" charset="-120"/>
-              </a:rPr>
-              <a:t>Qm</a:t>
-            </a:r>
-            <a:endParaRPr lang="en-US" sz="1500" dirty="0"/>
-          </a:p>
-        </p:txBody>
-      </p:sp>
-      <p:sp>
-        <p:nvSpPr>
-          <p:cNvPr id="9" name="Shape 7"/>
-          <p:cNvSpPr/>
-          <p:nvPr/>
-        </p:nvSpPr>
-        <p:spPr>
-          <a:xfrm>
-            <a:off x="6428232" y="2331720"/>
-            <a:ext cx="658368" cy="0"/>
-          </a:xfrm>
-          <a:prstGeom prst="line">
-            <a:avLst/>
-          </a:prstGeom>
-          <a:noFill/>
-          <a:ln w="28575">
-            <a:solidFill>
-              <a:srgbClr val="5B6B78"/>
-            </a:solidFill>
-            <a:prstDash val="solid"/>
-            <a:tailEnd type="triangle"/>
-          </a:ln>
-        </p:spPr>
-      </p:sp>
-      <p:sp>
-        <p:nvSpPr>
-          <p:cNvPr id="10" name="Text 8"/>
-          <p:cNvSpPr txBox="1"/>
-          <p:nvPr/>
-        </p:nvSpPr>
-        <p:spPr>
-          <a:xfrm>
-            <a:off x="6629400" y="1965960"/>
-            <a:ext cx="457200" cy="274320"/>
-          </a:xfrm>
-          <a:prstGeom prst="rect">
-            <a:avLst/>
-          </a:prstGeom>
-          <a:noFill/>
-          <a:ln/>
-        </p:spPr>
-        <p:txBody>
-          <a:bodyPr wrap="square" lIns="0" tIns="0" rIns="0" bIns="0" rtlCol="0" anchor="t"/>
-          <a:lstStyle/>
-          <a:p>
-            <a:pPr indent="0" marL="0">
-              <a:buNone/>
-            </a:pPr>
-            <a:r>
-              <a:rPr lang="en-US" sz="1700" b="1" dirty="0">
-                <a:solidFill>
-                  <a:srgbClr val="1B2530"/>
-                </a:solidFill>
-                <a:latin typeface="Courier New" pitchFamily="34" charset="0"/>
-                <a:ea typeface="Courier New" pitchFamily="34" charset="-122"/>
-                <a:cs typeface="Courier New" pitchFamily="34" charset="-120"/>
-              </a:rPr>
-              <a:t>Q</a:t>
-            </a:r>
-            <a:endParaRPr lang="en-US" sz="1700" dirty="0"/>
-          </a:p>
-        </p:txBody>
-      </p:sp>
-      <p:sp>
-        <p:nvSpPr>
-          <p:cNvPr id="11" name="Shape 9"/>
-          <p:cNvSpPr/>
-          <p:nvPr/>
-        </p:nvSpPr>
-        <p:spPr>
-          <a:xfrm>
-            <a:off x="822960" y="4069080"/>
-            <a:ext cx="4572000" cy="0"/>
-          </a:xfrm>
-          <a:prstGeom prst="line">
-            <a:avLst/>
-          </a:prstGeom>
-          <a:noFill/>
-          <a:ln w="28575">
-            <a:solidFill>
-              <a:srgbClr val="B23A48"/>
-            </a:solidFill>
-            <a:prstDash val="solid"/>
-          </a:ln>
-        </p:spPr>
-      </p:sp>
-      <p:sp>
-        <p:nvSpPr>
-          <p:cNvPr id="12" name="Text 10"/>
-          <p:cNvSpPr txBox="1"/>
-          <p:nvPr/>
-        </p:nvSpPr>
-        <p:spPr>
-          <a:xfrm>
-            <a:off x="822960" y="4114800"/>
-            <a:ext cx="640080" cy="274320"/>
-          </a:xfrm>
-          <a:prstGeom prst="rect">
-            <a:avLst/>
-          </a:prstGeom>
-          <a:noFill/>
-          <a:ln/>
-        </p:spPr>
-        <p:txBody>
-          <a:bodyPr wrap="square" lIns="0" tIns="0" rIns="0" bIns="0" rtlCol="0" anchor="t"/>
-          <a:lstStyle/>
-          <a:p>
-            <a:pPr indent="0" marL="0">
-              <a:buNone/>
-            </a:pPr>
-            <a:r>
-              <a:rPr lang="en-US" sz="1500" b="1" dirty="0">
-                <a:solidFill>
-                  <a:srgbClr val="B23A48"/>
-                </a:solidFill>
-                <a:latin typeface="Courier New" pitchFamily="34" charset="0"/>
-                <a:ea typeface="Courier New" pitchFamily="34" charset="-122"/>
-                <a:cs typeface="Courier New" pitchFamily="34" charset="-120"/>
-              </a:rPr>
-              <a:t>CK</a:t>
-            </a:r>
-            <a:endParaRPr lang="en-US" sz="1500" dirty="0"/>
-          </a:p>
-        </p:txBody>
-      </p:sp>
-      <p:sp>
-        <p:nvSpPr>
-          <p:cNvPr id="13" name="Shape 11"/>
-          <p:cNvSpPr/>
-          <p:nvPr/>
-        </p:nvSpPr>
-        <p:spPr>
-          <a:xfrm flipV="1">
-            <a:off x="2377440" y="3364992"/>
-            <a:ext cx="0" cy="704088"/>
-          </a:xfrm>
-          <a:prstGeom prst="line">
-            <a:avLst/>
-          </a:prstGeom>
-          <a:noFill/>
-          <a:ln w="28575">
-            <a:solidFill>
-              <a:srgbClr val="B23A48"/>
-            </a:solidFill>
-            <a:prstDash val="solid"/>
-            <a:tailEnd type="triangle"/>
-          </a:ln>
-        </p:spPr>
-      </p:sp>
-      <p:sp>
-        <p:nvSpPr>
-          <p:cNvPr id="14" name="Shape 12"/>
-          <p:cNvSpPr/>
-          <p:nvPr/>
-        </p:nvSpPr>
-        <p:spPr>
-          <a:xfrm flipV="1">
-            <a:off x="5394960" y="3364992"/>
-            <a:ext cx="0" cy="704088"/>
-          </a:xfrm>
-          <a:prstGeom prst="line">
-            <a:avLst/>
-          </a:prstGeom>
-          <a:noFill/>
-          <a:ln w="28575">
-            <a:solidFill>
-              <a:srgbClr val="B23A48"/>
-            </a:solidFill>
-            <a:prstDash val="solid"/>
-            <a:tailEnd type="triangle"/>
-          </a:ln>
-        </p:spPr>
-      </p:sp>
-      <p:sp>
-        <p:nvSpPr>
-          <p:cNvPr id="15" name="Text 13"/>
-          <p:cNvSpPr txBox="1"/>
-          <p:nvPr/>
-        </p:nvSpPr>
-        <p:spPr>
-          <a:xfrm>
-            <a:off x="2468880" y="3520440"/>
-            <a:ext cx="1097280" cy="274320"/>
-          </a:xfrm>
-          <a:prstGeom prst="rect">
-            <a:avLst/>
-          </a:prstGeom>
-          <a:noFill/>
-          <a:ln/>
-        </p:spPr>
-        <p:txBody>
-          <a:bodyPr wrap="square" lIns="0" tIns="0" rIns="0" bIns="0" rtlCol="0" anchor="t"/>
-          <a:lstStyle/>
-          <a:p>
-            <a:pPr indent="0" marL="0">
-              <a:buNone/>
-            </a:pPr>
-            <a:r>
-              <a:rPr lang="en-US" sz="1250" i="1" dirty="0">
-                <a:solidFill>
-                  <a:srgbClr val="B23A48"/>
-                </a:solidFill>
-                <a:latin typeface="Calibri" pitchFamily="34" charset="0"/>
-                <a:ea typeface="Calibri" pitchFamily="34" charset="-122"/>
-                <a:cs typeface="Calibri" pitchFamily="34" charset="-120"/>
-              </a:rPr>
-              <a:t>invertito</a:t>
-            </a:r>
-            <a:endParaRPr lang="en-US" sz="1250" dirty="0"/>
-          </a:p>
-        </p:txBody>
-      </p:sp>
-      <p:sp>
-        <p:nvSpPr>
-          <p:cNvPr id="16" name="Shape 14"/>
-          <p:cNvSpPr/>
-          <p:nvPr/>
-        </p:nvSpPr>
-        <p:spPr>
-          <a:xfrm>
-            <a:off x="7589520" y="1492758"/>
-            <a:ext cx="146304" cy="146304"/>
-          </a:xfrm>
-          <a:prstGeom prst="rect">
-            <a:avLst/>
-          </a:prstGeom>
-          <a:solidFill>
-            <a:srgbClr val="0E7C86"/>
-          </a:solidFill>
-          <a:ln w="12700">
-            <a:solidFill>
-              <a:srgbClr val="0E7C86"/>
-            </a:solidFill>
-            <a:prstDash val="solid"/>
-          </a:ln>
-        </p:spPr>
-      </p:sp>
-      <p:sp>
-        <p:nvSpPr>
-          <p:cNvPr id="17" name="Text 15"/>
-          <p:cNvSpPr txBox="1"/>
-          <p:nvPr/>
-        </p:nvSpPr>
-        <p:spPr>
-          <a:xfrm>
-            <a:off x="7973568" y="1417320"/>
-            <a:ext cx="3669487" cy="557784"/>
-          </a:xfrm>
-          <a:prstGeom prst="rect">
-            <a:avLst/>
-          </a:prstGeom>
-          <a:noFill/>
-          <a:ln/>
-        </p:spPr>
-        <p:txBody>
-          <a:bodyPr wrap="square" lIns="0" tIns="0" rIns="0" bIns="0" rtlCol="0" anchor="t"/>
-          <a:lstStyle/>
-          <a:p>
-            <a:pPr indent="0" marL="0">
-              <a:spcAft>
-                <a:spcPts val="200"/>
-              </a:spcAft>
-              <a:buNone/>
-            </a:pPr>
-            <a:r>
-              <a:rPr lang="en-US" sz="1800" dirty="0">
-                <a:solidFill>
-                  <a:srgbClr val="1B2530"/>
-                </a:solidFill>
-                <a:latin typeface="Calibri" pitchFamily="34" charset="0"/>
-                <a:ea typeface="Calibri" pitchFamily="34" charset="-122"/>
-                <a:cs typeface="Calibri" pitchFamily="34" charset="-120"/>
-              </a:rPr>
-              <a:t>Due latch in serie, controllati da livelli opposti del clock</a:t>
-            </a:r>
-            <a:endParaRPr lang="en-US" sz="1800" dirty="0"/>
-          </a:p>
-        </p:txBody>
-      </p:sp>
-      <p:sp>
-        <p:nvSpPr>
-          <p:cNvPr id="18" name="Shape 16"/>
-          <p:cNvSpPr/>
-          <p:nvPr/>
-        </p:nvSpPr>
-        <p:spPr>
-          <a:xfrm>
-            <a:off x="7589520" y="2332863"/>
-            <a:ext cx="146304" cy="146304"/>
-          </a:xfrm>
-          <a:prstGeom prst="rect">
-            <a:avLst/>
-          </a:prstGeom>
-          <a:solidFill>
-            <a:srgbClr val="C7791B"/>
-          </a:solidFill>
-          <a:ln w="12700">
-            <a:solidFill>
-              <a:srgbClr val="C7791B"/>
-            </a:solidFill>
-            <a:prstDash val="solid"/>
-          </a:ln>
-        </p:spPr>
-      </p:sp>
-      <p:sp>
-        <p:nvSpPr>
-          <p:cNvPr id="19" name="Text 17"/>
-          <p:cNvSpPr txBox="1"/>
-          <p:nvPr/>
-        </p:nvSpPr>
-        <p:spPr>
-          <a:xfrm>
-            <a:off x="7973568" y="2257425"/>
-            <a:ext cx="3669487" cy="557784"/>
-          </a:xfrm>
-          <a:prstGeom prst="rect">
-            <a:avLst/>
-          </a:prstGeom>
-          <a:noFill/>
-          <a:ln/>
-        </p:spPr>
-        <p:txBody>
-          <a:bodyPr wrap="square" lIns="0" tIns="0" rIns="0" bIns="0" rtlCol="0" anchor="t"/>
-          <a:lstStyle/>
-          <a:p>
-            <a:pPr indent="0" marL="0">
-              <a:spcAft>
-                <a:spcPts val="200"/>
-              </a:spcAft>
-              <a:buNone/>
-            </a:pPr>
-            <a:r>
-              <a:rPr lang="en-US" sz="1800" dirty="0">
-                <a:solidFill>
-                  <a:srgbClr val="1B2530"/>
-                </a:solidFill>
-                <a:latin typeface="Calibri" pitchFamily="34" charset="0"/>
-                <a:ea typeface="Calibri" pitchFamily="34" charset="-122"/>
-                <a:cs typeface="Calibri" pitchFamily="34" charset="-120"/>
-              </a:rPr>
-              <a:t>Il master riceve gli ingressi; lo slave produce le uscite</a:t>
-            </a:r>
-            <a:endParaRPr lang="en-US" sz="1800" dirty="0"/>
-          </a:p>
-        </p:txBody>
-      </p:sp>
-      <p:sp>
-        <p:nvSpPr>
-          <p:cNvPr id="20" name="Shape 18"/>
-          <p:cNvSpPr/>
-          <p:nvPr/>
-        </p:nvSpPr>
-        <p:spPr>
-          <a:xfrm>
-            <a:off x="7589520" y="3172968"/>
-            <a:ext cx="146304" cy="146304"/>
-          </a:xfrm>
-          <a:prstGeom prst="rect">
-            <a:avLst/>
-          </a:prstGeom>
-          <a:solidFill>
-            <a:srgbClr val="0E7C86"/>
-          </a:solidFill>
-          <a:ln w="12700">
-            <a:solidFill>
-              <a:srgbClr val="0E7C86"/>
-            </a:solidFill>
-            <a:prstDash val="solid"/>
-          </a:ln>
-        </p:spPr>
-      </p:sp>
-      <p:sp>
-        <p:nvSpPr>
-          <p:cNvPr id="21" name="Text 19"/>
-          <p:cNvSpPr txBox="1"/>
-          <p:nvPr/>
-        </p:nvSpPr>
-        <p:spPr>
-          <a:xfrm>
-            <a:off x="7973568" y="3097530"/>
-            <a:ext cx="3669487" cy="836676"/>
-          </a:xfrm>
-          <a:prstGeom prst="rect">
-            <a:avLst/>
-          </a:prstGeom>
-          <a:noFill/>
-          <a:ln/>
-        </p:spPr>
-        <p:txBody>
-          <a:bodyPr wrap="square" lIns="0" tIns="0" rIns="0" bIns="0" rtlCol="0" anchor="t"/>
-          <a:lstStyle/>
-          <a:p>
-            <a:pPr indent="0" marL="0">
-              <a:spcAft>
-                <a:spcPts val="200"/>
-              </a:spcAft>
-              <a:buNone/>
-            </a:pPr>
-            <a:r>
-              <a:rPr lang="en-US" sz="1800" dirty="0">
-                <a:solidFill>
-                  <a:srgbClr val="1B2530"/>
-                </a:solidFill>
-                <a:latin typeface="Calibri" pitchFamily="34" charset="0"/>
-                <a:ea typeface="Calibri" pitchFamily="34" charset="-122"/>
-                <a:cs typeface="Calibri" pitchFamily="34" charset="-120"/>
-              </a:rPr>
-              <a:t>Non sono mai trasparenti insieme: l'ingresso non può mai correre dritto fino all'uscita</a:t>
-            </a:r>
-            <a:endParaRPr lang="en-US" sz="1800" dirty="0"/>
-          </a:p>
-        </p:txBody>
-      </p:sp>
-      <p:sp>
-        <p:nvSpPr>
-          <p:cNvPr id="22" name="Shape 20"/>
-          <p:cNvSpPr/>
-          <p:nvPr/>
-        </p:nvSpPr>
-        <p:spPr>
-          <a:xfrm>
-            <a:off x="7589520" y="4291965"/>
-            <a:ext cx="146304" cy="146304"/>
-          </a:xfrm>
-          <a:prstGeom prst="rect">
-            <a:avLst/>
-          </a:prstGeom>
-          <a:solidFill>
-            <a:srgbClr val="C7791B"/>
-          </a:solidFill>
-          <a:ln w="12700">
-            <a:solidFill>
-              <a:srgbClr val="C7791B"/>
-            </a:solidFill>
-            <a:prstDash val="solid"/>
-          </a:ln>
-        </p:spPr>
-      </p:sp>
-      <p:sp>
-        <p:nvSpPr>
-          <p:cNvPr id="23" name="Text 21"/>
-          <p:cNvSpPr txBox="1"/>
-          <p:nvPr/>
-        </p:nvSpPr>
-        <p:spPr>
-          <a:xfrm>
-            <a:off x="7973568" y="4216527"/>
-            <a:ext cx="3669487" cy="557784"/>
-          </a:xfrm>
-          <a:prstGeom prst="rect">
-            <a:avLst/>
-          </a:prstGeom>
-          <a:noFill/>
-          <a:ln/>
-        </p:spPr>
-        <p:txBody>
-          <a:bodyPr wrap="square" lIns="0" tIns="0" rIns="0" bIns="0" rtlCol="0" anchor="t"/>
-          <a:lstStyle/>
-          <a:p>
-            <a:pPr indent="0" marL="0">
-              <a:spcAft>
-                <a:spcPts val="200"/>
-              </a:spcAft>
-              <a:buNone/>
-            </a:pPr>
-            <a:r>
-              <a:rPr lang="en-US" sz="1800" dirty="0">
-                <a:solidFill>
-                  <a:srgbClr val="1B2530"/>
-                </a:solidFill>
-                <a:latin typeface="Calibri" pitchFamily="34" charset="0"/>
-                <a:ea typeface="Calibri" pitchFamily="34" charset="-122"/>
-                <a:cs typeface="Calibri" pitchFamily="34" charset="-120"/>
-              </a:rPr>
-              <a:t>L'uscita cambia solo quando il clock passa da 0 a 1: sul fronte</a:t>
-            </a:r>
-            <a:endParaRPr lang="en-US" sz="1800" dirty="0"/>
-          </a:p>
-        </p:txBody>
-      </p:sp>
-      <p:sp>
-        <p:nvSpPr>
-          <p:cNvPr id="24" name="Shape 22"/>
-          <p:cNvSpPr/>
-          <p:nvPr/>
-        </p:nvSpPr>
-        <p:spPr>
-          <a:xfrm>
-            <a:off x="7589520" y="5132070"/>
-            <a:ext cx="146304" cy="146304"/>
-          </a:xfrm>
-          <a:prstGeom prst="rect">
-            <a:avLst/>
-          </a:prstGeom>
-          <a:solidFill>
-            <a:srgbClr val="0E7C86"/>
-          </a:solidFill>
-          <a:ln w="12700">
-            <a:solidFill>
-              <a:srgbClr val="0E7C86"/>
-            </a:solidFill>
-            <a:prstDash val="solid"/>
-          </a:ln>
-        </p:spPr>
-      </p:sp>
-      <p:sp>
-        <p:nvSpPr>
-          <p:cNvPr id="25" name="Text 23"/>
-          <p:cNvSpPr txBox="1"/>
-          <p:nvPr/>
-        </p:nvSpPr>
-        <p:spPr>
-          <a:xfrm>
-            <a:off x="7973568" y="5056632"/>
-            <a:ext cx="3669487" cy="1115568"/>
-          </a:xfrm>
-          <a:prstGeom prst="rect">
-            <a:avLst/>
-          </a:prstGeom>
-          <a:noFill/>
-          <a:ln/>
-        </p:spPr>
-        <p:txBody>
-          <a:bodyPr wrap="square" lIns="0" tIns="0" rIns="0" bIns="0" rtlCol="0" anchor="t"/>
-          <a:lstStyle/>
-          <a:p>
-            <a:pPr indent="0" marL="0">
-              <a:spcAft>
-                <a:spcPts val="200"/>
-              </a:spcAft>
-              <a:buNone/>
-            </a:pPr>
-            <a:r>
-              <a:rPr lang="en-US" sz="1800" dirty="0">
-                <a:solidFill>
-                  <a:srgbClr val="1B2530"/>
-                </a:solidFill>
-                <a:latin typeface="Calibri" pitchFamily="34" charset="0"/>
-                <a:ea typeface="Calibri" pitchFamily="34" charset="-122"/>
-                <a:cs typeface="Calibri" pitchFamily="34" charset="-120"/>
-              </a:rPr>
-              <a:t>Un flip-flop è sensibile al fronte: un'operazione per ciclo di clock, e nessuna fluttuazione dell'uscita</a:t>
-            </a:r>
-            <a:endParaRPr lang="en-US" sz="1800" dirty="0"/>
-          </a:p>
-        </p:txBody>
-      </p:sp>
-      <p:sp>
-        <p:nvSpPr>
-          <p:cNvPr id="26" name="Shape 24"/>
-          <p:cNvSpPr/>
-          <p:nvPr/>
-        </p:nvSpPr>
-        <p:spPr>
-          <a:xfrm>
-            <a:off x="548640" y="5257800"/>
-            <a:ext cx="6675120" cy="914400"/>
-          </a:xfrm>
-          <a:prstGeom prst="roundRect">
-            <a:avLst>
-              <a:gd name="adj" fmla="val 8000"/>
-            </a:avLst>
-          </a:prstGeom>
-          <a:solidFill>
-            <a:srgbClr val="D8ECEE"/>
-          </a:solidFill>
-          <a:ln w="12700">
-            <a:solidFill>
-              <a:srgbClr val="D8ECEE"/>
-            </a:solidFill>
-            <a:prstDash val="solid"/>
-          </a:ln>
-        </p:spPr>
-      </p:sp>
-      <p:sp>
-        <p:nvSpPr>
-          <p:cNvPr id="27" name="Text 25"/>
-          <p:cNvSpPr txBox="1"/>
-          <p:nvPr/>
-        </p:nvSpPr>
-        <p:spPr>
-          <a:xfrm>
-            <a:off x="731520" y="5257800"/>
-            <a:ext cx="6309360" cy="914400"/>
-          </a:xfrm>
-          <a:prstGeom prst="rect">
-            <a:avLst/>
-          </a:prstGeom>
-          <a:noFill/>
-          <a:ln/>
-        </p:spPr>
-        <p:txBody>
-          <a:bodyPr wrap="square" lIns="0" tIns="0" rIns="0" bIns="0" rtlCol="0" anchor="ctr"/>
-          <a:lstStyle/>
-          <a:p>
-            <a:pPr algn="ctr" indent="0" marL="0">
-              <a:buNone/>
-            </a:pPr>
-            <a:r>
-              <a:rPr lang="en-US" sz="1800" b="1" dirty="0">
-                <a:solidFill>
-                  <a:srgbClr val="2E4A62"/>
-                </a:solidFill>
-                <a:latin typeface="Calibri" pitchFamily="34" charset="0"/>
-                <a:ea typeface="Calibri" pitchFamily="34" charset="-122"/>
-                <a:cs typeface="Calibri" pitchFamily="34" charset="-120"/>
-              </a:rPr>
-              <a:t>(livello 0) seguito da (livello 1) = (fronte di salita)</a:t>
-            </a:r>
-            <a:endParaRPr lang="en-US" sz="1800" dirty="0"/>
-          </a:p>
-        </p:txBody>
-      </p:sp>
-      <p:sp>
-        <p:nvSpPr>
-          <p:cNvPr id="25" name="Slide Number Placeholder 0"/>
-          <p:cNvSpPr>
-            <a:spLocks noGrp="1"/>
-          </p:cNvSpPr>
-          <p:nvPr>
-            <p:ph type="sldNum" sz="quarter" idx="4294967295"/>
-          </p:nvPr>
-        </p:nvSpPr>
-        <p:spPr>
-          <a:xfrm>
-            <a:off x="11002975" y="6419088"/>
-            <a:ext cx="640080" cy="274320"/>
-          </a:xfrm>
-          <a:prstGeom prst="rect">
-            <a:avLst/>
-          </a:prstGeom>
-          <a:extLst>
-            <a:ext uri="{C572A759-6A51-4108-AA02-DFA0A04FC94B}">
-              <ma14:wrappingTextBoxFlag xmlns:ma14="http://schemas.microsoft.com/office/mac/drawingml/2011/main" val="0"/>
-            </a:ext>
-          </a:extLst>
-        </p:spPr>
-        <p:txBody>
-          <a:bodyPr/>
-          <a:lstStyle>
-            <a:lvl1pPr>
-              <a:defRPr sz="1000">
-                <a:solidFill>
-                  <a:srgbClr val="5B6B78"/>
-                </a:solidFill>
-                <a:latin typeface="Calibri"/>
-                <a:ea typeface="Calibri"/>
-                <a:cs typeface="Calibri"/>
-              </a:defRPr>
-            </a:lvl1pPr>
-          </a:lstStyle>
-          <a:p>
-            <a:pPr algn="r"/>
-            <a:fld id="{F7021451-1387-4CA6-816F-3879F97B5CBC}" type="slidenum">
-              <a:rPr b="0" lang="en-US"/>
               <a:t>13</a:t>
             </a:fld>
             <a:endParaRPr lang="en-US"/>
@@ -6859,7 +6454,7 @@
                 <a:ea typeface="Cambria" pitchFamily="34" charset="-122"/>
                 <a:cs typeface="Cambria" pitchFamily="34" charset="-120"/>
               </a:rPr>
-              <a:t>Latch o flip-flop? Guardate l'uscita</a:t>
+              <a:t>Il flip-flop master-slave</a:t>
             </a:r>
             <a:endParaRPr lang="en-US" sz="3200" dirty="0"/>
           </a:p>
@@ -6867,64 +6462,513 @@
       </p:sp>
       <p:sp>
         <p:nvSpPr>
-          <p:cNvPr id="3" name="Shape 1"/>
-          <p:cNvSpPr/>
-          <p:nvPr/>
-        </p:nvSpPr>
-        <p:spPr>
-          <a:xfrm>
-            <a:off x="548640" y="1417320"/>
-            <a:ext cx="11094415" cy="3246120"/>
+          <p:cNvPr id="3" name="Text 1"/>
+          <p:cNvSpPr txBox="1"/>
+          <p:nvPr/>
+        </p:nvSpPr>
+        <p:spPr>
+          <a:xfrm>
+            <a:off x="1371600" y="1874520"/>
+            <a:ext cx="2011680" cy="1463040"/>
           </a:xfrm>
           <a:prstGeom prst="roundRect">
             <a:avLst>
-              <a:gd name="adj" fmla="val 2254"/>
+              <a:gd name="adj" fmla="val 3750"/>
             </a:avLst>
           </a:prstGeom>
           <a:solidFill>
-            <a:srgbClr val="EEF2F4"/>
+            <a:srgbClr val="0E7C86"/>
           </a:solidFill>
-          <a:ln w="12700">
+          <a:ln>
             <a:solidFill>
-              <a:srgbClr val="EEF2F4"/>
+              <a:srgbClr val="0E7C86"/>
+            </a:solidFill>
+          </a:ln>
+        </p:spPr>
+        <p:txBody>
+          <a:bodyPr wrap="square" lIns="38100" tIns="38100" rIns="38100" bIns="38100" rtlCol="0" anchor="ctr"/>
+          <a:lstStyle/>
+          <a:p>
+            <a:pPr algn="ctr" indent="0" marL="0">
+              <a:buNone/>
+            </a:pPr>
+            <a:r>
+              <a:rPr lang="en-US" sz="1500" b="1" dirty="0">
+                <a:solidFill>
+                  <a:srgbClr val="FFFFFF"/>
+                </a:solidFill>
+                <a:latin typeface="Calibri" pitchFamily="34" charset="0"/>
+                <a:ea typeface="Calibri" pitchFamily="34" charset="-122"/>
+                <a:cs typeface="Calibri" pitchFamily="34" charset="-120"/>
+              </a:rPr>
+              <a:t>MASTER</a:t>
+            </a:r>
+            <a:endParaRPr lang="en-US" sz="1500" dirty="0"/>
+          </a:p>
+          <a:p>
+            <a:pPr algn="ctr" indent="0" marL="0">
+              <a:buNone/>
+            </a:pPr>
+            <a:r>
+              <a:rPr lang="en-US" sz="1500" b="1" dirty="0">
+                <a:solidFill>
+                  <a:srgbClr val="FFFFFF"/>
+                </a:solidFill>
+                <a:latin typeface="Calibri" pitchFamily="34" charset="0"/>
+                <a:ea typeface="Calibri" pitchFamily="34" charset="-122"/>
+                <a:cs typeface="Calibri" pitchFamily="34" charset="-120"/>
+              </a:rPr>
+              <a:t>latch D</a:t>
+            </a:r>
+            <a:endParaRPr lang="en-US" sz="1500" dirty="0"/>
+          </a:p>
+          <a:p>
+            <a:pPr algn="ctr" indent="0" marL="0">
+              <a:buNone/>
+            </a:pPr>
+            <a:r>
+              <a:rPr lang="en-US" sz="1500" b="1" dirty="0">
+                <a:solidFill>
+                  <a:srgbClr val="FFFFFF"/>
+                </a:solidFill>
+                <a:latin typeface="Calibri" pitchFamily="34" charset="0"/>
+                <a:ea typeface="Calibri" pitchFamily="34" charset="-122"/>
+                <a:cs typeface="Calibri" pitchFamily="34" charset="-120"/>
+              </a:rPr>
+              <a:t>attivo con CK = 0</a:t>
+            </a:r>
+            <a:endParaRPr lang="en-US" sz="1500" dirty="0"/>
+          </a:p>
+        </p:txBody>
+      </p:sp>
+      <p:sp>
+        <p:nvSpPr>
+          <p:cNvPr id="4" name="Text 2"/>
+          <p:cNvSpPr txBox="1"/>
+          <p:nvPr/>
+        </p:nvSpPr>
+        <p:spPr>
+          <a:xfrm>
+            <a:off x="4389120" y="1874520"/>
+            <a:ext cx="2011680" cy="1463040"/>
+          </a:xfrm>
+          <a:prstGeom prst="roundRect">
+            <a:avLst>
+              <a:gd name="adj" fmla="val 3750"/>
+            </a:avLst>
+          </a:prstGeom>
+          <a:solidFill>
+            <a:srgbClr val="C7791B"/>
+          </a:solidFill>
+          <a:ln>
+            <a:solidFill>
+              <a:srgbClr val="C7791B"/>
+            </a:solidFill>
+          </a:ln>
+        </p:spPr>
+        <p:txBody>
+          <a:bodyPr wrap="square" lIns="38100" tIns="38100" rIns="38100" bIns="38100" rtlCol="0" anchor="ctr"/>
+          <a:lstStyle/>
+          <a:p>
+            <a:pPr algn="ctr" indent="0" marL="0">
+              <a:buNone/>
+            </a:pPr>
+            <a:r>
+              <a:rPr lang="en-US" sz="1500" b="1" dirty="0">
+                <a:solidFill>
+                  <a:srgbClr val="FFFFFF"/>
+                </a:solidFill>
+                <a:latin typeface="Calibri" pitchFamily="34" charset="0"/>
+                <a:ea typeface="Calibri" pitchFamily="34" charset="-122"/>
+                <a:cs typeface="Calibri" pitchFamily="34" charset="-120"/>
+              </a:rPr>
+              <a:t>SLAVE</a:t>
+            </a:r>
+            <a:endParaRPr lang="en-US" sz="1500" dirty="0"/>
+          </a:p>
+          <a:p>
+            <a:pPr algn="ctr" indent="0" marL="0">
+              <a:buNone/>
+            </a:pPr>
+            <a:r>
+              <a:rPr lang="en-US" sz="1500" b="1" dirty="0">
+                <a:solidFill>
+                  <a:srgbClr val="FFFFFF"/>
+                </a:solidFill>
+                <a:latin typeface="Calibri" pitchFamily="34" charset="0"/>
+                <a:ea typeface="Calibri" pitchFamily="34" charset="-122"/>
+                <a:cs typeface="Calibri" pitchFamily="34" charset="-120"/>
+              </a:rPr>
+              <a:t>latch D</a:t>
+            </a:r>
+            <a:endParaRPr lang="en-US" sz="1500" dirty="0"/>
+          </a:p>
+          <a:p>
+            <a:pPr algn="ctr" indent="0" marL="0">
+              <a:buNone/>
+            </a:pPr>
+            <a:r>
+              <a:rPr lang="en-US" sz="1500" b="1" dirty="0">
+                <a:solidFill>
+                  <a:srgbClr val="FFFFFF"/>
+                </a:solidFill>
+                <a:latin typeface="Calibri" pitchFamily="34" charset="0"/>
+                <a:ea typeface="Calibri" pitchFamily="34" charset="-122"/>
+                <a:cs typeface="Calibri" pitchFamily="34" charset="-120"/>
+              </a:rPr>
+              <a:t>attivo con CK = 1</a:t>
+            </a:r>
+            <a:endParaRPr lang="en-US" sz="1500" dirty="0"/>
+          </a:p>
+        </p:txBody>
+      </p:sp>
+      <p:sp>
+        <p:nvSpPr>
+          <p:cNvPr id="5" name="Shape 3"/>
+          <p:cNvSpPr/>
+          <p:nvPr/>
+        </p:nvSpPr>
+        <p:spPr>
+          <a:xfrm>
+            <a:off x="640080" y="2331720"/>
+            <a:ext cx="704088" cy="0"/>
+          </a:xfrm>
+          <a:prstGeom prst="line">
+            <a:avLst/>
+          </a:prstGeom>
+          <a:noFill/>
+          <a:ln w="28575">
+            <a:solidFill>
+              <a:srgbClr val="5B6B78"/>
+            </a:solidFill>
+            <a:prstDash val="solid"/>
+            <a:tailEnd type="triangle"/>
+          </a:ln>
+        </p:spPr>
+      </p:sp>
+      <p:sp>
+        <p:nvSpPr>
+          <p:cNvPr id="6" name="Text 4"/>
+          <p:cNvSpPr txBox="1"/>
+          <p:nvPr/>
+        </p:nvSpPr>
+        <p:spPr>
+          <a:xfrm>
+            <a:off x="640080" y="1965960"/>
+            <a:ext cx="457200" cy="274320"/>
+          </a:xfrm>
+          <a:prstGeom prst="rect">
+            <a:avLst/>
+          </a:prstGeom>
+          <a:noFill/>
+          <a:ln/>
+        </p:spPr>
+        <p:txBody>
+          <a:bodyPr wrap="square" lIns="0" tIns="0" rIns="0" bIns="0" rtlCol="0" anchor="t"/>
+          <a:lstStyle/>
+          <a:p>
+            <a:pPr indent="0" marL="0">
+              <a:buNone/>
+            </a:pPr>
+            <a:r>
+              <a:rPr lang="en-US" sz="1700" b="1" dirty="0">
+                <a:solidFill>
+                  <a:srgbClr val="1B2530"/>
+                </a:solidFill>
+                <a:latin typeface="Courier New" pitchFamily="34" charset="0"/>
+                <a:ea typeface="Courier New" pitchFamily="34" charset="-122"/>
+                <a:cs typeface="Courier New" pitchFamily="34" charset="-120"/>
+              </a:rPr>
+              <a:t>D</a:t>
+            </a:r>
+            <a:endParaRPr lang="en-US" sz="1700" dirty="0"/>
+          </a:p>
+        </p:txBody>
+      </p:sp>
+      <p:sp>
+        <p:nvSpPr>
+          <p:cNvPr id="7" name="Shape 5"/>
+          <p:cNvSpPr/>
+          <p:nvPr/>
+        </p:nvSpPr>
+        <p:spPr>
+          <a:xfrm>
+            <a:off x="3410712" y="2331720"/>
+            <a:ext cx="950976" cy="0"/>
+          </a:xfrm>
+          <a:prstGeom prst="line">
+            <a:avLst/>
+          </a:prstGeom>
+          <a:noFill/>
+          <a:ln w="28575">
+            <a:solidFill>
+              <a:srgbClr val="5B6B78"/>
+            </a:solidFill>
+            <a:prstDash val="solid"/>
+            <a:tailEnd type="triangle"/>
+          </a:ln>
+        </p:spPr>
+      </p:sp>
+      <p:sp>
+        <p:nvSpPr>
+          <p:cNvPr id="8" name="Text 6"/>
+          <p:cNvSpPr txBox="1"/>
+          <p:nvPr/>
+        </p:nvSpPr>
+        <p:spPr>
+          <a:xfrm>
+            <a:off x="3566160" y="1965960"/>
+            <a:ext cx="640080" cy="274320"/>
+          </a:xfrm>
+          <a:prstGeom prst="rect">
+            <a:avLst/>
+          </a:prstGeom>
+          <a:noFill/>
+          <a:ln/>
+        </p:spPr>
+        <p:txBody>
+          <a:bodyPr wrap="square" lIns="0" tIns="0" rIns="0" bIns="0" rtlCol="0" anchor="t"/>
+          <a:lstStyle/>
+          <a:p>
+            <a:pPr indent="0" marL="0">
+              <a:buNone/>
+            </a:pPr>
+            <a:r>
+              <a:rPr lang="en-US" sz="1500" b="1" dirty="0">
+                <a:solidFill>
+                  <a:srgbClr val="1B2530"/>
+                </a:solidFill>
+                <a:latin typeface="Courier New" pitchFamily="34" charset="0"/>
+                <a:ea typeface="Courier New" pitchFamily="34" charset="-122"/>
+                <a:cs typeface="Courier New" pitchFamily="34" charset="-120"/>
+              </a:rPr>
+              <a:t>Qm</a:t>
+            </a:r>
+            <a:endParaRPr lang="en-US" sz="1500" dirty="0"/>
+          </a:p>
+        </p:txBody>
+      </p:sp>
+      <p:sp>
+        <p:nvSpPr>
+          <p:cNvPr id="9" name="Shape 7"/>
+          <p:cNvSpPr/>
+          <p:nvPr/>
+        </p:nvSpPr>
+        <p:spPr>
+          <a:xfrm>
+            <a:off x="6428232" y="2331720"/>
+            <a:ext cx="658368" cy="0"/>
+          </a:xfrm>
+          <a:prstGeom prst="line">
+            <a:avLst/>
+          </a:prstGeom>
+          <a:noFill/>
+          <a:ln w="28575">
+            <a:solidFill>
+              <a:srgbClr val="5B6B78"/>
+            </a:solidFill>
+            <a:prstDash val="solid"/>
+            <a:tailEnd type="triangle"/>
+          </a:ln>
+        </p:spPr>
+      </p:sp>
+      <p:sp>
+        <p:nvSpPr>
+          <p:cNvPr id="10" name="Text 8"/>
+          <p:cNvSpPr txBox="1"/>
+          <p:nvPr/>
+        </p:nvSpPr>
+        <p:spPr>
+          <a:xfrm>
+            <a:off x="6629400" y="1965960"/>
+            <a:ext cx="457200" cy="274320"/>
+          </a:xfrm>
+          <a:prstGeom prst="rect">
+            <a:avLst/>
+          </a:prstGeom>
+          <a:noFill/>
+          <a:ln/>
+        </p:spPr>
+        <p:txBody>
+          <a:bodyPr wrap="square" lIns="0" tIns="0" rIns="0" bIns="0" rtlCol="0" anchor="t"/>
+          <a:lstStyle/>
+          <a:p>
+            <a:pPr indent="0" marL="0">
+              <a:buNone/>
+            </a:pPr>
+            <a:r>
+              <a:rPr lang="en-US" sz="1700" b="1" dirty="0">
+                <a:solidFill>
+                  <a:srgbClr val="1B2530"/>
+                </a:solidFill>
+                <a:latin typeface="Courier New" pitchFamily="34" charset="0"/>
+                <a:ea typeface="Courier New" pitchFamily="34" charset="-122"/>
+                <a:cs typeface="Courier New" pitchFamily="34" charset="-120"/>
+              </a:rPr>
+              <a:t>Q</a:t>
+            </a:r>
+            <a:endParaRPr lang="en-US" sz="1700" dirty="0"/>
+          </a:p>
+        </p:txBody>
+      </p:sp>
+      <p:sp>
+        <p:nvSpPr>
+          <p:cNvPr id="11" name="Shape 9"/>
+          <p:cNvSpPr/>
+          <p:nvPr/>
+        </p:nvSpPr>
+        <p:spPr>
+          <a:xfrm>
+            <a:off x="822960" y="4069080"/>
+            <a:ext cx="4572000" cy="0"/>
+          </a:xfrm>
+          <a:prstGeom prst="line">
+            <a:avLst/>
+          </a:prstGeom>
+          <a:noFill/>
+          <a:ln w="28575">
+            <a:solidFill>
+              <a:srgbClr val="B23A48"/>
             </a:solidFill>
             <a:prstDash val="solid"/>
           </a:ln>
         </p:spPr>
       </p:sp>
-      <p:pic>
-        <p:nvPicPr>
-          <p:cNvPr id="5" name="Image 0" descr="preencoded.png">    </p:cNvPr>
-          <p:cNvPicPr>
-            <a:picLocks noChangeAspect="1"/>
-          </p:cNvPicPr>
-          <p:nvPr/>
-        </p:nvPicPr>
-        <p:blipFill>
-          <a:blip r:embed="rId1"/>
-          <a:stretch>
-            <a:fillRect/>
-          </a:stretch>
-        </p:blipFill>
-        <p:spPr>
-          <a:xfrm>
-            <a:off x="775328" y="1463040"/>
-            <a:ext cx="10641040" cy="3154680"/>
-          </a:xfrm>
-          <a:prstGeom prst="rect">
-            <a:avLst/>
-          </a:prstGeom>
-        </p:spPr>
-      </p:pic>
-      <p:sp>
-        <p:nvSpPr>
-          <p:cNvPr id="6" name="Shape 2"/>
+      <p:sp>
+        <p:nvSpPr>
+          <p:cNvPr id="12" name="Text 10"/>
+          <p:cNvSpPr txBox="1"/>
+          <p:nvPr/>
+        </p:nvSpPr>
+        <p:spPr>
+          <a:xfrm>
+            <a:off x="822960" y="4114800"/>
+            <a:ext cx="640080" cy="274320"/>
+          </a:xfrm>
+          <a:prstGeom prst="rect">
+            <a:avLst/>
+          </a:prstGeom>
+          <a:noFill/>
+          <a:ln/>
+        </p:spPr>
+        <p:txBody>
+          <a:bodyPr wrap="square" lIns="0" tIns="0" rIns="0" bIns="0" rtlCol="0" anchor="t"/>
+          <a:lstStyle/>
+          <a:p>
+            <a:pPr indent="0" marL="0">
+              <a:buNone/>
+            </a:pPr>
+            <a:r>
+              <a:rPr lang="en-US" sz="1500" b="1" dirty="0">
+                <a:solidFill>
+                  <a:srgbClr val="B23A48"/>
+                </a:solidFill>
+                <a:latin typeface="Courier New" pitchFamily="34" charset="0"/>
+                <a:ea typeface="Courier New" pitchFamily="34" charset="-122"/>
+                <a:cs typeface="Courier New" pitchFamily="34" charset="-120"/>
+              </a:rPr>
+              <a:t>CK</a:t>
+            </a:r>
+            <a:endParaRPr lang="en-US" sz="1500" dirty="0"/>
+          </a:p>
+        </p:txBody>
+      </p:sp>
+      <p:sp>
+        <p:nvSpPr>
+          <p:cNvPr id="13" name="Shape 11"/>
           <p:cNvSpPr/>
           <p:nvPr/>
         </p:nvSpPr>
         <p:spPr>
-          <a:xfrm>
-            <a:off x="548640" y="4868291"/>
+          <a:xfrm flipV="1">
+            <a:off x="2377440" y="3364992"/>
+            <a:ext cx="0" cy="704088"/>
+          </a:xfrm>
+          <a:prstGeom prst="line">
+            <a:avLst/>
+          </a:prstGeom>
+          <a:noFill/>
+          <a:ln w="28575">
+            <a:solidFill>
+              <a:srgbClr val="B23A48"/>
+            </a:solidFill>
+            <a:prstDash val="solid"/>
+            <a:tailEnd type="triangle"/>
+          </a:ln>
+        </p:spPr>
+      </p:sp>
+      <p:sp>
+        <p:nvSpPr>
+          <p:cNvPr id="14" name="Shape 12"/>
+          <p:cNvSpPr/>
+          <p:nvPr/>
+        </p:nvSpPr>
+        <p:spPr>
+          <a:xfrm flipV="1">
+            <a:off x="5394960" y="3364992"/>
+            <a:ext cx="0" cy="704088"/>
+          </a:xfrm>
+          <a:prstGeom prst="line">
+            <a:avLst/>
+          </a:prstGeom>
+          <a:noFill/>
+          <a:ln w="28575">
+            <a:solidFill>
+              <a:srgbClr val="B23A48"/>
+            </a:solidFill>
+            <a:prstDash val="solid"/>
+            <a:tailEnd type="triangle"/>
+          </a:ln>
+        </p:spPr>
+      </p:sp>
+      <p:sp>
+        <p:nvSpPr>
+          <p:cNvPr id="15" name="Text 13"/>
+          <p:cNvSpPr txBox="1"/>
+          <p:nvPr/>
+        </p:nvSpPr>
+        <p:spPr>
+          <a:xfrm>
+            <a:off x="2468880" y="3520440"/>
+            <a:ext cx="1097280" cy="274320"/>
+          </a:xfrm>
+          <a:prstGeom prst="rect">
+            <a:avLst/>
+          </a:prstGeom>
+          <a:noFill/>
+          <a:ln/>
+        </p:spPr>
+        <p:txBody>
+          <a:bodyPr wrap="square" lIns="0" tIns="0" rIns="0" bIns="0" rtlCol="0" anchor="t"/>
+          <a:lstStyle/>
+          <a:p>
+            <a:pPr indent="0" marL="0">
+              <a:buNone/>
+            </a:pPr>
+            <a:r>
+              <a:rPr lang="en-US" sz="1250" i="1" dirty="0">
+                <a:solidFill>
+                  <a:srgbClr val="B23A48"/>
+                </a:solidFill>
+                <a:latin typeface="Calibri" pitchFamily="34" charset="0"/>
+                <a:ea typeface="Calibri" pitchFamily="34" charset="-122"/>
+                <a:cs typeface="Calibri" pitchFamily="34" charset="-120"/>
+              </a:rPr>
+              <a:t>invertito</a:t>
+            </a:r>
+            <a:endParaRPr lang="en-US" sz="1250" dirty="0"/>
+          </a:p>
+        </p:txBody>
+      </p:sp>
+      <p:sp>
+        <p:nvSpPr>
+          <p:cNvPr id="16" name="Shape 14"/>
+          <p:cNvSpPr/>
+          <p:nvPr/>
+        </p:nvSpPr>
+        <p:spPr>
+          <a:xfrm>
+            <a:off x="7589520" y="1492758"/>
             <a:ext cx="146304" cy="146304"/>
           </a:xfrm>
           <a:prstGeom prst="rect">
@@ -6943,14 +6987,14 @@
       </p:sp>
       <p:sp>
         <p:nvSpPr>
-          <p:cNvPr id="7" name="Text 3"/>
+          <p:cNvPr id="17" name="Text 15"/>
           <p:cNvSpPr txBox="1"/>
           <p:nvPr/>
         </p:nvSpPr>
         <p:spPr>
           <a:xfrm>
-            <a:off x="932688" y="4800600"/>
-            <a:ext cx="10710367" cy="526796"/>
+            <a:off x="7973568" y="1417320"/>
+            <a:ext cx="3669487" cy="557784"/>
           </a:xfrm>
           <a:prstGeom prst="rect">
             <a:avLst/>
@@ -6969,7 +7013,7 @@
               <a:buNone/>
             </a:pPr>
             <a:r>
-              <a:rPr lang="en-US" sz="1700" dirty="0">
+              <a:rPr lang="en-US" sz="1800" dirty="0">
                 <a:solidFill>
                   <a:srgbClr val="1B2530"/>
                 </a:solidFill>
@@ -6977,21 +7021,21 @@
                 <a:ea typeface="Calibri" pitchFamily="34" charset="-122"/>
                 <a:cs typeface="Calibri" pitchFamily="34" charset="-120"/>
               </a:rPr>
-              <a:t>Il latch D segue D per tutto il tempo in cui il clock è alto, e conserva l'ultimo valore quando il clock scende</a:t>
-            </a:r>
-            <a:endParaRPr lang="en-US" sz="1700" dirty="0"/>
-          </a:p>
-        </p:txBody>
-      </p:sp>
-      <p:sp>
-        <p:nvSpPr>
-          <p:cNvPr id="8" name="Shape 4"/>
+              <a:t>Due latch in serie, controllati da livelli opposti del clock</a:t>
+            </a:r>
+            <a:endParaRPr lang="en-US" sz="1800" dirty="0"/>
+          </a:p>
+        </p:txBody>
+      </p:sp>
+      <p:sp>
+        <p:nvSpPr>
+          <p:cNvPr id="18" name="Shape 16"/>
           <p:cNvSpPr/>
           <p:nvPr/>
         </p:nvSpPr>
         <p:spPr>
           <a:xfrm>
-            <a:off x="548640" y="5554091"/>
+            <a:off x="7589520" y="2332863"/>
             <a:ext cx="146304" cy="146304"/>
           </a:xfrm>
           <a:prstGeom prst="rect">
@@ -7010,14 +7054,14 @@
       </p:sp>
       <p:sp>
         <p:nvSpPr>
-          <p:cNvPr id="9" name="Text 5"/>
+          <p:cNvPr id="19" name="Text 17"/>
           <p:cNvSpPr txBox="1"/>
           <p:nvPr/>
         </p:nvSpPr>
         <p:spPr>
           <a:xfrm>
-            <a:off x="932688" y="5486400"/>
-            <a:ext cx="10710367" cy="263398"/>
+            <a:off x="7973568" y="2257425"/>
+            <a:ext cx="3669487" cy="557784"/>
           </a:xfrm>
           <a:prstGeom prst="rect">
             <a:avLst/>
@@ -7036,7 +7080,7 @@
               <a:buNone/>
             </a:pPr>
             <a:r>
-              <a:rPr lang="en-US" sz="1700" dirty="0">
+              <a:rPr lang="en-US" sz="1800" dirty="0">
                 <a:solidFill>
                   <a:srgbClr val="1B2530"/>
                 </a:solidFill>
@@ -7044,21 +7088,21 @@
                 <a:ea typeface="Calibri" pitchFamily="34" charset="-122"/>
                 <a:cs typeface="Calibri" pitchFamily="34" charset="-120"/>
               </a:rPr>
-              <a:t>Il flip-flop D guarda D solo sul fronte di salita: gli impulsi brevi tra due fronti sono ignorati</a:t>
-            </a:r>
-            <a:endParaRPr lang="en-US" sz="1700" dirty="0"/>
-          </a:p>
-        </p:txBody>
-      </p:sp>
-      <p:sp>
-        <p:nvSpPr>
-          <p:cNvPr id="10" name="Shape 6"/>
+              <a:t>Il master riceve gli ingressi; lo slave produce le uscite</a:t>
+            </a:r>
+            <a:endParaRPr lang="en-US" sz="1800" dirty="0"/>
+          </a:p>
+        </p:txBody>
+      </p:sp>
+      <p:sp>
+        <p:nvSpPr>
+          <p:cNvPr id="20" name="Shape 18"/>
           <p:cNvSpPr/>
           <p:nvPr/>
         </p:nvSpPr>
         <p:spPr>
           <a:xfrm>
-            <a:off x="548640" y="5976493"/>
+            <a:off x="7589520" y="3172968"/>
             <a:ext cx="146304" cy="146304"/>
           </a:xfrm>
           <a:prstGeom prst="rect">
@@ -7077,14 +7121,14 @@
       </p:sp>
       <p:sp>
         <p:nvSpPr>
-          <p:cNvPr id="11" name="Text 7"/>
+          <p:cNvPr id="21" name="Text 19"/>
           <p:cNvSpPr txBox="1"/>
           <p:nvPr/>
         </p:nvSpPr>
         <p:spPr>
           <a:xfrm>
-            <a:off x="932688" y="5908802"/>
-            <a:ext cx="10710367" cy="263398"/>
+            <a:off x="7973568" y="3097530"/>
+            <a:ext cx="3669487" cy="836676"/>
           </a:xfrm>
           <a:prstGeom prst="rect">
             <a:avLst/>
@@ -7103,7 +7147,7 @@
               <a:buNone/>
             </a:pPr>
             <a:r>
-              <a:rPr lang="en-US" sz="1700" dirty="0">
+              <a:rPr lang="en-US" sz="1800" dirty="0">
                 <a:solidFill>
                   <a:srgbClr val="1B2530"/>
                 </a:solidFill>
@@ -7111,9 +7155,209 @@
                 <a:ea typeface="Calibri" pitchFamily="34" charset="-122"/>
                 <a:cs typeface="Calibri" pitchFamily="34" charset="-120"/>
               </a:rPr>
-              <a:t>L'uscita del flip-flop è ferma per un intero periodo: è ciò che serve a un registro di stato</a:t>
-            </a:r>
-            <a:endParaRPr lang="en-US" sz="1700" dirty="0"/>
+              <a:t>Non sono mai trasparenti insieme: l'ingresso non può mai correre dritto fino all'uscita</a:t>
+            </a:r>
+            <a:endParaRPr lang="en-US" sz="1800" dirty="0"/>
+          </a:p>
+        </p:txBody>
+      </p:sp>
+      <p:sp>
+        <p:nvSpPr>
+          <p:cNvPr id="22" name="Shape 20"/>
+          <p:cNvSpPr/>
+          <p:nvPr/>
+        </p:nvSpPr>
+        <p:spPr>
+          <a:xfrm>
+            <a:off x="7589520" y="4291965"/>
+            <a:ext cx="146304" cy="146304"/>
+          </a:xfrm>
+          <a:prstGeom prst="rect">
+            <a:avLst/>
+          </a:prstGeom>
+          <a:solidFill>
+            <a:srgbClr val="C7791B"/>
+          </a:solidFill>
+          <a:ln w="12700">
+            <a:solidFill>
+              <a:srgbClr val="C7791B"/>
+            </a:solidFill>
+            <a:prstDash val="solid"/>
+          </a:ln>
+        </p:spPr>
+      </p:sp>
+      <p:sp>
+        <p:nvSpPr>
+          <p:cNvPr id="23" name="Text 21"/>
+          <p:cNvSpPr txBox="1"/>
+          <p:nvPr/>
+        </p:nvSpPr>
+        <p:spPr>
+          <a:xfrm>
+            <a:off x="7973568" y="4216527"/>
+            <a:ext cx="3669487" cy="557784"/>
+          </a:xfrm>
+          <a:prstGeom prst="rect">
+            <a:avLst/>
+          </a:prstGeom>
+          <a:noFill/>
+          <a:ln/>
+        </p:spPr>
+        <p:txBody>
+          <a:bodyPr wrap="square" lIns="0" tIns="0" rIns="0" bIns="0" rtlCol="0" anchor="t"/>
+          <a:lstStyle/>
+          <a:p>
+            <a:pPr indent="0" marL="0">
+              <a:spcAft>
+                <a:spcPts val="200"/>
+              </a:spcAft>
+              <a:buNone/>
+            </a:pPr>
+            <a:r>
+              <a:rPr lang="en-US" sz="1800" dirty="0">
+                <a:solidFill>
+                  <a:srgbClr val="1B2530"/>
+                </a:solidFill>
+                <a:latin typeface="Calibri" pitchFamily="34" charset="0"/>
+                <a:ea typeface="Calibri" pitchFamily="34" charset="-122"/>
+                <a:cs typeface="Calibri" pitchFamily="34" charset="-120"/>
+              </a:rPr>
+              <a:t>L'uscita cambia solo quando il clock passa da 0 a 1: sul fronte</a:t>
+            </a:r>
+            <a:endParaRPr lang="en-US" sz="1800" dirty="0"/>
+          </a:p>
+        </p:txBody>
+      </p:sp>
+      <p:sp>
+        <p:nvSpPr>
+          <p:cNvPr id="24" name="Shape 22"/>
+          <p:cNvSpPr/>
+          <p:nvPr/>
+        </p:nvSpPr>
+        <p:spPr>
+          <a:xfrm>
+            <a:off x="7589520" y="5132070"/>
+            <a:ext cx="146304" cy="146304"/>
+          </a:xfrm>
+          <a:prstGeom prst="rect">
+            <a:avLst/>
+          </a:prstGeom>
+          <a:solidFill>
+            <a:srgbClr val="0E7C86"/>
+          </a:solidFill>
+          <a:ln w="12700">
+            <a:solidFill>
+              <a:srgbClr val="0E7C86"/>
+            </a:solidFill>
+            <a:prstDash val="solid"/>
+          </a:ln>
+        </p:spPr>
+      </p:sp>
+      <p:sp>
+        <p:nvSpPr>
+          <p:cNvPr id="25" name="Text 23"/>
+          <p:cNvSpPr txBox="1"/>
+          <p:nvPr/>
+        </p:nvSpPr>
+        <p:spPr>
+          <a:xfrm>
+            <a:off x="7973568" y="5056632"/>
+            <a:ext cx="3669487" cy="1115568"/>
+          </a:xfrm>
+          <a:prstGeom prst="rect">
+            <a:avLst/>
+          </a:prstGeom>
+          <a:noFill/>
+          <a:ln/>
+        </p:spPr>
+        <p:txBody>
+          <a:bodyPr wrap="square" lIns="0" tIns="0" rIns="0" bIns="0" rtlCol="0" anchor="t"/>
+          <a:lstStyle/>
+          <a:p>
+            <a:pPr indent="0" marL="0">
+              <a:spcAft>
+                <a:spcPts val="200"/>
+              </a:spcAft>
+              <a:buNone/>
+            </a:pPr>
+            <a:r>
+              <a:rPr lang="en-US" sz="1800" dirty="0">
+                <a:solidFill>
+                  <a:srgbClr val="1B2530"/>
+                </a:solidFill>
+                <a:latin typeface="Calibri" pitchFamily="34" charset="0"/>
+                <a:ea typeface="Calibri" pitchFamily="34" charset="-122"/>
+                <a:cs typeface="Calibri" pitchFamily="34" charset="-120"/>
+              </a:rPr>
+              <a:t>Un flip-flop è sensibile al fronte: un'operazione per ciclo di clock, e nessuna fluttuazione dell'uscita</a:t>
+            </a:r>
+            <a:endParaRPr lang="en-US" sz="1800" dirty="0"/>
+          </a:p>
+        </p:txBody>
+      </p:sp>
+      <p:sp>
+        <p:nvSpPr>
+          <p:cNvPr id="26" name="Shape 24"/>
+          <p:cNvSpPr/>
+          <p:nvPr/>
+        </p:nvSpPr>
+        <p:spPr>
+          <a:xfrm>
+            <a:off x="548640" y="5257800"/>
+            <a:ext cx="6675120" cy="914400"/>
+          </a:xfrm>
+          <a:prstGeom prst="roundRect">
+            <a:avLst>
+              <a:gd name="adj" fmla="val 8000"/>
+            </a:avLst>
+          </a:prstGeom>
+          <a:solidFill>
+            <a:srgbClr val="D8ECEE"/>
+          </a:solidFill>
+          <a:ln w="12700">
+            <a:solidFill>
+              <a:srgbClr val="D8ECEE"/>
+            </a:solidFill>
+            <a:prstDash val="solid"/>
+          </a:ln>
+        </p:spPr>
+      </p:sp>
+      <p:sp>
+        <p:nvSpPr>
+          <p:cNvPr id="27" name="Text 25"/>
+          <p:cNvSpPr txBox="1"/>
+          <p:nvPr/>
+        </p:nvSpPr>
+        <p:spPr>
+          <a:xfrm>
+            <a:off x="731520" y="5257800"/>
+            <a:ext cx="6309360" cy="914400"/>
+          </a:xfrm>
+          <a:prstGeom prst="rect">
+            <a:avLst/>
+          </a:prstGeom>
+          <a:noFill/>
+          <a:ln/>
+        </p:spPr>
+        <p:txBody>
+          <a:bodyPr wrap="square" lIns="0" tIns="0" rIns="0" bIns="0" rtlCol="0" anchor="ctr"/>
+          <a:lstStyle/>
+          <a:p>
+            <a:pPr algn="ctr" indent="0" marL="0">
+              <a:buNone/>
+            </a:pPr>
+            <a:r>
+              <a:rPr lang="en-US" sz="1800" b="1" dirty="0">
+                <a:solidFill>
+                  <a:srgbClr val="2E4A62"/>
+                </a:solidFill>
+                <a:latin typeface="Calibri" pitchFamily="34" charset="0"/>
+                <a:ea typeface="Calibri" pitchFamily="34" charset="-122"/>
+                <a:cs typeface="Calibri" pitchFamily="34" charset="-120"/>
+              </a:rPr>
+              <a:t>(livello 0) seguito da (livello 1) = (fronte di salita)</a:t>
+            </a:r>
+            <a:endParaRPr lang="en-US" sz="1800" dirty="0"/>
           </a:p>
         </p:txBody>
       </p:sp>
@@ -7225,1962 +7469,264 @@
                 <a:ea typeface="Cambria" pitchFamily="34" charset="-122"/>
                 <a:cs typeface="Cambria" pitchFamily="34" charset="-120"/>
               </a:rPr>
-              <a:t>Elementi di memoria: un riepilogo</a:t>
+              <a:t>Latch o flip-flop? Guardate l'uscita</a:t>
             </a:r>
             <a:endParaRPr lang="en-US" sz="3200" dirty="0"/>
           </a:p>
         </p:txBody>
       </p:sp>
-      <p:graphicFrame>
-        <p:nvGraphicFramePr>
-          <p:cNvPr id="16" name="Table 0"/>
-          <p:cNvGraphicFramePr>
-            <a:graphicFrameLocks noGrp="1"/>
-          </p:cNvGraphicFramePr>
-          <p:nvPr>
-            <p:extLst>
-              <p:ext uri="{D42A27DB-BD31-4B8C-83A1-F6EECF244321}">
-                <p14:modId xmlns:p14="http://schemas.microsoft.com/office/powerpoint/2010/main" val="1579011935"/>
-              </p:ext>
-            </p:extLst>
-          </p:nvPr>
-        </p:nvGraphicFramePr>
-        <p:xfrm>
-          <a:off x="548640" y="1417320"/>
-          <a:ext cx="11094415" cy="914400"/>
-        </p:xfrm>
-        <a:graphic>
-          <a:graphicData uri="http://schemas.openxmlformats.org/drawingml/2006/table">
-            <a:tbl>
-              <a:tblPr/>
-              <a:tblGrid>
-                <a:gridCol w="2840170"/>
-                <a:gridCol w="1686351"/>
-                <a:gridCol w="2840170"/>
-                <a:gridCol w="3727724"/>
-              </a:tblGrid>
-              <a:tr h="0">
-                <a:tc>
-                  <a:txBody>
-                    <a:bodyPr/>
-                    <a:lstStyle/>
-                    <a:p>
-                      <a:pPr algn="l" indent="0" marL="0">
-                        <a:buNone/>
-                      </a:pPr>
-                      <a:r>
-                        <a:rPr lang="en-US" sz="2100" b="1" dirty="0">
-                          <a:solidFill>
-                            <a:srgbClr val="FFFFFF"/>
-                          </a:solidFill>
-                          <a:latin typeface="Calibri" pitchFamily="34" charset="0"/>
-                          <a:ea typeface="Calibri" pitchFamily="34" charset="-122"/>
-                          <a:cs typeface="Calibri" pitchFamily="34" charset="-120"/>
-                        </a:rPr>
-                        <a:t>Elemento</a:t>
-                      </a:r>
-                      <a:endParaRPr lang="en-US" sz="2100" dirty="0">
-                        <a:latin typeface="Calibri" charset="0"/>
-                        <a:ea typeface="Calibri" charset="0"/>
-                        <a:cs typeface="Calibri" charset="0"/>
-                      </a:endParaRPr>
-                    </a:p>
-                  </a:txBody>
-                  <a:tcPr marL="101600" marR="101600" marT="50800" marB="50800" anchor="ctr">
-                    <a:lnL w="6350" cap="flat" cmpd="sng" algn="ctr">
-                      <a:solidFill>
-                        <a:srgbClr val="C9D2D8"/>
-                      </a:solidFill>
-                      <a:prstDash val="solid"/>
-                      <a:round/>
-                      <a:headEnd type="none" w="med" len="med"/>
-                      <a:tailEnd type="none" w="med" len="med"/>
-                    </a:lnL>
-                    <a:lnR w="6350" cap="flat" cmpd="sng" algn="ctr">
-                      <a:solidFill>
-                        <a:srgbClr val="C9D2D8"/>
-                      </a:solidFill>
-                      <a:prstDash val="solid"/>
-                      <a:round/>
-                      <a:headEnd type="none" w="med" len="med"/>
-                      <a:tailEnd type="none" w="med" len="med"/>
-                    </a:lnR>
-                    <a:lnT w="6350" cap="flat" cmpd="sng" algn="ctr">
-                      <a:solidFill>
-                        <a:srgbClr val="C9D2D8"/>
-                      </a:solidFill>
-                      <a:prstDash val="solid"/>
-                      <a:round/>
-                      <a:headEnd type="none" w="med" len="med"/>
-                      <a:tailEnd type="none" w="med" len="med"/>
-                    </a:lnT>
-                    <a:lnB w="6350" cap="flat" cmpd="sng" algn="ctr">
-                      <a:solidFill>
-                        <a:srgbClr val="C9D2D8"/>
-                      </a:solidFill>
-                      <a:prstDash val="solid"/>
-                      <a:round/>
-                      <a:headEnd type="none" w="med" len="med"/>
-                      <a:tailEnd type="none" w="med" len="med"/>
-                    </a:lnB>
-                    <a:solidFill>
-                      <a:srgbClr val="2E4A62"/>
-                    </a:solidFill>
-                  </a:tcPr>
-                </a:tc>
-                <a:tc>
-                  <a:txBody>
-                    <a:bodyPr/>
-                    <a:lstStyle/>
-                    <a:p>
-                      <a:pPr algn="l" indent="0" marL="0">
-                        <a:buNone/>
-                      </a:pPr>
-                      <a:r>
-                        <a:rPr lang="en-US" sz="2100" b="1" dirty="0">
-                          <a:solidFill>
-                            <a:srgbClr val="FFFFFF"/>
-                          </a:solidFill>
-                          <a:latin typeface="Calibri" pitchFamily="34" charset="0"/>
-                          <a:ea typeface="Calibri" pitchFamily="34" charset="-122"/>
-                          <a:cs typeface="Calibri" pitchFamily="34" charset="-120"/>
-                        </a:rPr>
-                        <a:t>Ingressi</a:t>
-                      </a:r>
-                      <a:endParaRPr lang="en-US" sz="2100" dirty="0">
-                        <a:latin typeface="Calibri" charset="0"/>
-                        <a:ea typeface="Calibri" charset="0"/>
-                        <a:cs typeface="Calibri" charset="0"/>
-                      </a:endParaRPr>
-                    </a:p>
-                  </a:txBody>
-                  <a:tcPr marL="101600" marR="101600" marT="50800" marB="50800" anchor="ctr">
-                    <a:lnL w="6350" cap="flat" cmpd="sng" algn="ctr">
-                      <a:solidFill>
-                        <a:srgbClr val="C9D2D8"/>
-                      </a:solidFill>
-                      <a:prstDash val="solid"/>
-                      <a:round/>
-                      <a:headEnd type="none" w="med" len="med"/>
-                      <a:tailEnd type="none" w="med" len="med"/>
-                    </a:lnL>
-                    <a:lnR w="6350" cap="flat" cmpd="sng" algn="ctr">
-                      <a:solidFill>
-                        <a:srgbClr val="C9D2D8"/>
-                      </a:solidFill>
-                      <a:prstDash val="solid"/>
-                      <a:round/>
-                      <a:headEnd type="none" w="med" len="med"/>
-                      <a:tailEnd type="none" w="med" len="med"/>
-                    </a:lnR>
-                    <a:lnT w="6350" cap="flat" cmpd="sng" algn="ctr">
-                      <a:solidFill>
-                        <a:srgbClr val="C9D2D8"/>
-                      </a:solidFill>
-                      <a:prstDash val="solid"/>
-                      <a:round/>
-                      <a:headEnd type="none" w="med" len="med"/>
-                      <a:tailEnd type="none" w="med" len="med"/>
-                    </a:lnT>
-                    <a:lnB w="6350" cap="flat" cmpd="sng" algn="ctr">
-                      <a:solidFill>
-                        <a:srgbClr val="C9D2D8"/>
-                      </a:solidFill>
-                      <a:prstDash val="solid"/>
-                      <a:round/>
-                      <a:headEnd type="none" w="med" len="med"/>
-                      <a:tailEnd type="none" w="med" len="med"/>
-                    </a:lnB>
-                    <a:solidFill>
-                      <a:srgbClr val="2E4A62"/>
-                    </a:solidFill>
-                  </a:tcPr>
-                </a:tc>
-                <a:tc>
-                  <a:txBody>
-                    <a:bodyPr/>
-                    <a:lstStyle/>
-                    <a:p>
-                      <a:pPr algn="l" indent="0" marL="0">
-                        <a:buNone/>
-                      </a:pPr>
-                      <a:r>
-                        <a:rPr lang="en-US" sz="2100" b="1" dirty="0">
-                          <a:solidFill>
-                            <a:srgbClr val="FFFFFF"/>
-                          </a:solidFill>
-                          <a:latin typeface="Calibri" pitchFamily="34" charset="0"/>
-                          <a:ea typeface="Calibri" pitchFamily="34" charset="-122"/>
-                          <a:cs typeface="Calibri" pitchFamily="34" charset="-120"/>
-                        </a:rPr>
-                        <a:t>Stato prossimo</a:t>
-                      </a:r>
-                      <a:endParaRPr lang="en-US" sz="2100" dirty="0">
-                        <a:latin typeface="Calibri" charset="0"/>
-                        <a:ea typeface="Calibri" charset="0"/>
-                        <a:cs typeface="Calibri" charset="0"/>
-                      </a:endParaRPr>
-                    </a:p>
-                  </a:txBody>
-                  <a:tcPr marL="101600" marR="101600" marT="50800" marB="50800" anchor="ctr">
-                    <a:lnL w="6350" cap="flat" cmpd="sng" algn="ctr">
-                      <a:solidFill>
-                        <a:srgbClr val="C9D2D8"/>
-                      </a:solidFill>
-                      <a:prstDash val="solid"/>
-                      <a:round/>
-                      <a:headEnd type="none" w="med" len="med"/>
-                      <a:tailEnd type="none" w="med" len="med"/>
-                    </a:lnL>
-                    <a:lnR w="6350" cap="flat" cmpd="sng" algn="ctr">
-                      <a:solidFill>
-                        <a:srgbClr val="C9D2D8"/>
-                      </a:solidFill>
-                      <a:prstDash val="solid"/>
-                      <a:round/>
-                      <a:headEnd type="none" w="med" len="med"/>
-                      <a:tailEnd type="none" w="med" len="med"/>
-                    </a:lnR>
-                    <a:lnT w="6350" cap="flat" cmpd="sng" algn="ctr">
-                      <a:solidFill>
-                        <a:srgbClr val="C9D2D8"/>
-                      </a:solidFill>
-                      <a:prstDash val="solid"/>
-                      <a:round/>
-                      <a:headEnd type="none" w="med" len="med"/>
-                      <a:tailEnd type="none" w="med" len="med"/>
-                    </a:lnT>
-                    <a:lnB w="6350" cap="flat" cmpd="sng" algn="ctr">
-                      <a:solidFill>
-                        <a:srgbClr val="C9D2D8"/>
-                      </a:solidFill>
-                      <a:prstDash val="solid"/>
-                      <a:round/>
-                      <a:headEnd type="none" w="med" len="med"/>
-                      <a:tailEnd type="none" w="med" len="med"/>
-                    </a:lnB>
-                    <a:solidFill>
-                      <a:srgbClr val="2E4A62"/>
-                    </a:solidFill>
-                  </a:tcPr>
-                </a:tc>
-                <a:tc>
-                  <a:txBody>
-                    <a:bodyPr/>
-                    <a:lstStyle/>
-                    <a:p>
-                      <a:pPr algn="l" indent="0" marL="0">
-                        <a:buNone/>
-                      </a:pPr>
-                      <a:r>
-                        <a:rPr lang="en-US" sz="2100" b="1" dirty="0">
-                          <a:solidFill>
-                            <a:srgbClr val="FFFFFF"/>
-                          </a:solidFill>
-                          <a:latin typeface="Calibri" pitchFamily="34" charset="0"/>
-                          <a:ea typeface="Calibri" pitchFamily="34" charset="-122"/>
-                          <a:cs typeface="Calibri" pitchFamily="34" charset="-120"/>
-                        </a:rPr>
-                        <a:t>Cambia quando</a:t>
-                      </a:r>
-                      <a:endParaRPr lang="en-US" sz="2100" dirty="0">
-                        <a:latin typeface="Calibri" charset="0"/>
-                        <a:ea typeface="Calibri" charset="0"/>
-                        <a:cs typeface="Calibri" charset="0"/>
-                      </a:endParaRPr>
-                    </a:p>
-                  </a:txBody>
-                  <a:tcPr marL="101600" marR="101600" marT="50800" marB="50800" anchor="ctr">
-                    <a:lnL w="6350" cap="flat" cmpd="sng" algn="ctr">
-                      <a:solidFill>
-                        <a:srgbClr val="C9D2D8"/>
-                      </a:solidFill>
-                      <a:prstDash val="solid"/>
-                      <a:round/>
-                      <a:headEnd type="none" w="med" len="med"/>
-                      <a:tailEnd type="none" w="med" len="med"/>
-                    </a:lnL>
-                    <a:lnR w="6350" cap="flat" cmpd="sng" algn="ctr">
-                      <a:solidFill>
-                        <a:srgbClr val="C9D2D8"/>
-                      </a:solidFill>
-                      <a:prstDash val="solid"/>
-                      <a:round/>
-                      <a:headEnd type="none" w="med" len="med"/>
-                      <a:tailEnd type="none" w="med" len="med"/>
-                    </a:lnR>
-                    <a:lnT w="6350" cap="flat" cmpd="sng" algn="ctr">
-                      <a:solidFill>
-                        <a:srgbClr val="C9D2D8"/>
-                      </a:solidFill>
-                      <a:prstDash val="solid"/>
-                      <a:round/>
-                      <a:headEnd type="none" w="med" len="med"/>
-                      <a:tailEnd type="none" w="med" len="med"/>
-                    </a:lnT>
-                    <a:lnB w="6350" cap="flat" cmpd="sng" algn="ctr">
-                      <a:solidFill>
-                        <a:srgbClr val="C9D2D8"/>
-                      </a:solidFill>
-                      <a:prstDash val="solid"/>
-                      <a:round/>
-                      <a:headEnd type="none" w="med" len="med"/>
-                      <a:tailEnd type="none" w="med" len="med"/>
-                    </a:lnB>
-                    <a:solidFill>
-                      <a:srgbClr val="2E4A62"/>
-                    </a:solidFill>
-                  </a:tcPr>
-                </a:tc>
-              </a:tr>
-              <a:tr h="0">
-                <a:tc>
-                  <a:txBody>
-                    <a:bodyPr/>
-                    <a:lstStyle/>
-                    <a:p>
-                      <a:pPr algn="l" indent="0" marL="0">
-                        <a:buNone/>
-                      </a:pPr>
-                      <a:r>
-                        <a:rPr lang="en-US" sz="2100" b="1" dirty="0">
-                          <a:solidFill>
-                            <a:srgbClr val="1B2530"/>
-                          </a:solidFill>
-                          <a:latin typeface="Calibri" pitchFamily="34" charset="0"/>
-                          <a:ea typeface="Calibri" pitchFamily="34" charset="-122"/>
-                          <a:cs typeface="Calibri" pitchFamily="34" charset="-120"/>
-                        </a:rPr>
-                        <a:t>latch SR (S R = 0)</a:t>
-                      </a:r>
-                      <a:endParaRPr lang="en-US" sz="2100" dirty="0">
-                        <a:latin typeface="Calibri" charset="0"/>
-                        <a:ea typeface="Calibri" charset="0"/>
-                        <a:cs typeface="Calibri" charset="0"/>
-                      </a:endParaRPr>
-                    </a:p>
-                  </a:txBody>
-                  <a:tcPr marL="101600" marR="101600" marT="50800" marB="50800" anchor="ctr">
-                    <a:lnL w="6350" cap="flat" cmpd="sng" algn="ctr">
-                      <a:solidFill>
-                        <a:srgbClr val="C9D2D8"/>
-                      </a:solidFill>
-                      <a:prstDash val="solid"/>
-                      <a:round/>
-                      <a:headEnd type="none" w="med" len="med"/>
-                      <a:tailEnd type="none" w="med" len="med"/>
-                    </a:lnL>
-                    <a:lnR w="6350" cap="flat" cmpd="sng" algn="ctr">
-                      <a:solidFill>
-                        <a:srgbClr val="C9D2D8"/>
-                      </a:solidFill>
-                      <a:prstDash val="solid"/>
-                      <a:round/>
-                      <a:headEnd type="none" w="med" len="med"/>
-                      <a:tailEnd type="none" w="med" len="med"/>
-                    </a:lnR>
-                    <a:lnT w="6350" cap="flat" cmpd="sng" algn="ctr">
-                      <a:solidFill>
-                        <a:srgbClr val="C9D2D8"/>
-                      </a:solidFill>
-                      <a:prstDash val="solid"/>
-                      <a:round/>
-                      <a:headEnd type="none" w="med" len="med"/>
-                      <a:tailEnd type="none" w="med" len="med"/>
-                    </a:lnT>
-                    <a:lnB w="6350" cap="flat" cmpd="sng" algn="ctr">
-                      <a:solidFill>
-                        <a:srgbClr val="C9D2D8"/>
-                      </a:solidFill>
-                      <a:prstDash val="solid"/>
-                      <a:round/>
-                      <a:headEnd type="none" w="med" len="med"/>
-                      <a:tailEnd type="none" w="med" len="med"/>
-                    </a:lnB>
-                    <a:solidFill>
-                      <a:srgbClr val="EEF2F4"/>
-                    </a:solidFill>
-                  </a:tcPr>
-                </a:tc>
-                <a:tc>
-                  <a:txBody>
-                    <a:bodyPr/>
-                    <a:lstStyle/>
-                    <a:p>
-                      <a:pPr algn="l" indent="0" marL="0">
-                        <a:buNone/>
-                      </a:pPr>
-                      <a:r>
-                        <a:rPr lang="en-US" sz="2100" dirty="0">
-                          <a:solidFill>
-                            <a:srgbClr val="1B2530"/>
-                          </a:solidFill>
-                          <a:latin typeface="Courier New" pitchFamily="34" charset="0"/>
-                          <a:ea typeface="Courier New" pitchFamily="34" charset="-122"/>
-                          <a:cs typeface="Courier New" pitchFamily="34" charset="-120"/>
-                        </a:rPr>
-                        <a:t>S, R</a:t>
-                      </a:r>
-                      <a:endParaRPr lang="en-US" sz="2100" dirty="0">
-                        <a:latin typeface="Courier New" charset="0"/>
-                        <a:ea typeface="Courier New" charset="0"/>
-                        <a:cs typeface="Courier New" charset="0"/>
-                      </a:endParaRPr>
-                    </a:p>
-                  </a:txBody>
-                  <a:tcPr marL="101600" marR="101600" marT="50800" marB="50800" anchor="ctr">
-                    <a:lnL w="6350" cap="flat" cmpd="sng" algn="ctr">
-                      <a:solidFill>
-                        <a:srgbClr val="C9D2D8"/>
-                      </a:solidFill>
-                      <a:prstDash val="solid"/>
-                      <a:round/>
-                      <a:headEnd type="none" w="med" len="med"/>
-                      <a:tailEnd type="none" w="med" len="med"/>
-                    </a:lnL>
-                    <a:lnR w="6350" cap="flat" cmpd="sng" algn="ctr">
-                      <a:solidFill>
-                        <a:srgbClr val="C9D2D8"/>
-                      </a:solidFill>
-                      <a:prstDash val="solid"/>
-                      <a:round/>
-                      <a:headEnd type="none" w="med" len="med"/>
-                      <a:tailEnd type="none" w="med" len="med"/>
-                    </a:lnR>
-                    <a:lnT w="6350" cap="flat" cmpd="sng" algn="ctr">
-                      <a:solidFill>
-                        <a:srgbClr val="C9D2D8"/>
-                      </a:solidFill>
-                      <a:prstDash val="solid"/>
-                      <a:round/>
-                      <a:headEnd type="none" w="med" len="med"/>
-                      <a:tailEnd type="none" w="med" len="med"/>
-                    </a:lnT>
-                    <a:lnB w="6350" cap="flat" cmpd="sng" algn="ctr">
-                      <a:solidFill>
-                        <a:srgbClr val="C9D2D8"/>
-                      </a:solidFill>
-                      <a:prstDash val="solid"/>
-                      <a:round/>
-                      <a:headEnd type="none" w="med" len="med"/>
-                      <a:tailEnd type="none" w="med" len="med"/>
-                    </a:lnB>
-                    <a:solidFill>
-                      <a:srgbClr val="EEF2F4"/>
-                    </a:solidFill>
-                  </a:tcPr>
-                </a:tc>
-                <a:tc>
-                  <a:txBody>
-                    <a:bodyPr/>
-                    <a:lstStyle/>
-                    <a:p>
-                      <a:pPr algn="l" indent="0" marL="0">
-                        <a:buNone/>
-                      </a:pPr>
-                      <a:r>
-                        <a:rPr lang="en-US" sz="2100" dirty="0">
-                          <a:solidFill>
-                            <a:srgbClr val="1B2530"/>
-                          </a:solidFill>
-                          <a:latin typeface="Courier New" pitchFamily="34" charset="0"/>
-                          <a:ea typeface="Courier New" pitchFamily="34" charset="-122"/>
-                          <a:cs typeface="Courier New" pitchFamily="34" charset="-120"/>
-                        </a:rPr>
-                        <a:t>Q+ = S + R' Q</a:t>
-                      </a:r>
-                      <a:endParaRPr lang="en-US" sz="2100" dirty="0">
-                        <a:latin typeface="Courier New" charset="0"/>
-                        <a:ea typeface="Courier New" charset="0"/>
-                        <a:cs typeface="Courier New" charset="0"/>
-                      </a:endParaRPr>
-                    </a:p>
-                  </a:txBody>
-                  <a:tcPr marL="101600" marR="101600" marT="50800" marB="50800" anchor="ctr">
-                    <a:lnL w="6350" cap="flat" cmpd="sng" algn="ctr">
-                      <a:solidFill>
-                        <a:srgbClr val="C9D2D8"/>
-                      </a:solidFill>
-                      <a:prstDash val="solid"/>
-                      <a:round/>
-                      <a:headEnd type="none" w="med" len="med"/>
-                      <a:tailEnd type="none" w="med" len="med"/>
-                    </a:lnL>
-                    <a:lnR w="6350" cap="flat" cmpd="sng" algn="ctr">
-                      <a:solidFill>
-                        <a:srgbClr val="C9D2D8"/>
-                      </a:solidFill>
-                      <a:prstDash val="solid"/>
-                      <a:round/>
-                      <a:headEnd type="none" w="med" len="med"/>
-                      <a:tailEnd type="none" w="med" len="med"/>
-                    </a:lnR>
-                    <a:lnT w="6350" cap="flat" cmpd="sng" algn="ctr">
-                      <a:solidFill>
-                        <a:srgbClr val="C9D2D8"/>
-                      </a:solidFill>
-                      <a:prstDash val="solid"/>
-                      <a:round/>
-                      <a:headEnd type="none" w="med" len="med"/>
-                      <a:tailEnd type="none" w="med" len="med"/>
-                    </a:lnT>
-                    <a:lnB w="6350" cap="flat" cmpd="sng" algn="ctr">
-                      <a:solidFill>
-                        <a:srgbClr val="C9D2D8"/>
-                      </a:solidFill>
-                      <a:prstDash val="solid"/>
-                      <a:round/>
-                      <a:headEnd type="none" w="med" len="med"/>
-                      <a:tailEnd type="none" w="med" len="med"/>
-                    </a:lnB>
-                    <a:solidFill>
-                      <a:srgbClr val="EEF2F4"/>
-                    </a:solidFill>
-                  </a:tcPr>
-                </a:tc>
-                <a:tc>
-                  <a:txBody>
-                    <a:bodyPr/>
-                    <a:lstStyle/>
-                    <a:p>
-                      <a:pPr algn="l" indent="0" marL="0">
-                        <a:buNone/>
-                      </a:pPr>
-                      <a:r>
-                        <a:rPr lang="en-US" sz="2100" dirty="0">
-                          <a:solidFill>
-                            <a:srgbClr val="1B2530"/>
-                          </a:solidFill>
-                          <a:latin typeface="Calibri" pitchFamily="34" charset="0"/>
-                          <a:ea typeface="Calibri" pitchFamily="34" charset="-122"/>
-                          <a:cs typeface="Calibri" pitchFamily="34" charset="-120"/>
-                        </a:rPr>
-                        <a:t>ogni volta che cambia un ingresso</a:t>
-                      </a:r>
-                      <a:endParaRPr lang="en-US" sz="2100" dirty="0">
-                        <a:latin typeface="Calibri" charset="0"/>
-                        <a:ea typeface="Calibri" charset="0"/>
-                        <a:cs typeface="Calibri" charset="0"/>
-                      </a:endParaRPr>
-                    </a:p>
-                  </a:txBody>
-                  <a:tcPr marL="101600" marR="101600" marT="50800" marB="50800" anchor="ctr">
-                    <a:lnL w="6350" cap="flat" cmpd="sng" algn="ctr">
-                      <a:solidFill>
-                        <a:srgbClr val="C9D2D8"/>
-                      </a:solidFill>
-                      <a:prstDash val="solid"/>
-                      <a:round/>
-                      <a:headEnd type="none" w="med" len="med"/>
-                      <a:tailEnd type="none" w="med" len="med"/>
-                    </a:lnL>
-                    <a:lnR w="6350" cap="flat" cmpd="sng" algn="ctr">
-                      <a:solidFill>
-                        <a:srgbClr val="C9D2D8"/>
-                      </a:solidFill>
-                      <a:prstDash val="solid"/>
-                      <a:round/>
-                      <a:headEnd type="none" w="med" len="med"/>
-                      <a:tailEnd type="none" w="med" len="med"/>
-                    </a:lnR>
-                    <a:lnT w="6350" cap="flat" cmpd="sng" algn="ctr">
-                      <a:solidFill>
-                        <a:srgbClr val="C9D2D8"/>
-                      </a:solidFill>
-                      <a:prstDash val="solid"/>
-                      <a:round/>
-                      <a:headEnd type="none" w="med" len="med"/>
-                      <a:tailEnd type="none" w="med" len="med"/>
-                    </a:lnT>
-                    <a:lnB w="6350" cap="flat" cmpd="sng" algn="ctr">
-                      <a:solidFill>
-                        <a:srgbClr val="C9D2D8"/>
-                      </a:solidFill>
-                      <a:prstDash val="solid"/>
-                      <a:round/>
-                      <a:headEnd type="none" w="med" len="med"/>
-                      <a:tailEnd type="none" w="med" len="med"/>
-                    </a:lnB>
-                    <a:solidFill>
-                      <a:srgbClr val="EEF2F4"/>
-                    </a:solidFill>
-                  </a:tcPr>
-                </a:tc>
-              </a:tr>
-              <a:tr h="0">
-                <a:tc>
-                  <a:txBody>
-                    <a:bodyPr/>
-                    <a:lstStyle/>
-                    <a:p>
-                      <a:pPr algn="l" indent="0" marL="0">
-                        <a:buNone/>
-                      </a:pPr>
-                      <a:r>
-                        <a:rPr lang="en-US" sz="2100" b="1" dirty="0">
-                          <a:solidFill>
-                            <a:srgbClr val="1B2530"/>
-                          </a:solidFill>
-                          <a:latin typeface="Calibri" pitchFamily="34" charset="0"/>
-                          <a:ea typeface="Calibri" pitchFamily="34" charset="-122"/>
-                          <a:cs typeface="Calibri" pitchFamily="34" charset="-120"/>
-                        </a:rPr>
-                        <a:t>latch SR sincrono</a:t>
-                      </a:r>
-                      <a:endParaRPr lang="en-US" sz="2100" dirty="0">
-                        <a:latin typeface="Calibri" charset="0"/>
-                        <a:ea typeface="Calibri" charset="0"/>
-                        <a:cs typeface="Calibri" charset="0"/>
-                      </a:endParaRPr>
-                    </a:p>
-                  </a:txBody>
-                  <a:tcPr marL="101600" marR="101600" marT="50800" marB="50800" anchor="ctr">
-                    <a:lnL w="6350" cap="flat" cmpd="sng" algn="ctr">
-                      <a:solidFill>
-                        <a:srgbClr val="C9D2D8"/>
-                      </a:solidFill>
-                      <a:prstDash val="solid"/>
-                      <a:round/>
-                      <a:headEnd type="none" w="med" len="med"/>
-                      <a:tailEnd type="none" w="med" len="med"/>
-                    </a:lnL>
-                    <a:lnR w="6350" cap="flat" cmpd="sng" algn="ctr">
-                      <a:solidFill>
-                        <a:srgbClr val="C9D2D8"/>
-                      </a:solidFill>
-                      <a:prstDash val="solid"/>
-                      <a:round/>
-                      <a:headEnd type="none" w="med" len="med"/>
-                      <a:tailEnd type="none" w="med" len="med"/>
-                    </a:lnR>
-                    <a:lnT w="6350" cap="flat" cmpd="sng" algn="ctr">
-                      <a:solidFill>
-                        <a:srgbClr val="C9D2D8"/>
-                      </a:solidFill>
-                      <a:prstDash val="solid"/>
-                      <a:round/>
-                      <a:headEnd type="none" w="med" len="med"/>
-                      <a:tailEnd type="none" w="med" len="med"/>
-                    </a:lnT>
-                    <a:lnB w="6350" cap="flat" cmpd="sng" algn="ctr">
-                      <a:solidFill>
-                        <a:srgbClr val="C9D2D8"/>
-                      </a:solidFill>
-                      <a:prstDash val="solid"/>
-                      <a:round/>
-                      <a:headEnd type="none" w="med" len="med"/>
-                      <a:tailEnd type="none" w="med" len="med"/>
-                    </a:lnB>
-                    <a:solidFill>
-                      <a:srgbClr val="FFFFFF"/>
-                    </a:solidFill>
-                  </a:tcPr>
-                </a:tc>
-                <a:tc>
-                  <a:txBody>
-                    <a:bodyPr/>
-                    <a:lstStyle/>
-                    <a:p>
-                      <a:pPr algn="l" indent="0" marL="0">
-                        <a:buNone/>
-                      </a:pPr>
-                      <a:r>
-                        <a:rPr lang="en-US" sz="2100" dirty="0">
-                          <a:solidFill>
-                            <a:srgbClr val="1B2530"/>
-                          </a:solidFill>
-                          <a:latin typeface="Courier New" pitchFamily="34" charset="0"/>
-                          <a:ea typeface="Courier New" pitchFamily="34" charset="-122"/>
-                          <a:cs typeface="Courier New" pitchFamily="34" charset="-120"/>
-                        </a:rPr>
-                        <a:t>S, R, CK</a:t>
-                      </a:r>
-                      <a:endParaRPr lang="en-US" sz="2100" dirty="0">
-                        <a:latin typeface="Courier New" charset="0"/>
-                        <a:ea typeface="Courier New" charset="0"/>
-                        <a:cs typeface="Courier New" charset="0"/>
-                      </a:endParaRPr>
-                    </a:p>
-                  </a:txBody>
-                  <a:tcPr marL="101600" marR="101600" marT="50800" marB="50800" anchor="ctr">
-                    <a:lnL w="6350" cap="flat" cmpd="sng" algn="ctr">
-                      <a:solidFill>
-                        <a:srgbClr val="C9D2D8"/>
-                      </a:solidFill>
-                      <a:prstDash val="solid"/>
-                      <a:round/>
-                      <a:headEnd type="none" w="med" len="med"/>
-                      <a:tailEnd type="none" w="med" len="med"/>
-                    </a:lnL>
-                    <a:lnR w="6350" cap="flat" cmpd="sng" algn="ctr">
-                      <a:solidFill>
-                        <a:srgbClr val="C9D2D8"/>
-                      </a:solidFill>
-                      <a:prstDash val="solid"/>
-                      <a:round/>
-                      <a:headEnd type="none" w="med" len="med"/>
-                      <a:tailEnd type="none" w="med" len="med"/>
-                    </a:lnR>
-                    <a:lnT w="6350" cap="flat" cmpd="sng" algn="ctr">
-                      <a:solidFill>
-                        <a:srgbClr val="C9D2D8"/>
-                      </a:solidFill>
-                      <a:prstDash val="solid"/>
-                      <a:round/>
-                      <a:headEnd type="none" w="med" len="med"/>
-                      <a:tailEnd type="none" w="med" len="med"/>
-                    </a:lnT>
-                    <a:lnB w="6350" cap="flat" cmpd="sng" algn="ctr">
-                      <a:solidFill>
-                        <a:srgbClr val="C9D2D8"/>
-                      </a:solidFill>
-                      <a:prstDash val="solid"/>
-                      <a:round/>
-                      <a:headEnd type="none" w="med" len="med"/>
-                      <a:tailEnd type="none" w="med" len="med"/>
-                    </a:lnB>
-                    <a:solidFill>
-                      <a:srgbClr val="FFFFFF"/>
-                    </a:solidFill>
-                  </a:tcPr>
-                </a:tc>
-                <a:tc>
-                  <a:txBody>
-                    <a:bodyPr/>
-                    <a:lstStyle/>
-                    <a:p>
-                      <a:pPr algn="l" indent="0" marL="0">
-                        <a:buNone/>
-                      </a:pPr>
-                      <a:r>
-                        <a:rPr lang="en-US" sz="2100" dirty="0">
-                          <a:solidFill>
-                            <a:srgbClr val="1B2530"/>
-                          </a:solidFill>
-                          <a:latin typeface="Courier New" pitchFamily="34" charset="0"/>
-                          <a:ea typeface="Courier New" pitchFamily="34" charset="-122"/>
-                          <a:cs typeface="Courier New" pitchFamily="34" charset="-120"/>
-                        </a:rPr>
-                        <a:t>come sopra</a:t>
-                      </a:r>
-                      <a:endParaRPr lang="en-US" sz="2100" dirty="0">
-                        <a:latin typeface="Courier New" charset="0"/>
-                        <a:ea typeface="Courier New" charset="0"/>
-                        <a:cs typeface="Courier New" charset="0"/>
-                      </a:endParaRPr>
-                    </a:p>
-                  </a:txBody>
-                  <a:tcPr marL="101600" marR="101600" marT="50800" marB="50800" anchor="ctr">
-                    <a:lnL w="6350" cap="flat" cmpd="sng" algn="ctr">
-                      <a:solidFill>
-                        <a:srgbClr val="C9D2D8"/>
-                      </a:solidFill>
-                      <a:prstDash val="solid"/>
-                      <a:round/>
-                      <a:headEnd type="none" w="med" len="med"/>
-                      <a:tailEnd type="none" w="med" len="med"/>
-                    </a:lnL>
-                    <a:lnR w="6350" cap="flat" cmpd="sng" algn="ctr">
-                      <a:solidFill>
-                        <a:srgbClr val="C9D2D8"/>
-                      </a:solidFill>
-                      <a:prstDash val="solid"/>
-                      <a:round/>
-                      <a:headEnd type="none" w="med" len="med"/>
-                      <a:tailEnd type="none" w="med" len="med"/>
-                    </a:lnR>
-                    <a:lnT w="6350" cap="flat" cmpd="sng" algn="ctr">
-                      <a:solidFill>
-                        <a:srgbClr val="C9D2D8"/>
-                      </a:solidFill>
-                      <a:prstDash val="solid"/>
-                      <a:round/>
-                      <a:headEnd type="none" w="med" len="med"/>
-                      <a:tailEnd type="none" w="med" len="med"/>
-                    </a:lnT>
-                    <a:lnB w="6350" cap="flat" cmpd="sng" algn="ctr">
-                      <a:solidFill>
-                        <a:srgbClr val="C9D2D8"/>
-                      </a:solidFill>
-                      <a:prstDash val="solid"/>
-                      <a:round/>
-                      <a:headEnd type="none" w="med" len="med"/>
-                      <a:tailEnd type="none" w="med" len="med"/>
-                    </a:lnB>
-                    <a:solidFill>
-                      <a:srgbClr val="FFFFFF"/>
-                    </a:solidFill>
-                  </a:tcPr>
-                </a:tc>
-                <a:tc>
-                  <a:txBody>
-                    <a:bodyPr/>
-                    <a:lstStyle/>
-                    <a:p>
-                      <a:pPr algn="l" indent="0" marL="0">
-                        <a:buNone/>
-                      </a:pPr>
-                      <a:r>
-                        <a:rPr lang="en-US" sz="2100" dirty="0">
-                          <a:solidFill>
-                            <a:srgbClr val="1B2530"/>
-                          </a:solidFill>
-                          <a:latin typeface="Calibri" pitchFamily="34" charset="0"/>
-                          <a:ea typeface="Calibri" pitchFamily="34" charset="-122"/>
-                          <a:cs typeface="Calibri" pitchFamily="34" charset="-120"/>
-                        </a:rPr>
-                        <a:t>finché il clock è al livello attivo</a:t>
-                      </a:r>
-                      <a:endParaRPr lang="en-US" sz="2100" dirty="0">
-                        <a:latin typeface="Calibri" charset="0"/>
-                        <a:ea typeface="Calibri" charset="0"/>
-                        <a:cs typeface="Calibri" charset="0"/>
-                      </a:endParaRPr>
-                    </a:p>
-                  </a:txBody>
-                  <a:tcPr marL="101600" marR="101600" marT="50800" marB="50800" anchor="ctr">
-                    <a:lnL w="6350" cap="flat" cmpd="sng" algn="ctr">
-                      <a:solidFill>
-                        <a:srgbClr val="C9D2D8"/>
-                      </a:solidFill>
-                      <a:prstDash val="solid"/>
-                      <a:round/>
-                      <a:headEnd type="none" w="med" len="med"/>
-                      <a:tailEnd type="none" w="med" len="med"/>
-                    </a:lnL>
-                    <a:lnR w="6350" cap="flat" cmpd="sng" algn="ctr">
-                      <a:solidFill>
-                        <a:srgbClr val="C9D2D8"/>
-                      </a:solidFill>
-                      <a:prstDash val="solid"/>
-                      <a:round/>
-                      <a:headEnd type="none" w="med" len="med"/>
-                      <a:tailEnd type="none" w="med" len="med"/>
-                    </a:lnR>
-                    <a:lnT w="6350" cap="flat" cmpd="sng" algn="ctr">
-                      <a:solidFill>
-                        <a:srgbClr val="C9D2D8"/>
-                      </a:solidFill>
-                      <a:prstDash val="solid"/>
-                      <a:round/>
-                      <a:headEnd type="none" w="med" len="med"/>
-                      <a:tailEnd type="none" w="med" len="med"/>
-                    </a:lnT>
-                    <a:lnB w="6350" cap="flat" cmpd="sng" algn="ctr">
-                      <a:solidFill>
-                        <a:srgbClr val="C9D2D8"/>
-                      </a:solidFill>
-                      <a:prstDash val="solid"/>
-                      <a:round/>
-                      <a:headEnd type="none" w="med" len="med"/>
-                      <a:tailEnd type="none" w="med" len="med"/>
-                    </a:lnB>
-                    <a:solidFill>
-                      <a:srgbClr val="FFFFFF"/>
-                    </a:solidFill>
-                  </a:tcPr>
-                </a:tc>
-              </a:tr>
-              <a:tr h="0">
-                <a:tc>
-                  <a:txBody>
-                    <a:bodyPr/>
-                    <a:lstStyle/>
-                    <a:p>
-                      <a:pPr algn="l" indent="0" marL="0">
-                        <a:buNone/>
-                      </a:pPr>
-                      <a:r>
-                        <a:rPr lang="en-US" sz="2100" b="1" dirty="0">
-                          <a:solidFill>
-                            <a:srgbClr val="1B2530"/>
-                          </a:solidFill>
-                          <a:latin typeface="Calibri" pitchFamily="34" charset="0"/>
-                          <a:ea typeface="Calibri" pitchFamily="34" charset="-122"/>
-                          <a:cs typeface="Calibri" pitchFamily="34" charset="-120"/>
-                        </a:rPr>
-                        <a:t>latch D</a:t>
-                      </a:r>
-                      <a:endParaRPr lang="en-US" sz="2100" dirty="0">
-                        <a:latin typeface="Calibri" charset="0"/>
-                        <a:ea typeface="Calibri" charset="0"/>
-                        <a:cs typeface="Calibri" charset="0"/>
-                      </a:endParaRPr>
-                    </a:p>
-                  </a:txBody>
-                  <a:tcPr marL="101600" marR="101600" marT="50800" marB="50800" anchor="ctr">
-                    <a:lnL w="6350" cap="flat" cmpd="sng" algn="ctr">
-                      <a:solidFill>
-                        <a:srgbClr val="C9D2D8"/>
-                      </a:solidFill>
-                      <a:prstDash val="solid"/>
-                      <a:round/>
-                      <a:headEnd type="none" w="med" len="med"/>
-                      <a:tailEnd type="none" w="med" len="med"/>
-                    </a:lnL>
-                    <a:lnR w="6350" cap="flat" cmpd="sng" algn="ctr">
-                      <a:solidFill>
-                        <a:srgbClr val="C9D2D8"/>
-                      </a:solidFill>
-                      <a:prstDash val="solid"/>
-                      <a:round/>
-                      <a:headEnd type="none" w="med" len="med"/>
-                      <a:tailEnd type="none" w="med" len="med"/>
-                    </a:lnR>
-                    <a:lnT w="6350" cap="flat" cmpd="sng" algn="ctr">
-                      <a:solidFill>
-                        <a:srgbClr val="C9D2D8"/>
-                      </a:solidFill>
-                      <a:prstDash val="solid"/>
-                      <a:round/>
-                      <a:headEnd type="none" w="med" len="med"/>
-                      <a:tailEnd type="none" w="med" len="med"/>
-                    </a:lnT>
-                    <a:lnB w="6350" cap="flat" cmpd="sng" algn="ctr">
-                      <a:solidFill>
-                        <a:srgbClr val="C9D2D8"/>
-                      </a:solidFill>
-                      <a:prstDash val="solid"/>
-                      <a:round/>
-                      <a:headEnd type="none" w="med" len="med"/>
-                      <a:tailEnd type="none" w="med" len="med"/>
-                    </a:lnB>
-                    <a:solidFill>
-                      <a:srgbClr val="EEF2F4"/>
-                    </a:solidFill>
-                  </a:tcPr>
-                </a:tc>
-                <a:tc>
-                  <a:txBody>
-                    <a:bodyPr/>
-                    <a:lstStyle/>
-                    <a:p>
-                      <a:pPr algn="l" indent="0" marL="0">
-                        <a:buNone/>
-                      </a:pPr>
-                      <a:r>
-                        <a:rPr lang="en-US" sz="2100" dirty="0">
-                          <a:solidFill>
-                            <a:srgbClr val="1B2530"/>
-                          </a:solidFill>
-                          <a:latin typeface="Courier New" pitchFamily="34" charset="0"/>
-                          <a:ea typeface="Courier New" pitchFamily="34" charset="-122"/>
-                          <a:cs typeface="Courier New" pitchFamily="34" charset="-120"/>
-                        </a:rPr>
-                        <a:t>D, CK</a:t>
-                      </a:r>
-                      <a:endParaRPr lang="en-US" sz="2100" dirty="0">
-                        <a:latin typeface="Courier New" charset="0"/>
-                        <a:ea typeface="Courier New" charset="0"/>
-                        <a:cs typeface="Courier New" charset="0"/>
-                      </a:endParaRPr>
-                    </a:p>
-                  </a:txBody>
-                  <a:tcPr marL="101600" marR="101600" marT="50800" marB="50800" anchor="ctr">
-                    <a:lnL w="6350" cap="flat" cmpd="sng" algn="ctr">
-                      <a:solidFill>
-                        <a:srgbClr val="C9D2D8"/>
-                      </a:solidFill>
-                      <a:prstDash val="solid"/>
-                      <a:round/>
-                      <a:headEnd type="none" w="med" len="med"/>
-                      <a:tailEnd type="none" w="med" len="med"/>
-                    </a:lnL>
-                    <a:lnR w="6350" cap="flat" cmpd="sng" algn="ctr">
-                      <a:solidFill>
-                        <a:srgbClr val="C9D2D8"/>
-                      </a:solidFill>
-                      <a:prstDash val="solid"/>
-                      <a:round/>
-                      <a:headEnd type="none" w="med" len="med"/>
-                      <a:tailEnd type="none" w="med" len="med"/>
-                    </a:lnR>
-                    <a:lnT w="6350" cap="flat" cmpd="sng" algn="ctr">
-                      <a:solidFill>
-                        <a:srgbClr val="C9D2D8"/>
-                      </a:solidFill>
-                      <a:prstDash val="solid"/>
-                      <a:round/>
-                      <a:headEnd type="none" w="med" len="med"/>
-                      <a:tailEnd type="none" w="med" len="med"/>
-                    </a:lnT>
-                    <a:lnB w="6350" cap="flat" cmpd="sng" algn="ctr">
-                      <a:solidFill>
-                        <a:srgbClr val="C9D2D8"/>
-                      </a:solidFill>
-                      <a:prstDash val="solid"/>
-                      <a:round/>
-                      <a:headEnd type="none" w="med" len="med"/>
-                      <a:tailEnd type="none" w="med" len="med"/>
-                    </a:lnB>
-                    <a:solidFill>
-                      <a:srgbClr val="EEF2F4"/>
-                    </a:solidFill>
-                  </a:tcPr>
-                </a:tc>
-                <a:tc>
-                  <a:txBody>
-                    <a:bodyPr/>
-                    <a:lstStyle/>
-                    <a:p>
-                      <a:pPr algn="l" indent="0" marL="0">
-                        <a:buNone/>
-                      </a:pPr>
-                      <a:r>
-                        <a:rPr lang="en-US" sz="2100" dirty="0">
-                          <a:solidFill>
-                            <a:srgbClr val="1B2530"/>
-                          </a:solidFill>
-                          <a:latin typeface="Courier New" pitchFamily="34" charset="0"/>
-                          <a:ea typeface="Courier New" pitchFamily="34" charset="-122"/>
-                          <a:cs typeface="Courier New" pitchFamily="34" charset="-120"/>
-                        </a:rPr>
-                        <a:t>Q+ = D</a:t>
-                      </a:r>
-                      <a:endParaRPr lang="en-US" sz="2100" dirty="0">
-                        <a:latin typeface="Courier New" charset="0"/>
-                        <a:ea typeface="Courier New" charset="0"/>
-                        <a:cs typeface="Courier New" charset="0"/>
-                      </a:endParaRPr>
-                    </a:p>
-                  </a:txBody>
-                  <a:tcPr marL="101600" marR="101600" marT="50800" marB="50800" anchor="ctr">
-                    <a:lnL w="6350" cap="flat" cmpd="sng" algn="ctr">
-                      <a:solidFill>
-                        <a:srgbClr val="C9D2D8"/>
-                      </a:solidFill>
-                      <a:prstDash val="solid"/>
-                      <a:round/>
-                      <a:headEnd type="none" w="med" len="med"/>
-                      <a:tailEnd type="none" w="med" len="med"/>
-                    </a:lnL>
-                    <a:lnR w="6350" cap="flat" cmpd="sng" algn="ctr">
-                      <a:solidFill>
-                        <a:srgbClr val="C9D2D8"/>
-                      </a:solidFill>
-                      <a:prstDash val="solid"/>
-                      <a:round/>
-                      <a:headEnd type="none" w="med" len="med"/>
-                      <a:tailEnd type="none" w="med" len="med"/>
-                    </a:lnR>
-                    <a:lnT w="6350" cap="flat" cmpd="sng" algn="ctr">
-                      <a:solidFill>
-                        <a:srgbClr val="C9D2D8"/>
-                      </a:solidFill>
-                      <a:prstDash val="solid"/>
-                      <a:round/>
-                      <a:headEnd type="none" w="med" len="med"/>
-                      <a:tailEnd type="none" w="med" len="med"/>
-                    </a:lnT>
-                    <a:lnB w="6350" cap="flat" cmpd="sng" algn="ctr">
-                      <a:solidFill>
-                        <a:srgbClr val="C9D2D8"/>
-                      </a:solidFill>
-                      <a:prstDash val="solid"/>
-                      <a:round/>
-                      <a:headEnd type="none" w="med" len="med"/>
-                      <a:tailEnd type="none" w="med" len="med"/>
-                    </a:lnB>
-                    <a:solidFill>
-                      <a:srgbClr val="EEF2F4"/>
-                    </a:solidFill>
-                  </a:tcPr>
-                </a:tc>
-                <a:tc>
-                  <a:txBody>
-                    <a:bodyPr/>
-                    <a:lstStyle/>
-                    <a:p>
-                      <a:pPr algn="l" indent="0" marL="0">
-                        <a:buNone/>
-                      </a:pPr>
-                      <a:r>
-                        <a:rPr lang="en-US" sz="2100" dirty="0">
-                          <a:solidFill>
-                            <a:srgbClr val="1B2530"/>
-                          </a:solidFill>
-                          <a:latin typeface="Calibri" pitchFamily="34" charset="0"/>
-                          <a:ea typeface="Calibri" pitchFamily="34" charset="-122"/>
-                          <a:cs typeface="Calibri" pitchFamily="34" charset="-120"/>
-                        </a:rPr>
-                        <a:t>finché il clock è al livello attivo</a:t>
-                      </a:r>
-                      <a:endParaRPr lang="en-US" sz="2100" dirty="0">
-                        <a:latin typeface="Calibri" charset="0"/>
-                        <a:ea typeface="Calibri" charset="0"/>
-                        <a:cs typeface="Calibri" charset="0"/>
-                      </a:endParaRPr>
-                    </a:p>
-                  </a:txBody>
-                  <a:tcPr marL="101600" marR="101600" marT="50800" marB="50800" anchor="ctr">
-                    <a:lnL w="6350" cap="flat" cmpd="sng" algn="ctr">
-                      <a:solidFill>
-                        <a:srgbClr val="C9D2D8"/>
-                      </a:solidFill>
-                      <a:prstDash val="solid"/>
-                      <a:round/>
-                      <a:headEnd type="none" w="med" len="med"/>
-                      <a:tailEnd type="none" w="med" len="med"/>
-                    </a:lnL>
-                    <a:lnR w="6350" cap="flat" cmpd="sng" algn="ctr">
-                      <a:solidFill>
-                        <a:srgbClr val="C9D2D8"/>
-                      </a:solidFill>
-                      <a:prstDash val="solid"/>
-                      <a:round/>
-                      <a:headEnd type="none" w="med" len="med"/>
-                      <a:tailEnd type="none" w="med" len="med"/>
-                    </a:lnR>
-                    <a:lnT w="6350" cap="flat" cmpd="sng" algn="ctr">
-                      <a:solidFill>
-                        <a:srgbClr val="C9D2D8"/>
-                      </a:solidFill>
-                      <a:prstDash val="solid"/>
-                      <a:round/>
-                      <a:headEnd type="none" w="med" len="med"/>
-                      <a:tailEnd type="none" w="med" len="med"/>
-                    </a:lnT>
-                    <a:lnB w="6350" cap="flat" cmpd="sng" algn="ctr">
-                      <a:solidFill>
-                        <a:srgbClr val="C9D2D8"/>
-                      </a:solidFill>
-                      <a:prstDash val="solid"/>
-                      <a:round/>
-                      <a:headEnd type="none" w="med" len="med"/>
-                      <a:tailEnd type="none" w="med" len="med"/>
-                    </a:lnB>
-                    <a:solidFill>
-                      <a:srgbClr val="EEF2F4"/>
-                    </a:solidFill>
-                  </a:tcPr>
-                </a:tc>
-              </a:tr>
-              <a:tr h="0">
-                <a:tc>
-                  <a:txBody>
-                    <a:bodyPr/>
-                    <a:lstStyle/>
-                    <a:p>
-                      <a:pPr algn="l" indent="0" marL="0">
-                        <a:buNone/>
-                      </a:pPr>
-                      <a:r>
-                        <a:rPr lang="en-US" sz="2100" b="1" dirty="0">
-                          <a:solidFill>
-                            <a:srgbClr val="1B2530"/>
-                          </a:solidFill>
-                          <a:latin typeface="Calibri" pitchFamily="34" charset="0"/>
-                          <a:ea typeface="Calibri" pitchFamily="34" charset="-122"/>
-                          <a:cs typeface="Calibri" pitchFamily="34" charset="-120"/>
-                        </a:rPr>
-                        <a:t>flip-flop JK</a:t>
-                      </a:r>
-                      <a:endParaRPr lang="en-US" sz="2100" dirty="0">
-                        <a:latin typeface="Calibri" charset="0"/>
-                        <a:ea typeface="Calibri" charset="0"/>
-                        <a:cs typeface="Calibri" charset="0"/>
-                      </a:endParaRPr>
-                    </a:p>
-                  </a:txBody>
-                  <a:tcPr marL="101600" marR="101600" marT="50800" marB="50800" anchor="ctr">
-                    <a:lnL w="6350" cap="flat" cmpd="sng" algn="ctr">
-                      <a:solidFill>
-                        <a:srgbClr val="C9D2D8"/>
-                      </a:solidFill>
-                      <a:prstDash val="solid"/>
-                      <a:round/>
-                      <a:headEnd type="none" w="med" len="med"/>
-                      <a:tailEnd type="none" w="med" len="med"/>
-                    </a:lnL>
-                    <a:lnR w="6350" cap="flat" cmpd="sng" algn="ctr">
-                      <a:solidFill>
-                        <a:srgbClr val="C9D2D8"/>
-                      </a:solidFill>
-                      <a:prstDash val="solid"/>
-                      <a:round/>
-                      <a:headEnd type="none" w="med" len="med"/>
-                      <a:tailEnd type="none" w="med" len="med"/>
-                    </a:lnR>
-                    <a:lnT w="6350" cap="flat" cmpd="sng" algn="ctr">
-                      <a:solidFill>
-                        <a:srgbClr val="C9D2D8"/>
-                      </a:solidFill>
-                      <a:prstDash val="solid"/>
-                      <a:round/>
-                      <a:headEnd type="none" w="med" len="med"/>
-                      <a:tailEnd type="none" w="med" len="med"/>
-                    </a:lnT>
-                    <a:lnB w="6350" cap="flat" cmpd="sng" algn="ctr">
-                      <a:solidFill>
-                        <a:srgbClr val="C9D2D8"/>
-                      </a:solidFill>
-                      <a:prstDash val="solid"/>
-                      <a:round/>
-                      <a:headEnd type="none" w="med" len="med"/>
-                      <a:tailEnd type="none" w="med" len="med"/>
-                    </a:lnB>
-                    <a:solidFill>
-                      <a:srgbClr val="FFFFFF"/>
-                    </a:solidFill>
-                  </a:tcPr>
-                </a:tc>
-                <a:tc>
-                  <a:txBody>
-                    <a:bodyPr/>
-                    <a:lstStyle/>
-                    <a:p>
-                      <a:pPr algn="l" indent="0" marL="0">
-                        <a:buNone/>
-                      </a:pPr>
-                      <a:r>
-                        <a:rPr lang="en-US" sz="2100" dirty="0">
-                          <a:solidFill>
-                            <a:srgbClr val="1B2530"/>
-                          </a:solidFill>
-                          <a:latin typeface="Courier New" pitchFamily="34" charset="0"/>
-                          <a:ea typeface="Courier New" pitchFamily="34" charset="-122"/>
-                          <a:cs typeface="Courier New" pitchFamily="34" charset="-120"/>
-                        </a:rPr>
-                        <a:t>J, K, CK</a:t>
-                      </a:r>
-                      <a:endParaRPr lang="en-US" sz="2100" dirty="0">
-                        <a:latin typeface="Courier New" charset="0"/>
-                        <a:ea typeface="Courier New" charset="0"/>
-                        <a:cs typeface="Courier New" charset="0"/>
-                      </a:endParaRPr>
-                    </a:p>
-                  </a:txBody>
-                  <a:tcPr marL="101600" marR="101600" marT="50800" marB="50800" anchor="ctr">
-                    <a:lnL w="6350" cap="flat" cmpd="sng" algn="ctr">
-                      <a:solidFill>
-                        <a:srgbClr val="C9D2D8"/>
-                      </a:solidFill>
-                      <a:prstDash val="solid"/>
-                      <a:round/>
-                      <a:headEnd type="none" w="med" len="med"/>
-                      <a:tailEnd type="none" w="med" len="med"/>
-                    </a:lnL>
-                    <a:lnR w="6350" cap="flat" cmpd="sng" algn="ctr">
-                      <a:solidFill>
-                        <a:srgbClr val="C9D2D8"/>
-                      </a:solidFill>
-                      <a:prstDash val="solid"/>
-                      <a:round/>
-                      <a:headEnd type="none" w="med" len="med"/>
-                      <a:tailEnd type="none" w="med" len="med"/>
-                    </a:lnR>
-                    <a:lnT w="6350" cap="flat" cmpd="sng" algn="ctr">
-                      <a:solidFill>
-                        <a:srgbClr val="C9D2D8"/>
-                      </a:solidFill>
-                      <a:prstDash val="solid"/>
-                      <a:round/>
-                      <a:headEnd type="none" w="med" len="med"/>
-                      <a:tailEnd type="none" w="med" len="med"/>
-                    </a:lnT>
-                    <a:lnB w="6350" cap="flat" cmpd="sng" algn="ctr">
-                      <a:solidFill>
-                        <a:srgbClr val="C9D2D8"/>
-                      </a:solidFill>
-                      <a:prstDash val="solid"/>
-                      <a:round/>
-                      <a:headEnd type="none" w="med" len="med"/>
-                      <a:tailEnd type="none" w="med" len="med"/>
-                    </a:lnB>
-                    <a:solidFill>
-                      <a:srgbClr val="FFFFFF"/>
-                    </a:solidFill>
-                  </a:tcPr>
-                </a:tc>
-                <a:tc>
-                  <a:txBody>
-                    <a:bodyPr/>
-                    <a:lstStyle/>
-                    <a:p>
-                      <a:pPr algn="l" indent="0" marL="0">
-                        <a:buNone/>
-                      </a:pPr>
-                      <a:r>
-                        <a:rPr lang="en-US" sz="2100" dirty="0">
-                          <a:solidFill>
-                            <a:srgbClr val="1B2530"/>
-                          </a:solidFill>
-                          <a:latin typeface="Courier New" pitchFamily="34" charset="0"/>
-                          <a:ea typeface="Courier New" pitchFamily="34" charset="-122"/>
-                          <a:cs typeface="Courier New" pitchFamily="34" charset="-120"/>
-                        </a:rPr>
-                        <a:t>Q+ = J Q' + K' Q</a:t>
-                      </a:r>
-                      <a:endParaRPr lang="en-US" sz="2100" dirty="0">
-                        <a:latin typeface="Courier New" charset="0"/>
-                        <a:ea typeface="Courier New" charset="0"/>
-                        <a:cs typeface="Courier New" charset="0"/>
-                      </a:endParaRPr>
-                    </a:p>
-                  </a:txBody>
-                  <a:tcPr marL="101600" marR="101600" marT="50800" marB="50800" anchor="ctr">
-                    <a:lnL w="6350" cap="flat" cmpd="sng" algn="ctr">
-                      <a:solidFill>
-                        <a:srgbClr val="C9D2D8"/>
-                      </a:solidFill>
-                      <a:prstDash val="solid"/>
-                      <a:round/>
-                      <a:headEnd type="none" w="med" len="med"/>
-                      <a:tailEnd type="none" w="med" len="med"/>
-                    </a:lnL>
-                    <a:lnR w="6350" cap="flat" cmpd="sng" algn="ctr">
-                      <a:solidFill>
-                        <a:srgbClr val="C9D2D8"/>
-                      </a:solidFill>
-                      <a:prstDash val="solid"/>
-                      <a:round/>
-                      <a:headEnd type="none" w="med" len="med"/>
-                      <a:tailEnd type="none" w="med" len="med"/>
-                    </a:lnR>
-                    <a:lnT w="6350" cap="flat" cmpd="sng" algn="ctr">
-                      <a:solidFill>
-                        <a:srgbClr val="C9D2D8"/>
-                      </a:solidFill>
-                      <a:prstDash val="solid"/>
-                      <a:round/>
-                      <a:headEnd type="none" w="med" len="med"/>
-                      <a:tailEnd type="none" w="med" len="med"/>
-                    </a:lnT>
-                    <a:lnB w="6350" cap="flat" cmpd="sng" algn="ctr">
-                      <a:solidFill>
-                        <a:srgbClr val="C9D2D8"/>
-                      </a:solidFill>
-                      <a:prstDash val="solid"/>
-                      <a:round/>
-                      <a:headEnd type="none" w="med" len="med"/>
-                      <a:tailEnd type="none" w="med" len="med"/>
-                    </a:lnB>
-                    <a:solidFill>
-                      <a:srgbClr val="FFFFFF"/>
-                    </a:solidFill>
-                  </a:tcPr>
-                </a:tc>
-                <a:tc>
-                  <a:txBody>
-                    <a:bodyPr/>
-                    <a:lstStyle/>
-                    <a:p>
-                      <a:pPr algn="l" indent="0" marL="0">
-                        <a:buNone/>
-                      </a:pPr>
-                      <a:r>
-                        <a:rPr lang="en-US" sz="2100" dirty="0">
-                          <a:solidFill>
-                            <a:srgbClr val="1B2530"/>
-                          </a:solidFill>
-                          <a:latin typeface="Calibri" pitchFamily="34" charset="0"/>
-                          <a:ea typeface="Calibri" pitchFamily="34" charset="-122"/>
-                          <a:cs typeface="Calibri" pitchFamily="34" charset="-120"/>
-                        </a:rPr>
-                        <a:t>sul fronte del clock</a:t>
-                      </a:r>
-                      <a:endParaRPr lang="en-US" sz="2100" dirty="0">
-                        <a:latin typeface="Calibri" charset="0"/>
-                        <a:ea typeface="Calibri" charset="0"/>
-                        <a:cs typeface="Calibri" charset="0"/>
-                      </a:endParaRPr>
-                    </a:p>
-                  </a:txBody>
-                  <a:tcPr marL="101600" marR="101600" marT="50800" marB="50800" anchor="ctr">
-                    <a:lnL w="6350" cap="flat" cmpd="sng" algn="ctr">
-                      <a:solidFill>
-                        <a:srgbClr val="C9D2D8"/>
-                      </a:solidFill>
-                      <a:prstDash val="solid"/>
-                      <a:round/>
-                      <a:headEnd type="none" w="med" len="med"/>
-                      <a:tailEnd type="none" w="med" len="med"/>
-                    </a:lnL>
-                    <a:lnR w="6350" cap="flat" cmpd="sng" algn="ctr">
-                      <a:solidFill>
-                        <a:srgbClr val="C9D2D8"/>
-                      </a:solidFill>
-                      <a:prstDash val="solid"/>
-                      <a:round/>
-                      <a:headEnd type="none" w="med" len="med"/>
-                      <a:tailEnd type="none" w="med" len="med"/>
-                    </a:lnR>
-                    <a:lnT w="6350" cap="flat" cmpd="sng" algn="ctr">
-                      <a:solidFill>
-                        <a:srgbClr val="C9D2D8"/>
-                      </a:solidFill>
-                      <a:prstDash val="solid"/>
-                      <a:round/>
-                      <a:headEnd type="none" w="med" len="med"/>
-                      <a:tailEnd type="none" w="med" len="med"/>
-                    </a:lnT>
-                    <a:lnB w="6350" cap="flat" cmpd="sng" algn="ctr">
-                      <a:solidFill>
-                        <a:srgbClr val="C9D2D8"/>
-                      </a:solidFill>
-                      <a:prstDash val="solid"/>
-                      <a:round/>
-                      <a:headEnd type="none" w="med" len="med"/>
-                      <a:tailEnd type="none" w="med" len="med"/>
-                    </a:lnB>
-                    <a:solidFill>
-                      <a:srgbClr val="FFFFFF"/>
-                    </a:solidFill>
-                  </a:tcPr>
-                </a:tc>
-              </a:tr>
-              <a:tr h="0">
-                <a:tc>
-                  <a:txBody>
-                    <a:bodyPr/>
-                    <a:lstStyle/>
-                    <a:p>
-                      <a:pPr algn="l" indent="0" marL="0">
-                        <a:buNone/>
-                      </a:pPr>
-                      <a:r>
-                        <a:rPr lang="en-US" sz="2100" b="1" dirty="0">
-                          <a:solidFill>
-                            <a:srgbClr val="1B2530"/>
-                          </a:solidFill>
-                          <a:latin typeface="Calibri" pitchFamily="34" charset="0"/>
-                          <a:ea typeface="Calibri" pitchFamily="34" charset="-122"/>
-                          <a:cs typeface="Calibri" pitchFamily="34" charset="-120"/>
-                        </a:rPr>
-                        <a:t>flip-flop D</a:t>
-                      </a:r>
-                      <a:endParaRPr lang="en-US" sz="2100" dirty="0">
-                        <a:latin typeface="Calibri" charset="0"/>
-                        <a:ea typeface="Calibri" charset="0"/>
-                        <a:cs typeface="Calibri" charset="0"/>
-                      </a:endParaRPr>
-                    </a:p>
-                  </a:txBody>
-                  <a:tcPr marL="101600" marR="101600" marT="50800" marB="50800" anchor="ctr">
-                    <a:lnL w="6350" cap="flat" cmpd="sng" algn="ctr">
-                      <a:solidFill>
-                        <a:srgbClr val="C9D2D8"/>
-                      </a:solidFill>
-                      <a:prstDash val="solid"/>
-                      <a:round/>
-                      <a:headEnd type="none" w="med" len="med"/>
-                      <a:tailEnd type="none" w="med" len="med"/>
-                    </a:lnL>
-                    <a:lnR w="6350" cap="flat" cmpd="sng" algn="ctr">
-                      <a:solidFill>
-                        <a:srgbClr val="C9D2D8"/>
-                      </a:solidFill>
-                      <a:prstDash val="solid"/>
-                      <a:round/>
-                      <a:headEnd type="none" w="med" len="med"/>
-                      <a:tailEnd type="none" w="med" len="med"/>
-                    </a:lnR>
-                    <a:lnT w="6350" cap="flat" cmpd="sng" algn="ctr">
-                      <a:solidFill>
-                        <a:srgbClr val="C9D2D8"/>
-                      </a:solidFill>
-                      <a:prstDash val="solid"/>
-                      <a:round/>
-                      <a:headEnd type="none" w="med" len="med"/>
-                      <a:tailEnd type="none" w="med" len="med"/>
-                    </a:lnT>
-                    <a:lnB w="6350" cap="flat" cmpd="sng" algn="ctr">
-                      <a:solidFill>
-                        <a:srgbClr val="C9D2D8"/>
-                      </a:solidFill>
-                      <a:prstDash val="solid"/>
-                      <a:round/>
-                      <a:headEnd type="none" w="med" len="med"/>
-                      <a:tailEnd type="none" w="med" len="med"/>
-                    </a:lnB>
-                    <a:solidFill>
-                      <a:srgbClr val="EEF2F4"/>
-                    </a:solidFill>
-                  </a:tcPr>
-                </a:tc>
-                <a:tc>
-                  <a:txBody>
-                    <a:bodyPr/>
-                    <a:lstStyle/>
-                    <a:p>
-                      <a:pPr algn="l" indent="0" marL="0">
-                        <a:buNone/>
-                      </a:pPr>
-                      <a:r>
-                        <a:rPr lang="en-US" sz="2100" dirty="0">
-                          <a:solidFill>
-                            <a:srgbClr val="1B2530"/>
-                          </a:solidFill>
-                          <a:latin typeface="Courier New" pitchFamily="34" charset="0"/>
-                          <a:ea typeface="Courier New" pitchFamily="34" charset="-122"/>
-                          <a:cs typeface="Courier New" pitchFamily="34" charset="-120"/>
-                        </a:rPr>
-                        <a:t>D, CK</a:t>
-                      </a:r>
-                      <a:endParaRPr lang="en-US" sz="2100" dirty="0">
-                        <a:latin typeface="Courier New" charset="0"/>
-                        <a:ea typeface="Courier New" charset="0"/>
-                        <a:cs typeface="Courier New" charset="0"/>
-                      </a:endParaRPr>
-                    </a:p>
-                  </a:txBody>
-                  <a:tcPr marL="101600" marR="101600" marT="50800" marB="50800" anchor="ctr">
-                    <a:lnL w="6350" cap="flat" cmpd="sng" algn="ctr">
-                      <a:solidFill>
-                        <a:srgbClr val="C9D2D8"/>
-                      </a:solidFill>
-                      <a:prstDash val="solid"/>
-                      <a:round/>
-                      <a:headEnd type="none" w="med" len="med"/>
-                      <a:tailEnd type="none" w="med" len="med"/>
-                    </a:lnL>
-                    <a:lnR w="6350" cap="flat" cmpd="sng" algn="ctr">
-                      <a:solidFill>
-                        <a:srgbClr val="C9D2D8"/>
-                      </a:solidFill>
-                      <a:prstDash val="solid"/>
-                      <a:round/>
-                      <a:headEnd type="none" w="med" len="med"/>
-                      <a:tailEnd type="none" w="med" len="med"/>
-                    </a:lnR>
-                    <a:lnT w="6350" cap="flat" cmpd="sng" algn="ctr">
-                      <a:solidFill>
-                        <a:srgbClr val="C9D2D8"/>
-                      </a:solidFill>
-                      <a:prstDash val="solid"/>
-                      <a:round/>
-                      <a:headEnd type="none" w="med" len="med"/>
-                      <a:tailEnd type="none" w="med" len="med"/>
-                    </a:lnT>
-                    <a:lnB w="6350" cap="flat" cmpd="sng" algn="ctr">
-                      <a:solidFill>
-                        <a:srgbClr val="C9D2D8"/>
-                      </a:solidFill>
-                      <a:prstDash val="solid"/>
-                      <a:round/>
-                      <a:headEnd type="none" w="med" len="med"/>
-                      <a:tailEnd type="none" w="med" len="med"/>
-                    </a:lnB>
-                    <a:solidFill>
-                      <a:srgbClr val="EEF2F4"/>
-                    </a:solidFill>
-                  </a:tcPr>
-                </a:tc>
-                <a:tc>
-                  <a:txBody>
-                    <a:bodyPr/>
-                    <a:lstStyle/>
-                    <a:p>
-                      <a:pPr algn="l" indent="0" marL="0">
-                        <a:buNone/>
-                      </a:pPr>
-                      <a:r>
-                        <a:rPr lang="en-US" sz="2100" dirty="0">
-                          <a:solidFill>
-                            <a:srgbClr val="1B2530"/>
-                          </a:solidFill>
-                          <a:latin typeface="Courier New" pitchFamily="34" charset="0"/>
-                          <a:ea typeface="Courier New" pitchFamily="34" charset="-122"/>
-                          <a:cs typeface="Courier New" pitchFamily="34" charset="-120"/>
-                        </a:rPr>
-                        <a:t>Q+ = D</a:t>
-                      </a:r>
-                      <a:endParaRPr lang="en-US" sz="2100" dirty="0">
-                        <a:latin typeface="Courier New" charset="0"/>
-                        <a:ea typeface="Courier New" charset="0"/>
-                        <a:cs typeface="Courier New" charset="0"/>
-                      </a:endParaRPr>
-                    </a:p>
-                  </a:txBody>
-                  <a:tcPr marL="101600" marR="101600" marT="50800" marB="50800" anchor="ctr">
-                    <a:lnL w="6350" cap="flat" cmpd="sng" algn="ctr">
-                      <a:solidFill>
-                        <a:srgbClr val="C9D2D8"/>
-                      </a:solidFill>
-                      <a:prstDash val="solid"/>
-                      <a:round/>
-                      <a:headEnd type="none" w="med" len="med"/>
-                      <a:tailEnd type="none" w="med" len="med"/>
-                    </a:lnL>
-                    <a:lnR w="6350" cap="flat" cmpd="sng" algn="ctr">
-                      <a:solidFill>
-                        <a:srgbClr val="C9D2D8"/>
-                      </a:solidFill>
-                      <a:prstDash val="solid"/>
-                      <a:round/>
-                      <a:headEnd type="none" w="med" len="med"/>
-                      <a:tailEnd type="none" w="med" len="med"/>
-                    </a:lnR>
-                    <a:lnT w="6350" cap="flat" cmpd="sng" algn="ctr">
-                      <a:solidFill>
-                        <a:srgbClr val="C9D2D8"/>
-                      </a:solidFill>
-                      <a:prstDash val="solid"/>
-                      <a:round/>
-                      <a:headEnd type="none" w="med" len="med"/>
-                      <a:tailEnd type="none" w="med" len="med"/>
-                    </a:lnT>
-                    <a:lnB w="6350" cap="flat" cmpd="sng" algn="ctr">
-                      <a:solidFill>
-                        <a:srgbClr val="C9D2D8"/>
-                      </a:solidFill>
-                      <a:prstDash val="solid"/>
-                      <a:round/>
-                      <a:headEnd type="none" w="med" len="med"/>
-                      <a:tailEnd type="none" w="med" len="med"/>
-                    </a:lnB>
-                    <a:solidFill>
-                      <a:srgbClr val="EEF2F4"/>
-                    </a:solidFill>
-                  </a:tcPr>
-                </a:tc>
-                <a:tc>
-                  <a:txBody>
-                    <a:bodyPr/>
-                    <a:lstStyle/>
-                    <a:p>
-                      <a:pPr algn="l" indent="0" marL="0">
-                        <a:buNone/>
-                      </a:pPr>
-                      <a:r>
-                        <a:rPr lang="en-US" sz="2100" dirty="0">
-                          <a:solidFill>
-                            <a:srgbClr val="1B2530"/>
-                          </a:solidFill>
-                          <a:latin typeface="Calibri" pitchFamily="34" charset="0"/>
-                          <a:ea typeface="Calibri" pitchFamily="34" charset="-122"/>
-                          <a:cs typeface="Calibri" pitchFamily="34" charset="-120"/>
-                        </a:rPr>
-                        <a:t>sul fronte del clock</a:t>
-                      </a:r>
-                      <a:endParaRPr lang="en-US" sz="2100" dirty="0">
-                        <a:latin typeface="Calibri" charset="0"/>
-                        <a:ea typeface="Calibri" charset="0"/>
-                        <a:cs typeface="Calibri" charset="0"/>
-                      </a:endParaRPr>
-                    </a:p>
-                  </a:txBody>
-                  <a:tcPr marL="101600" marR="101600" marT="50800" marB="50800" anchor="ctr">
-                    <a:lnL w="6350" cap="flat" cmpd="sng" algn="ctr">
-                      <a:solidFill>
-                        <a:srgbClr val="C9D2D8"/>
-                      </a:solidFill>
-                      <a:prstDash val="solid"/>
-                      <a:round/>
-                      <a:headEnd type="none" w="med" len="med"/>
-                      <a:tailEnd type="none" w="med" len="med"/>
-                    </a:lnL>
-                    <a:lnR w="6350" cap="flat" cmpd="sng" algn="ctr">
-                      <a:solidFill>
-                        <a:srgbClr val="C9D2D8"/>
-                      </a:solidFill>
-                      <a:prstDash val="solid"/>
-                      <a:round/>
-                      <a:headEnd type="none" w="med" len="med"/>
-                      <a:tailEnd type="none" w="med" len="med"/>
-                    </a:lnR>
-                    <a:lnT w="6350" cap="flat" cmpd="sng" algn="ctr">
-                      <a:solidFill>
-                        <a:srgbClr val="C9D2D8"/>
-                      </a:solidFill>
-                      <a:prstDash val="solid"/>
-                      <a:round/>
-                      <a:headEnd type="none" w="med" len="med"/>
-                      <a:tailEnd type="none" w="med" len="med"/>
-                    </a:lnT>
-                    <a:lnB w="6350" cap="flat" cmpd="sng" algn="ctr">
-                      <a:solidFill>
-                        <a:srgbClr val="C9D2D8"/>
-                      </a:solidFill>
-                      <a:prstDash val="solid"/>
-                      <a:round/>
-                      <a:headEnd type="none" w="med" len="med"/>
-                      <a:tailEnd type="none" w="med" len="med"/>
-                    </a:lnB>
-                    <a:solidFill>
-                      <a:srgbClr val="EEF2F4"/>
-                    </a:solidFill>
-                  </a:tcPr>
-                </a:tc>
-              </a:tr>
-              <a:tr h="0">
-                <a:tc>
-                  <a:txBody>
-                    <a:bodyPr/>
-                    <a:lstStyle/>
-                    <a:p>
-                      <a:pPr algn="l" indent="0" marL="0">
-                        <a:buNone/>
-                      </a:pPr>
-                      <a:r>
-                        <a:rPr lang="en-US" sz="2100" b="1" dirty="0">
-                          <a:solidFill>
-                            <a:srgbClr val="1B2530"/>
-                          </a:solidFill>
-                          <a:latin typeface="Calibri" pitchFamily="34" charset="0"/>
-                          <a:ea typeface="Calibri" pitchFamily="34" charset="-122"/>
-                          <a:cs typeface="Calibri" pitchFamily="34" charset="-120"/>
-                        </a:rPr>
-                        <a:t>flip-flop T</a:t>
-                      </a:r>
-                      <a:endParaRPr lang="en-US" sz="2100" dirty="0">
-                        <a:latin typeface="Calibri" charset="0"/>
-                        <a:ea typeface="Calibri" charset="0"/>
-                        <a:cs typeface="Calibri" charset="0"/>
-                      </a:endParaRPr>
-                    </a:p>
-                  </a:txBody>
-                  <a:tcPr marL="101600" marR="101600" marT="50800" marB="50800" anchor="ctr">
-                    <a:lnL w="6350" cap="flat" cmpd="sng" algn="ctr">
-                      <a:solidFill>
-                        <a:srgbClr val="C9D2D8"/>
-                      </a:solidFill>
-                      <a:prstDash val="solid"/>
-                      <a:round/>
-                      <a:headEnd type="none" w="med" len="med"/>
-                      <a:tailEnd type="none" w="med" len="med"/>
-                    </a:lnL>
-                    <a:lnR w="6350" cap="flat" cmpd="sng" algn="ctr">
-                      <a:solidFill>
-                        <a:srgbClr val="C9D2D8"/>
-                      </a:solidFill>
-                      <a:prstDash val="solid"/>
-                      <a:round/>
-                      <a:headEnd type="none" w="med" len="med"/>
-                      <a:tailEnd type="none" w="med" len="med"/>
-                    </a:lnR>
-                    <a:lnT w="6350" cap="flat" cmpd="sng" algn="ctr">
-                      <a:solidFill>
-                        <a:srgbClr val="C9D2D8"/>
-                      </a:solidFill>
-                      <a:prstDash val="solid"/>
-                      <a:round/>
-                      <a:headEnd type="none" w="med" len="med"/>
-                      <a:tailEnd type="none" w="med" len="med"/>
-                    </a:lnT>
-                    <a:lnB w="6350" cap="flat" cmpd="sng" algn="ctr">
-                      <a:solidFill>
-                        <a:srgbClr val="C9D2D8"/>
-                      </a:solidFill>
-                      <a:prstDash val="solid"/>
-                      <a:round/>
-                      <a:headEnd type="none" w="med" len="med"/>
-                      <a:tailEnd type="none" w="med" len="med"/>
-                    </a:lnB>
-                    <a:solidFill>
-                      <a:srgbClr val="FFFFFF"/>
-                    </a:solidFill>
-                  </a:tcPr>
-                </a:tc>
-                <a:tc>
-                  <a:txBody>
-                    <a:bodyPr/>
-                    <a:lstStyle/>
-                    <a:p>
-                      <a:pPr algn="l" indent="0" marL="0">
-                        <a:buNone/>
-                      </a:pPr>
-                      <a:r>
-                        <a:rPr lang="en-US" sz="2100" dirty="0">
-                          <a:solidFill>
-                            <a:srgbClr val="1B2530"/>
-                          </a:solidFill>
-                          <a:latin typeface="Courier New" pitchFamily="34" charset="0"/>
-                          <a:ea typeface="Courier New" pitchFamily="34" charset="-122"/>
-                          <a:cs typeface="Courier New" pitchFamily="34" charset="-120"/>
-                        </a:rPr>
-                        <a:t>T, CK</a:t>
-                      </a:r>
-                      <a:endParaRPr lang="en-US" sz="2100" dirty="0">
-                        <a:latin typeface="Courier New" charset="0"/>
-                        <a:ea typeface="Courier New" charset="0"/>
-                        <a:cs typeface="Courier New" charset="0"/>
-                      </a:endParaRPr>
-                    </a:p>
-                  </a:txBody>
-                  <a:tcPr marL="101600" marR="101600" marT="50800" marB="50800" anchor="ctr">
-                    <a:lnL w="6350" cap="flat" cmpd="sng" algn="ctr">
-                      <a:solidFill>
-                        <a:srgbClr val="C9D2D8"/>
-                      </a:solidFill>
-                      <a:prstDash val="solid"/>
-                      <a:round/>
-                      <a:headEnd type="none" w="med" len="med"/>
-                      <a:tailEnd type="none" w="med" len="med"/>
-                    </a:lnL>
-                    <a:lnR w="6350" cap="flat" cmpd="sng" algn="ctr">
-                      <a:solidFill>
-                        <a:srgbClr val="C9D2D8"/>
-                      </a:solidFill>
-                      <a:prstDash val="solid"/>
-                      <a:round/>
-                      <a:headEnd type="none" w="med" len="med"/>
-                      <a:tailEnd type="none" w="med" len="med"/>
-                    </a:lnR>
-                    <a:lnT w="6350" cap="flat" cmpd="sng" algn="ctr">
-                      <a:solidFill>
-                        <a:srgbClr val="C9D2D8"/>
-                      </a:solidFill>
-                      <a:prstDash val="solid"/>
-                      <a:round/>
-                      <a:headEnd type="none" w="med" len="med"/>
-                      <a:tailEnd type="none" w="med" len="med"/>
-                    </a:lnT>
-                    <a:lnB w="6350" cap="flat" cmpd="sng" algn="ctr">
-                      <a:solidFill>
-                        <a:srgbClr val="C9D2D8"/>
-                      </a:solidFill>
-                      <a:prstDash val="solid"/>
-                      <a:round/>
-                      <a:headEnd type="none" w="med" len="med"/>
-                      <a:tailEnd type="none" w="med" len="med"/>
-                    </a:lnB>
-                    <a:solidFill>
-                      <a:srgbClr val="FFFFFF"/>
-                    </a:solidFill>
-                  </a:tcPr>
-                </a:tc>
-                <a:tc>
-                  <a:txBody>
-                    <a:bodyPr/>
-                    <a:lstStyle/>
-                    <a:p>
-                      <a:pPr algn="l" indent="0" marL="0">
-                        <a:buNone/>
-                      </a:pPr>
-                      <a:r>
-                        <a:rPr lang="en-US" sz="2100" dirty="0">
-                          <a:solidFill>
-                            <a:srgbClr val="1B2530"/>
-                          </a:solidFill>
-                          <a:latin typeface="Courier New" pitchFamily="34" charset="0"/>
-                          <a:ea typeface="Courier New" pitchFamily="34" charset="-122"/>
-                          <a:cs typeface="Courier New" pitchFamily="34" charset="-120"/>
-                        </a:rPr>
-                        <a:t>Q+ = T xor Q</a:t>
-                      </a:r>
-                      <a:endParaRPr lang="en-US" sz="2100" dirty="0">
-                        <a:latin typeface="Courier New" charset="0"/>
-                        <a:ea typeface="Courier New" charset="0"/>
-                        <a:cs typeface="Courier New" charset="0"/>
-                      </a:endParaRPr>
-                    </a:p>
-                  </a:txBody>
-                  <a:tcPr marL="101600" marR="101600" marT="50800" marB="50800" anchor="ctr">
-                    <a:lnL w="6350" cap="flat" cmpd="sng" algn="ctr">
-                      <a:solidFill>
-                        <a:srgbClr val="C9D2D8"/>
-                      </a:solidFill>
-                      <a:prstDash val="solid"/>
-                      <a:round/>
-                      <a:headEnd type="none" w="med" len="med"/>
-                      <a:tailEnd type="none" w="med" len="med"/>
-                    </a:lnL>
-                    <a:lnR w="6350" cap="flat" cmpd="sng" algn="ctr">
-                      <a:solidFill>
-                        <a:srgbClr val="C9D2D8"/>
-                      </a:solidFill>
-                      <a:prstDash val="solid"/>
-                      <a:round/>
-                      <a:headEnd type="none" w="med" len="med"/>
-                      <a:tailEnd type="none" w="med" len="med"/>
-                    </a:lnR>
-                    <a:lnT w="6350" cap="flat" cmpd="sng" algn="ctr">
-                      <a:solidFill>
-                        <a:srgbClr val="C9D2D8"/>
-                      </a:solidFill>
-                      <a:prstDash val="solid"/>
-                      <a:round/>
-                      <a:headEnd type="none" w="med" len="med"/>
-                      <a:tailEnd type="none" w="med" len="med"/>
-                    </a:lnT>
-                    <a:lnB w="6350" cap="flat" cmpd="sng" algn="ctr">
-                      <a:solidFill>
-                        <a:srgbClr val="C9D2D8"/>
-                      </a:solidFill>
-                      <a:prstDash val="solid"/>
-                      <a:round/>
-                      <a:headEnd type="none" w="med" len="med"/>
-                      <a:tailEnd type="none" w="med" len="med"/>
-                    </a:lnB>
-                    <a:solidFill>
-                      <a:srgbClr val="FFFFFF"/>
-                    </a:solidFill>
-                  </a:tcPr>
-                </a:tc>
-                <a:tc>
-                  <a:txBody>
-                    <a:bodyPr/>
-                    <a:lstStyle/>
-                    <a:p>
-                      <a:pPr algn="l" indent="0" marL="0">
-                        <a:buNone/>
-                      </a:pPr>
-                      <a:r>
-                        <a:rPr lang="en-US" sz="2100" dirty="0">
-                          <a:solidFill>
-                            <a:srgbClr val="1B2530"/>
-                          </a:solidFill>
-                          <a:latin typeface="Calibri" pitchFamily="34" charset="0"/>
-                          <a:ea typeface="Calibri" pitchFamily="34" charset="-122"/>
-                          <a:cs typeface="Calibri" pitchFamily="34" charset="-120"/>
-                        </a:rPr>
-                        <a:t>sul fronte del clock</a:t>
-                      </a:r>
-                      <a:endParaRPr lang="en-US" sz="2100" dirty="0">
-                        <a:latin typeface="Calibri" charset="0"/>
-                        <a:ea typeface="Calibri" charset="0"/>
-                        <a:cs typeface="Calibri" charset="0"/>
-                      </a:endParaRPr>
-                    </a:p>
-                  </a:txBody>
-                  <a:tcPr marL="101600" marR="101600" marT="50800" marB="50800" anchor="ctr">
-                    <a:lnL w="6350" cap="flat" cmpd="sng" algn="ctr">
-                      <a:solidFill>
-                        <a:srgbClr val="C9D2D8"/>
-                      </a:solidFill>
-                      <a:prstDash val="solid"/>
-                      <a:round/>
-                      <a:headEnd type="none" w="med" len="med"/>
-                      <a:tailEnd type="none" w="med" len="med"/>
-                    </a:lnL>
-                    <a:lnR w="6350" cap="flat" cmpd="sng" algn="ctr">
-                      <a:solidFill>
-                        <a:srgbClr val="C9D2D8"/>
-                      </a:solidFill>
-                      <a:prstDash val="solid"/>
-                      <a:round/>
-                      <a:headEnd type="none" w="med" len="med"/>
-                      <a:tailEnd type="none" w="med" len="med"/>
-                    </a:lnR>
-                    <a:lnT w="6350" cap="flat" cmpd="sng" algn="ctr">
-                      <a:solidFill>
-                        <a:srgbClr val="C9D2D8"/>
-                      </a:solidFill>
-                      <a:prstDash val="solid"/>
-                      <a:round/>
-                      <a:headEnd type="none" w="med" len="med"/>
-                      <a:tailEnd type="none" w="med" len="med"/>
-                    </a:lnT>
-                    <a:lnB w="6350" cap="flat" cmpd="sng" algn="ctr">
-                      <a:solidFill>
-                        <a:srgbClr val="C9D2D8"/>
-                      </a:solidFill>
-                      <a:prstDash val="solid"/>
-                      <a:round/>
-                      <a:headEnd type="none" w="med" len="med"/>
-                      <a:tailEnd type="none" w="med" len="med"/>
-                    </a:lnB>
-                    <a:solidFill>
-                      <a:srgbClr val="FFFFFF"/>
-                    </a:solidFill>
-                  </a:tcPr>
-                </a:tc>
-              </a:tr>
-            </a:tbl>
-          </a:graphicData>
-        </a:graphic>
-      </p:graphicFrame>
+      <p:sp>
+        <p:nvSpPr>
+          <p:cNvPr id="3" name="Shape 1"/>
+          <p:cNvSpPr/>
+          <p:nvPr/>
+        </p:nvSpPr>
+        <p:spPr>
+          <a:xfrm>
+            <a:off x="548640" y="1417320"/>
+            <a:ext cx="11094415" cy="3246120"/>
+          </a:xfrm>
+          <a:prstGeom prst="roundRect">
+            <a:avLst>
+              <a:gd name="adj" fmla="val 2254"/>
+            </a:avLst>
+          </a:prstGeom>
+          <a:solidFill>
+            <a:srgbClr val="EEF2F4"/>
+          </a:solidFill>
+          <a:ln w="12700">
+            <a:solidFill>
+              <a:srgbClr val="EEF2F4"/>
+            </a:solidFill>
+            <a:prstDash val="solid"/>
+          </a:ln>
+        </p:spPr>
+      </p:sp>
+      <p:pic>
+        <p:nvPicPr>
+          <p:cNvPr id="5" name="Image 0" descr="preencoded.png">    </p:cNvPr>
+          <p:cNvPicPr>
+            <a:picLocks noChangeAspect="1"/>
+          </p:cNvPicPr>
+          <p:nvPr/>
+        </p:nvPicPr>
+        <p:blipFill>
+          <a:blip r:embed="rId1"/>
+          <a:stretch>
+            <a:fillRect/>
+          </a:stretch>
+        </p:blipFill>
+        <p:spPr>
+          <a:xfrm>
+            <a:off x="775328" y="1463040"/>
+            <a:ext cx="10641040" cy="3154680"/>
+          </a:xfrm>
+          <a:prstGeom prst="rect">
+            <a:avLst/>
+          </a:prstGeom>
+        </p:spPr>
+      </p:pic>
+      <p:sp>
+        <p:nvSpPr>
+          <p:cNvPr id="6" name="Shape 2"/>
+          <p:cNvSpPr/>
+          <p:nvPr/>
+        </p:nvSpPr>
+        <p:spPr>
+          <a:xfrm>
+            <a:off x="548640" y="4868291"/>
+            <a:ext cx="146304" cy="146304"/>
+          </a:xfrm>
+          <a:prstGeom prst="rect">
+            <a:avLst/>
+          </a:prstGeom>
+          <a:solidFill>
+            <a:srgbClr val="0E7C86"/>
+          </a:solidFill>
+          <a:ln w="12700">
+            <a:solidFill>
+              <a:srgbClr val="0E7C86"/>
+            </a:solidFill>
+            <a:prstDash val="solid"/>
+          </a:ln>
+        </p:spPr>
+      </p:sp>
+      <p:sp>
+        <p:nvSpPr>
+          <p:cNvPr id="7" name="Text 3"/>
+          <p:cNvSpPr txBox="1"/>
+          <p:nvPr/>
+        </p:nvSpPr>
+        <p:spPr>
+          <a:xfrm>
+            <a:off x="932688" y="4800600"/>
+            <a:ext cx="10710367" cy="526796"/>
+          </a:xfrm>
+          <a:prstGeom prst="rect">
+            <a:avLst/>
+          </a:prstGeom>
+          <a:noFill/>
+          <a:ln/>
+        </p:spPr>
+        <p:txBody>
+          <a:bodyPr wrap="square" lIns="0" tIns="0" rIns="0" bIns="0" rtlCol="0" anchor="t"/>
+          <a:lstStyle/>
+          <a:p>
+            <a:pPr indent="0" marL="0">
+              <a:spcAft>
+                <a:spcPts val="200"/>
+              </a:spcAft>
+              <a:buNone/>
+            </a:pPr>
+            <a:r>
+              <a:rPr lang="en-US" sz="1700" dirty="0">
+                <a:solidFill>
+                  <a:srgbClr val="1B2530"/>
+                </a:solidFill>
+                <a:latin typeface="Calibri" pitchFamily="34" charset="0"/>
+                <a:ea typeface="Calibri" pitchFamily="34" charset="-122"/>
+                <a:cs typeface="Calibri" pitchFamily="34" charset="-120"/>
+              </a:rPr>
+              <a:t>Il latch D segue D per tutto il tempo in cui il clock è alto, e conserva l'ultimo valore quando il clock scende</a:t>
+            </a:r>
+            <a:endParaRPr lang="en-US" sz="1700" dirty="0"/>
+          </a:p>
+        </p:txBody>
+      </p:sp>
+      <p:sp>
+        <p:nvSpPr>
+          <p:cNvPr id="8" name="Shape 4"/>
+          <p:cNvSpPr/>
+          <p:nvPr/>
+        </p:nvSpPr>
+        <p:spPr>
+          <a:xfrm>
+            <a:off x="548640" y="5554091"/>
+            <a:ext cx="146304" cy="146304"/>
+          </a:xfrm>
+          <a:prstGeom prst="rect">
+            <a:avLst/>
+          </a:prstGeom>
+          <a:solidFill>
+            <a:srgbClr val="C7791B"/>
+          </a:solidFill>
+          <a:ln w="12700">
+            <a:solidFill>
+              <a:srgbClr val="C7791B"/>
+            </a:solidFill>
+            <a:prstDash val="solid"/>
+          </a:ln>
+        </p:spPr>
+      </p:sp>
+      <p:sp>
+        <p:nvSpPr>
+          <p:cNvPr id="9" name="Text 5"/>
+          <p:cNvSpPr txBox="1"/>
+          <p:nvPr/>
+        </p:nvSpPr>
+        <p:spPr>
+          <a:xfrm>
+            <a:off x="932688" y="5486400"/>
+            <a:ext cx="10710367" cy="263398"/>
+          </a:xfrm>
+          <a:prstGeom prst="rect">
+            <a:avLst/>
+          </a:prstGeom>
+          <a:noFill/>
+          <a:ln/>
+        </p:spPr>
+        <p:txBody>
+          <a:bodyPr wrap="square" lIns="0" tIns="0" rIns="0" bIns="0" rtlCol="0" anchor="t"/>
+          <a:lstStyle/>
+          <a:p>
+            <a:pPr indent="0" marL="0">
+              <a:spcAft>
+                <a:spcPts val="200"/>
+              </a:spcAft>
+              <a:buNone/>
+            </a:pPr>
+            <a:r>
+              <a:rPr lang="en-US" sz="1700" dirty="0">
+                <a:solidFill>
+                  <a:srgbClr val="1B2530"/>
+                </a:solidFill>
+                <a:latin typeface="Calibri" pitchFamily="34" charset="0"/>
+                <a:ea typeface="Calibri" pitchFamily="34" charset="-122"/>
+                <a:cs typeface="Calibri" pitchFamily="34" charset="-120"/>
+              </a:rPr>
+              <a:t>Il flip-flop D guarda D solo sul fronte di salita: gli impulsi brevi tra due fronti sono ignorati</a:t>
+            </a:r>
+            <a:endParaRPr lang="en-US" sz="1700" dirty="0"/>
+          </a:p>
+        </p:txBody>
+      </p:sp>
+      <p:sp>
+        <p:nvSpPr>
+          <p:cNvPr id="10" name="Shape 6"/>
+          <p:cNvSpPr/>
+          <p:nvPr/>
+        </p:nvSpPr>
+        <p:spPr>
+          <a:xfrm>
+            <a:off x="548640" y="5976493"/>
+            <a:ext cx="146304" cy="146304"/>
+          </a:xfrm>
+          <a:prstGeom prst="rect">
+            <a:avLst/>
+          </a:prstGeom>
+          <a:solidFill>
+            <a:srgbClr val="0E7C86"/>
+          </a:solidFill>
+          <a:ln w="12700">
+            <a:solidFill>
+              <a:srgbClr val="0E7C86"/>
+            </a:solidFill>
+            <a:prstDash val="solid"/>
+          </a:ln>
+        </p:spPr>
+      </p:sp>
+      <p:sp>
+        <p:nvSpPr>
+          <p:cNvPr id="11" name="Text 7"/>
+          <p:cNvSpPr txBox="1"/>
+          <p:nvPr/>
+        </p:nvSpPr>
+        <p:spPr>
+          <a:xfrm>
+            <a:off x="932688" y="5908802"/>
+            <a:ext cx="10710367" cy="263398"/>
+          </a:xfrm>
+          <a:prstGeom prst="rect">
+            <a:avLst/>
+          </a:prstGeom>
+          <a:noFill/>
+          <a:ln/>
+        </p:spPr>
+        <p:txBody>
+          <a:bodyPr wrap="square" lIns="0" tIns="0" rIns="0" bIns="0" rtlCol="0" anchor="t"/>
+          <a:lstStyle/>
+          <a:p>
+            <a:pPr indent="0" marL="0">
+              <a:spcAft>
+                <a:spcPts val="200"/>
+              </a:spcAft>
+              <a:buNone/>
+            </a:pPr>
+            <a:r>
+              <a:rPr lang="en-US" sz="1700" dirty="0">
+                <a:solidFill>
+                  <a:srgbClr val="1B2530"/>
+                </a:solidFill>
+                <a:latin typeface="Calibri" pitchFamily="34" charset="0"/>
+                <a:ea typeface="Calibri" pitchFamily="34" charset="-122"/>
+                <a:cs typeface="Calibri" pitchFamily="34" charset="-120"/>
+              </a:rPr>
+              <a:t>L'uscita del flip-flop è ferma per un intero periodo: è ciò che serve a un registro di stato</a:t>
+            </a:r>
+            <a:endParaRPr lang="en-US" sz="1700" dirty="0"/>
+          </a:p>
+        </p:txBody>
+      </p:sp>
       <p:sp>
         <p:nvSpPr>
           <p:cNvPr id="25" name="Slide Number Placeholder 0"/>

--- a/it/slides/13-Architettura_dei_Calcolatori-Macchine_Sequenziali.pptx
+++ b/it/slides/13-Architettura_dei_Calcolatori-Macchine_Sequenziali.pptx
@@ -126,19 +126,19 @@
   <p:extLst>
     <p:ext uri="{521415D9-36F7-43E2-AB2F-B90AF26B5E84}">
       <p14:sectionLst xmlns:p14="http://schemas.microsoft.com/office/powerpoint/2010/main">
-        <p14:section name="Apertura" id="{443b4a33-4b95-c13e-c8d3-4a15d89eab1e}">
+        <p14:section name="Apertura" id="{513bf1d2-d89e-da73-fa85-e00b63075df1}">
           <p14:sldIdLst>
             <p14:sldId id="256"/>
             <p14:sldId id="257"/>
           </p14:sldIdLst>
         </p14:section>
-        <p14:section name="Tempo e stato" id="{1e721fdd-ecc1-79f2-9cd9-07cd8cb66e7d}">
+        <p14:section name="Tempo e stato" id="{da76efd5-0561-a0cb-437f-74d28ae8313c}">
           <p14:sldIdLst>
             <p14:sldId id="258"/>
             <p14:sldId id="259"/>
           </p14:sldIdLst>
         </p14:section>
-        <p14:section name="Macchine a stati finiti" id="{aace85ce-052e-0776-dfd9-0b041e2e50aa}">
+        <p14:section name="Macchine a stati finiti" id="{4866a830-c1a5-b1af-994f-a42a564f0513}">
           <p14:sldIdLst>
             <p14:sldId id="260"/>
             <p14:sldId id="261"/>
@@ -146,7 +146,7 @@
             <p14:sldId id="263"/>
           </p14:sldIdLst>
         </p14:section>
-        <p14:section name="Latch" id="{17d6bc21-97c9-8bcd-8ada-5dbaffaee4b7}">
+        <p14:section name="Latch" id="{05cd14e6-6e12-d678-8b1e-5d11bab9efbf}">
           <p14:sldIdLst>
             <p14:sldId id="264"/>
             <p14:sldId id="265"/>
@@ -155,13 +155,13 @@
             <p14:sldId id="268"/>
           </p14:sldIdLst>
         </p14:section>
-        <p14:section name="Flip-flop" id="{7ddf2e3d-1af8-ea03-0ccf-6c1afaf9448b}">
+        <p14:section name="Flip-flop" id="{6e930ef1-28b3-18fc-180a-505f248ea83e}">
           <p14:sldIdLst>
             <p14:sldId id="269"/>
             <p14:sldId id="270"/>
           </p14:sldIdLst>
         </p14:section>
-        <p14:section name="Ritorno alla macchina" id="{8ee297eb-4851-c456-e84f-e6cf9b98a8ac}">
+        <p14:section name="Ritorno alla macchina" id="{245b53e0-a68e-2539-541f-7c6787a02af8}">
           <p14:sldIdLst>
             <p14:sldId id="271"/>
             <p14:sldId id="272"/>
@@ -575,6 +575,8 @@
             <a:r>
               <a:rPr lang="en-US" dirty="0"/>
               <a:t>Comincia il terzo blocco del corso: stato e memoria. Le macchine della Lezione 11 non avevano memoria: gli stessi ingressi davano sempre le stesse uscite. Un calcolatore però ricorda: un contatore sopravvive da un frame al successivo, un gioco sa se sta mostrando il titolo o il campo di gioco. Questa lezione introduce il tempo e lo stato, il modello che descrive ogni circuito con memoria, e le memorie elementari, latch e flip-flop, con cui sono costruiti i registri del processore.
+Stato di apprendimento: DA COMPRENDERE OGGI, alla fine di questa lezione lo spiegate, lo seguite passo passo e lo applicate da soli; DA UTILIZZARE OGGI, oggi seguite e usate la ricetta; come funziona dentro si spiega più avanti, o non fa parte del corso; DA COMPRENDERE PIÙ AVANTI, riconoscete il nome e lo scopo; lo spiega una lezione successiva. Una slide senza etichetta è contesto: una storia, un esempio, una domanda, un esercizio.
+Stato di apprendimento di questa lezione. DA COMPRENDERE OGGI: macchine a stati finiti; il clock; latch e flip-flop; i registri come flip-flop. DA UTILIZZARE OGGI: il programma completo, gli strumenti di PRG32 (si usa, non si studia, in questo corso). DA COMPRENDERE PIÙ AVANTI: niente. Una slide senza etichetta è contesto: una storia, un esempio, una domanda, un esercizio.
 Per il docente: Spirale: un gioco con una schermata del titolo è una macchina a stati finiti scritta in assembly; la lezione costruisce poi la teoria (tempo, stato, Mealy e Moore), gli elementi di memoria (latch e flip-flop), e torna ai registri e al program counter di RISC-V.</a:t>
             </a:r>
             <a:endParaRPr lang="en-US" dirty="0"/>
@@ -664,6 +666,7 @@
             <a:r>
               <a:rPr lang="en-US" dirty="0"/>
               <a:t>Il latch nel tempo. S va a 1, e dopo il ritardo delle porte Q diventa 1. Poi S torna a 0 e non accade nulla: la retroazione tiene Q a 1. Questo tratto piatto è la memoria. Più tardi R va a 1, Q torna a 0, e vi resta quando R torna a 0. Seguite sul disegno i quattro istanti segnati tenendo davanti il circuito della slide precedente, e ricavate l'uscita di ogni porta.
+DA COMPRENDERE OGGI: latch e flip-flop.
 Per il docente: Diagramma temporale. La presentazione originale tracciava ciascuno di questi quattro passi porta per porta su una dozzina di slide; ripercorrerli alla lavagna con il circuito della slide precedente. Il latch è un automa di Moore: la sua uscita è il suo stato.</a:t>
             </a:r>
             <a:endParaRPr lang="en-US" dirty="0"/>
@@ -753,6 +756,7 @@
             <a:r>
               <a:rPr lang="en-US" dirty="0"/>
               <a:t>Con S e R entrambi a 1, entrambe le porte NOR danno 0, quindi Q e il suo complemento non sono più complementari. Peggio: se poi i due ingressi tornano a 0 insieme, le porte fanno a gara, e lo stato finale dipende da quale è più veloce. Il risultato è imprevedibile, e il latch può perfino oscillare. Chi usa un latch SR deve garantire che S e R non siano mai a 1 insieme. Gli elementi JK e D sono stati inventati per eliminare il problema alla radice.
+DA COMPRENDERE OGGI: latch e flip-flop.
 Per il docente: Le conclusioni della presentazione originale scambiavano set e reset in una slide: set dà Q = 1, reset dà Q = 0.</a:t>
             </a:r>
             <a:endParaRPr lang="en-US" dirty="0"/>
@@ -842,6 +846,7 @@
             <a:r>
               <a:rPr lang="en-US" dirty="0"/>
               <a:t>In un circuito asincrono le uscite possono cambiare ogni volta che cambia un ingresso. In uno sincrono è il clock a decidere quando. Per rendere sincrono il latch SR, S e R passano per due porte AND insieme al clock. Quando il clock vale 0 entrambe le porte danno 0 e il latch non può cambiare; quando vale 1 si comporta come il latch semplice. Il clock decide quando gli ingressi vengono ascoltati.
+DA COMPRENDERE OGGI: latch e flip-flop.
 Per il docente: Latch sincroni e asincroni. La presentazione originale suggerisce un simulatore: de-iitr.vlabs.ac.in/exp/truth-tables-flip-flops.</a:t>
             </a:r>
             <a:endParaRPr lang="en-US" dirty="0"/>
@@ -931,6 +936,7 @@
             <a:r>
               <a:rPr lang="en-US" dirty="0"/>
               <a:t>Due miglioramenti del latch. Nel latch JK le uscite sono riportate alle porte di ingresso, così che set e reset interni non possano mai valere 1 insieme; la combinazione J = K = 1, invece di essere vietata, inverte l'uscita: la fa commutare. Il latch D ha un solo ingresso: D va al set e la sua negazione al reset, quindi l'uscita prende semplicemente il valore di D finché il clock è attivo. D sta per delay, ritardo, o per dato.
+DA COMPRENDERE OGGI: latch e flip-flop.
 Per il docente: JK: le uscite sono riportate alle porte di ingresso, S = J . Q' e R = K . Q; poiché Q e Q' sono complementari, S e R non possono mai valere entrambi 1. D: un solo ingresso va a S e, attraverso un invertitore, a R, quindi sono possibili solo i casi S = 0, R = 1 e S = 1, R = 0.</a:t>
             </a:r>
             <a:endParaRPr lang="en-US" dirty="0"/>
@@ -1020,6 +1026,7 @@
             <a:r>
               <a:rPr lang="en-US" dirty="0"/>
               <a:t>Il flip-flop master-slave è fatto di due latch in serie, controllati da livelli opposti del clock. Quando il clock vale 0 il master è aperto e segue l'ingresso, mentre lo slave è chiuso. Quando il clock passa a 1 il master si chiude, conservando ciò che aveva, e lo slave si apre e lo mostra. I due non sono mai trasparenti insieme, quindi l'ingresso non può mai correre dritto fino all'uscita. L'effetto è che l'uscita cambia solo sul fronte di salita: il flip-flop è sensibile al fronte.
+DA COMPRENDERE OGGI: latch e flip-flop.
 Per il docente: Flip-flop master-slave. La presentazione originale mostrava la versione JK, fatta di due latch JK sincroni; la versione D è quella usata nei registri di un processore.</a:t>
             </a:r>
             <a:endParaRPr lang="en-US" dirty="0"/>
@@ -1109,6 +1116,7 @@
             <a:r>
               <a:rPr lang="en-US" dirty="0"/>
               <a:t>La differenza, vista sulle forme d'onda. Il clock e l'ingresso D sono gli stessi per entrambi. L'uscita del latch segue D per tutta la fase alta del clock: cambia a metà di una fase. L'uscita del flip-flop cambia solo sui fronti di salita, prendendo il valore che D ha in quell'istante; gli impulsi brevi di D tra due fronti sono ignorati. L'uscita del flip-flop è ferma per un intero periodo, che è esattamente ciò che serve a un registro di stato.
+DA COMPRENDERE OGGI: latch e flip-flop.
 Per il docente: Sensibile al livello contro sensibile al fronte. Le forme d'onda sono calcolate, non disegnate a mano: l'uscita del latch cambia a metà di una fase alta, quella del flip-flop solo sui fronti di salita.</a:t>
             </a:r>
             <a:endParaRPr lang="en-US" dirty="0"/>
@@ -1198,6 +1206,7 @@
             <a:r>
               <a:rPr lang="en-US" dirty="0"/>
               <a:t>Un registro è una fila di flip-flop con un clock comune: un flip-flop per bit. Con un segnale di abilitazione al caricamento prende un nuovo valore solo quando gli è chiesto, e altrimenti conserva il vecchio. RISC-V ha trentadue registri di trentadue bit: 1024 flip-flop. Ora le due macchine della Lezione 11 trovano il loro posto: il decodificatore pilotato dal campo rd attiva l'abilitazione di un solo registro, e i multiplexer selezionano i registri da leggere.
+DA COMPRENDERE OGGI: i registri come flip-flop.
 Per il docente: La presentazione originale usava come esempio il 74273 (otto flip-flop D, un clock e un clear). Registri, registri a scorrimento, bus e buffer a tre stati sono l'argomento della prossima lezione.</a:t>
             </a:r>
             <a:endParaRPr lang="en-US" dirty="0"/>
@@ -1645,6 +1654,7 @@
             <a:r>
               <a:rPr lang="en-US" dirty="0"/>
               <a:t>Cinque conclusioni. I circuiti digitali sono combinatori o sequenziali, e per i secondi contano il tempo e lo stato. Una macchina sequenziale realizza un automa a stati finiti, del tipo di Mealy o di Moore. Latch e flip-flop sono le memorie elementari, ed è la retroazione a far sì che un circuito ricordi. Il clock decide quando: i latch ascoltano durante un livello, i flip-flop su un fronte. Registri, contatori, program counter e processore sono macchine sequenziali costruite attorno a reti combinatorie.
+Stato di apprendimento, riepilogo. DA COMPRENDERE OGGI: macchine a stati finiti; il clock; latch e flip-flop; i registri come flip-flop. DA UTILIZZARE OGGI: il programma completo, gli strumenti di PRG32 (si usa, non si studia, in questo corso). DA COMPRENDERE PIÙ AVANTI: niente. Una slide senza etichetta è contesto: una storia, un esempio, una domanda, un esercizio.
 Per il docente: Prossima lezione: le macchine elementari per l'architettura: registri, registri a scorrimento, bus e buffer a tre stati.</a:t>
             </a:r>
             <a:endParaRPr lang="en-US" dirty="0"/>
@@ -1734,6 +1744,7 @@
             <a:r>
               <a:rPr lang="en-US" dirty="0"/>
               <a:t>Il clock è un segnale che alterna regolarmente 0 e 1. Il disegno ne nomina le parti: il periodo T, il tempo alto e il tempo basso, il fronte di salita, dove passa da 0 a 1, e il fronte di discesa. La frequenza è il numero di periodi al secondo, uno diviso T. I circuiti sincroni cambiano stato su uno dei due fronti. Per il kit: 160 MHz significano un periodo di 6,25 nanosecondi, e ogni rete combinatoria del chip deve assestarsi entro quel tempo.
+DA COMPRENDERE OGGI: il clock.
 Per il docente: Fronte di salita, fronte di discesa, periodo TCK, TH e TL nella slide originale. Il legame con la Lezione 11: il periodo deve superare il percorso critico. In un gioco PRG32 il frame fa da clock, molto più lento.</a:t>
             </a:r>
             <a:endParaRPr lang="en-US" dirty="0"/>
@@ -1823,6 +1834,7 @@
             <a:r>
               <a:rPr lang="en-US" dirty="0"/>
               <a:t>Lo stato è una sintesi di tutta la storia precedente degli ingressi: tutto ciò che il circuito deve sapere del passato per comportarsi correttamente da qui in poi. È conservato da variabili di stato. Una funzione di transizione calcola lo stato prossimo dallo stato presente e dagli ingressi presenti, e lo stato si aggiorna una volta per ciclo di clock. La formula a destra lo dice in modo compatto. Per memorizzare lo stato servono elementi con due condizioni stabili: latch e flip-flop.
+DA COMPRENDERE OGGI: macchine a stati finiti.
 Per il docente: Nel riscaldamento: una variabile di stato (la parola state), la funzione di transizione è game_update, il clock è il frame.</a:t>
             </a:r>
             <a:endParaRPr lang="en-US" dirty="0"/>
@@ -1912,6 +1924,7 @@
             <a:r>
               <a:rPr lang="en-US" dirty="0"/>
               <a:t>La definizione formale. Una macchina sequenziale è fatta di cinque cose: un alfabeto di ingresso I e un alfabeto di uscita U, insiemi finiti di simboli; un insieme finito di stati S; una funzione stato prossimo, che a ogni coppia stato-ingresso fa corrispondere uno stato prossimo; e una funzione di uscita. Confrontatela con il riscaldamento: l'ingresso è «A premuto o no», gli stati sono TITLE, PLAY e OVER, la funzione stato prossimo è il codice di game_update, e l'uscita è la schermata.
+DA COMPRENDERE OGGI: macchine a stati finiti.
 Per il docente: In inglese: finite-state automaton; sequential machine. Con k variabili di stato gli stati sono al più 2^k. La slide originale scriveva le funzioni con segni di appartenenza: qui si usano le frecce corrette.</a:t>
             </a:r>
             <a:endParaRPr lang="en-US" dirty="0"/>
@@ -2001,6 +2014,7 @@
             <a:r>
               <a:rPr lang="en-US" dirty="0"/>
               <a:t>L'uscita si può definire in due modi. In una macchina di Mealy l'uscita dipende dallo stato e dall'ingresso: si scrive sulle transizioni, e può reagire a un ingresso nello stesso ciclo. In una macchina di Moore l'uscita dipende dal solo stato: si scrive dentro gli stati e cambia solo quando cambia lo stato. Il gioco del riscaldamento è una macchina di Moore: ogni stato ha la sua schermata. I due modelli sono equivalenti, anche se il numero di stati può essere diverso.
+DA COMPRENDERE OGGI: macchine a stati finiti.
 Per il docente: Ogni macchina di Mealy ha una macchina di Moore equivalente e viceversa, eventualmente con un numero diverso di stati.</a:t>
             </a:r>
             <a:endParaRPr lang="en-US" dirty="0"/>
@@ -2090,6 +2104,7 @@
             <a:r>
               <a:rPr lang="en-US" dirty="0"/>
               <a:t>L'architettura generale di ogni macchina sequenziale. Una rete combinatoria calcola lo stato prossimo e le uscite a partire dagli ingressi e dallo stato presente. Un registro di flip-flop conserva lo stato presente. A ogni fronte del clock lo stato prossimo diventa lo stato presente. L'anello dalla rete al registro e ritorno è ciò che rende possibile la memoria, e il registro è ciò che tiene l'anello sotto controllo: i valori fanno un giro per ciclo, mai più in fretta. Tutta la Lezione 11 vive nel riquadro superiore.
+DA COMPRENDERE OGGI: macchine a stati finiti.
 Per il docente: Rete combinatoria e registri di stato. Il riscaldamento ha esattamente questa forma: game_update è il riquadro superiore, la parola state è il registro, il frame è il clock.</a:t>
             </a:r>
             <a:endParaRPr lang="en-US" dirty="0"/>
@@ -2179,6 +2194,7 @@
             <a:r>
               <a:rPr lang="en-US" dirty="0"/>
               <a:t>Le due descrizioni equivalenti di una macchina, per un esempio di Mealy con quattro stati. Nella tabella degli stati ogni riga è uno stato presente e ogni colonna un simbolo di ingresso; la cella dà lo stato prossimo e, dopo la barra, l'uscita. Nel diagramma degli stati ogni stato è un nodo e ogni transizione una freccia etichettata ingresso barra uscita. Esercitatevi a passare dall'una all'altro: prendete la riga di s0 e trovatene nel disegno le due frecce.
+DA COMPRENDERE OGGI: macchine a stati finiti.
 Per il docente: Tabella degli stati e diagramma degli stati: G(V, E, L) con V i nodi (stati), E gli archi (transizioni) e L le etichette. L'esempio è quello della presentazione originale.</a:t>
             </a:r>
             <a:endParaRPr lang="en-US" dirty="0"/>
@@ -2268,6 +2284,7 @@
             <a:r>
               <a:rPr lang="en-US" dirty="0"/>
               <a:t>Il latch SR: due porte NOR, ciascuna con l'uscita collegata a un ingresso dell'altra. S, per set, porta Q a 1; R, per reset, porta Q a 0. Con entrambi a 0 il latch conserva l'ultimo valore: ricorda quale ingresso è stato a 1 più di recente. La tabella riassume i quattro casi, e l'ultimo è vietato. Per via della retroazione Q dipende da se stesso: in un circuito con un anello un segnale è una forma d'onda nel tempo e non un singolo valore.
+DA COMPRENDERE OGGI: latch e flip-flop.
 Per il docente: Q = (R + Q')' e Q' = (S + Q)'. Tagliando il filo di retroazione il latch diventa una semplice rete combinatoria di due NOR: così lo analizzava, caso per caso, la presentazione originale. Lo stesso latch si può costruire con due porte NAND e ingressi attivi bassi.</a:t>
             </a:r>
             <a:endParaRPr lang="en-US" dirty="0"/>
@@ -3405,6 +3422,420 @@
       </p:pic>
       <p:sp>
         <p:nvSpPr>
+          <p:cNvPr id="15" name="Shape 12"/>
+          <p:cNvSpPr/>
+          <p:nvPr/>
+        </p:nvSpPr>
+        <p:spPr>
+          <a:xfrm>
+            <a:off x="8910777" y="91440"/>
+            <a:ext cx="2732278" cy="274320"/>
+          </a:xfrm>
+          <a:prstGeom prst="rect">
+            <a:avLst/>
+          </a:prstGeom>
+          <a:solidFill>
+            <a:srgbClr val="F3E8FF"/>
+          </a:solidFill>
+          <a:ln w="12700">
+            <a:solidFill>
+              <a:srgbClr val="7E22CE"/>
+            </a:solidFill>
+            <a:prstDash val="dash"/>
+          </a:ln>
+        </p:spPr>
+      </p:sp>
+      <p:sp>
+        <p:nvSpPr>
+          <p:cNvPr id="16" name="Shape 13"/>
+          <p:cNvSpPr/>
+          <p:nvPr/>
+        </p:nvSpPr>
+        <p:spPr>
+          <a:xfrm>
+            <a:off x="8938209" y="128016"/>
+            <a:ext cx="45720" cy="45720"/>
+          </a:xfrm>
+          <a:prstGeom prst="rect">
+            <a:avLst/>
+          </a:prstGeom>
+          <a:solidFill>
+            <a:srgbClr val="7E22CE"/>
+          </a:solidFill>
+          <a:ln w="12700">
+            <a:solidFill>
+              <a:srgbClr val="7E22CE"/>
+            </a:solidFill>
+            <a:prstDash val="solid"/>
+          </a:ln>
+        </p:spPr>
+      </p:sp>
+      <p:sp>
+        <p:nvSpPr>
+          <p:cNvPr id="17" name="Shape 14"/>
+          <p:cNvSpPr/>
+          <p:nvPr/>
+        </p:nvSpPr>
+        <p:spPr>
+          <a:xfrm>
+            <a:off x="8938209" y="205740"/>
+            <a:ext cx="45720" cy="45720"/>
+          </a:xfrm>
+          <a:prstGeom prst="rect">
+            <a:avLst/>
+          </a:prstGeom>
+          <a:solidFill>
+            <a:srgbClr val="7E22CE"/>
+          </a:solidFill>
+          <a:ln w="12700">
+            <a:solidFill>
+              <a:srgbClr val="7E22CE"/>
+            </a:solidFill>
+            <a:prstDash val="solid"/>
+          </a:ln>
+        </p:spPr>
+      </p:sp>
+      <p:sp>
+        <p:nvSpPr>
+          <p:cNvPr id="18" name="Shape 15"/>
+          <p:cNvSpPr/>
+          <p:nvPr/>
+        </p:nvSpPr>
+        <p:spPr>
+          <a:xfrm>
+            <a:off x="8938209" y="283464"/>
+            <a:ext cx="45720" cy="45720"/>
+          </a:xfrm>
+          <a:prstGeom prst="rect">
+            <a:avLst/>
+          </a:prstGeom>
+          <a:solidFill>
+            <a:srgbClr val="7E22CE"/>
+          </a:solidFill>
+          <a:ln w="12700">
+            <a:solidFill>
+              <a:srgbClr val="7E22CE"/>
+            </a:solidFill>
+            <a:prstDash val="solid"/>
+          </a:ln>
+        </p:spPr>
+      </p:sp>
+      <p:pic>
+        <p:nvPicPr>
+          <p:cNvPr id="19" name="Image 1" descr="preencoded.png">    </p:cNvPr>
+          <p:cNvPicPr>
+            <a:picLocks noChangeAspect="1"/>
+          </p:cNvPicPr>
+          <p:nvPr/>
+        </p:nvPicPr>
+        <p:blipFill>
+          <a:blip r:embed="rId2"/>
+          <a:stretch>
+            <a:fillRect/>
+          </a:stretch>
+        </p:blipFill>
+        <p:spPr>
+          <a:xfrm>
+            <a:off x="9038793" y="128016"/>
+            <a:ext cx="201168" cy="201168"/>
+          </a:xfrm>
+          <a:prstGeom prst="rect">
+            <a:avLst/>
+          </a:prstGeom>
+        </p:spPr>
+      </p:pic>
+      <p:sp>
+        <p:nvSpPr>
+          <p:cNvPr id="20" name="Text 16"/>
+          <p:cNvSpPr txBox="1"/>
+          <p:nvPr/>
+        </p:nvSpPr>
+        <p:spPr>
+          <a:xfrm>
+            <a:off x="9294825" y="91440"/>
+            <a:ext cx="2311654" cy="274320"/>
+          </a:xfrm>
+          <a:prstGeom prst="rect">
+            <a:avLst/>
+          </a:prstGeom>
+          <a:noFill/>
+          <a:ln/>
+        </p:spPr>
+        <p:txBody>
+          <a:bodyPr wrap="square" lIns="0" tIns="0" rIns="0" bIns="0" rtlCol="0" anchor="ctr"/>
+          <a:lstStyle/>
+          <a:p>
+            <a:pPr indent="0" marL="0">
+              <a:buNone/>
+            </a:pPr>
+            <a:r>
+              <a:rPr lang="en-US" sz="1100" b="1" dirty="0">
+                <a:solidFill>
+                  <a:srgbClr val="6B21A8"/>
+                </a:solidFill>
+                <a:latin typeface="Calibri" pitchFamily="34" charset="0"/>
+                <a:ea typeface="Calibri" pitchFamily="34" charset="-122"/>
+                <a:cs typeface="Calibri" pitchFamily="34" charset="-120"/>
+              </a:rPr>
+              <a:t>DA COMPRENDERE PIÙ AVANTI</a:t>
+            </a:r>
+            <a:endParaRPr lang="en-US" sz="1100" dirty="0"/>
+          </a:p>
+        </p:txBody>
+      </p:sp>
+      <p:sp>
+        <p:nvSpPr>
+          <p:cNvPr id="21" name="Shape 17"/>
+          <p:cNvSpPr/>
+          <p:nvPr/>
+        </p:nvSpPr>
+        <p:spPr>
+          <a:xfrm>
+            <a:off x="6675069" y="91440"/>
+            <a:ext cx="2125980" cy="274320"/>
+          </a:xfrm>
+          <a:prstGeom prst="rect">
+            <a:avLst/>
+          </a:prstGeom>
+          <a:solidFill>
+            <a:srgbClr val="FEF3C7"/>
+          </a:solidFill>
+          <a:ln w="12700">
+            <a:solidFill>
+              <a:srgbClr val="B45309"/>
+            </a:solidFill>
+            <a:prstDash val="solid"/>
+          </a:ln>
+        </p:spPr>
+      </p:sp>
+      <p:sp>
+        <p:nvSpPr>
+          <p:cNvPr id="22" name="Shape 18"/>
+          <p:cNvSpPr/>
+          <p:nvPr/>
+        </p:nvSpPr>
+        <p:spPr>
+          <a:xfrm>
+            <a:off x="6675069" y="91440"/>
+            <a:ext cx="27432" cy="274320"/>
+          </a:xfrm>
+          <a:prstGeom prst="rect">
+            <a:avLst/>
+          </a:prstGeom>
+          <a:solidFill>
+            <a:srgbClr val="B45309"/>
+          </a:solidFill>
+          <a:ln w="12700">
+            <a:solidFill>
+              <a:srgbClr val="B45309"/>
+            </a:solidFill>
+            <a:prstDash val="solid"/>
+          </a:ln>
+        </p:spPr>
+      </p:sp>
+      <p:sp>
+        <p:nvSpPr>
+          <p:cNvPr id="23" name="Shape 19"/>
+          <p:cNvSpPr/>
+          <p:nvPr/>
+        </p:nvSpPr>
+        <p:spPr>
+          <a:xfrm>
+            <a:off x="6729933" y="91440"/>
+            <a:ext cx="27432" cy="274320"/>
+          </a:xfrm>
+          <a:prstGeom prst="rect">
+            <a:avLst/>
+          </a:prstGeom>
+          <a:solidFill>
+            <a:srgbClr val="B45309"/>
+          </a:solidFill>
+          <a:ln w="12700">
+            <a:solidFill>
+              <a:srgbClr val="B45309"/>
+            </a:solidFill>
+            <a:prstDash val="solid"/>
+          </a:ln>
+        </p:spPr>
+      </p:sp>
+      <p:pic>
+        <p:nvPicPr>
+          <p:cNvPr id="24" name="Image 2" descr="preencoded.png">    </p:cNvPr>
+          <p:cNvPicPr>
+            <a:picLocks noChangeAspect="1"/>
+          </p:cNvPicPr>
+          <p:nvPr/>
+        </p:nvPicPr>
+        <p:blipFill>
+          <a:blip r:embed="rId3"/>
+          <a:stretch>
+            <a:fillRect/>
+          </a:stretch>
+        </p:blipFill>
+        <p:spPr>
+          <a:xfrm>
+            <a:off x="6803085" y="128016"/>
+            <a:ext cx="201168" cy="201168"/>
+          </a:xfrm>
+          <a:prstGeom prst="rect">
+            <a:avLst/>
+          </a:prstGeom>
+        </p:spPr>
+      </p:pic>
+      <p:sp>
+        <p:nvSpPr>
+          <p:cNvPr id="25" name="Text 20"/>
+          <p:cNvSpPr txBox="1"/>
+          <p:nvPr/>
+        </p:nvSpPr>
+        <p:spPr>
+          <a:xfrm>
+            <a:off x="7059117" y="91440"/>
+            <a:ext cx="1705356" cy="274320"/>
+          </a:xfrm>
+          <a:prstGeom prst="rect">
+            <a:avLst/>
+          </a:prstGeom>
+          <a:noFill/>
+          <a:ln/>
+        </p:spPr>
+        <p:txBody>
+          <a:bodyPr wrap="square" lIns="0" tIns="0" rIns="0" bIns="0" rtlCol="0" anchor="ctr"/>
+          <a:lstStyle/>
+          <a:p>
+            <a:pPr indent="0" marL="0">
+              <a:buNone/>
+            </a:pPr>
+            <a:r>
+              <a:rPr lang="en-US" sz="1100" b="1" dirty="0">
+                <a:solidFill>
+                  <a:srgbClr val="92400E"/>
+                </a:solidFill>
+                <a:latin typeface="Calibri" pitchFamily="34" charset="0"/>
+                <a:ea typeface="Calibri" pitchFamily="34" charset="-122"/>
+                <a:cs typeface="Calibri" pitchFamily="34" charset="-120"/>
+              </a:rPr>
+              <a:t>DA UTILIZZARE OGGI</a:t>
+            </a:r>
+            <a:endParaRPr lang="en-US" sz="1100" dirty="0"/>
+          </a:p>
+        </p:txBody>
+      </p:sp>
+      <p:sp>
+        <p:nvSpPr>
+          <p:cNvPr id="26" name="Shape 21"/>
+          <p:cNvSpPr/>
+          <p:nvPr/>
+        </p:nvSpPr>
+        <p:spPr>
+          <a:xfrm>
+            <a:off x="4352747" y="91440"/>
+            <a:ext cx="2212594" cy="274320"/>
+          </a:xfrm>
+          <a:prstGeom prst="rect">
+            <a:avLst/>
+          </a:prstGeom>
+          <a:solidFill>
+            <a:srgbClr val="E0F2FE"/>
+          </a:solidFill>
+          <a:ln w="12700">
+            <a:solidFill>
+              <a:srgbClr val="0369A1"/>
+            </a:solidFill>
+            <a:prstDash val="solid"/>
+          </a:ln>
+        </p:spPr>
+      </p:sp>
+      <p:sp>
+        <p:nvSpPr>
+          <p:cNvPr id="27" name="Shape 22"/>
+          <p:cNvSpPr/>
+          <p:nvPr/>
+        </p:nvSpPr>
+        <p:spPr>
+          <a:xfrm>
+            <a:off x="4352747" y="91440"/>
+            <a:ext cx="73152" cy="274320"/>
+          </a:xfrm>
+          <a:prstGeom prst="rect">
+            <a:avLst/>
+          </a:prstGeom>
+          <a:solidFill>
+            <a:srgbClr val="0369A1"/>
+          </a:solidFill>
+          <a:ln w="12700">
+            <a:solidFill>
+              <a:srgbClr val="0369A1"/>
+            </a:solidFill>
+            <a:prstDash val="solid"/>
+          </a:ln>
+        </p:spPr>
+      </p:sp>
+      <p:pic>
+        <p:nvPicPr>
+          <p:cNvPr id="28" name="Image 3" descr="preencoded.png">    </p:cNvPr>
+          <p:cNvPicPr>
+            <a:picLocks noChangeAspect="1"/>
+          </p:cNvPicPr>
+          <p:nvPr/>
+        </p:nvPicPr>
+        <p:blipFill>
+          <a:blip r:embed="rId4"/>
+          <a:stretch>
+            <a:fillRect/>
+          </a:stretch>
+        </p:blipFill>
+        <p:spPr>
+          <a:xfrm>
+            <a:off x="4480763" y="128016"/>
+            <a:ext cx="201168" cy="201168"/>
+          </a:xfrm>
+          <a:prstGeom prst="rect">
+            <a:avLst/>
+          </a:prstGeom>
+        </p:spPr>
+      </p:pic>
+      <p:sp>
+        <p:nvSpPr>
+          <p:cNvPr id="29" name="Text 23"/>
+          <p:cNvSpPr txBox="1"/>
+          <p:nvPr/>
+        </p:nvSpPr>
+        <p:spPr>
+          <a:xfrm>
+            <a:off x="4736795" y="91440"/>
+            <a:ext cx="1791970" cy="274320"/>
+          </a:xfrm>
+          <a:prstGeom prst="rect">
+            <a:avLst/>
+          </a:prstGeom>
+          <a:noFill/>
+          <a:ln/>
+        </p:spPr>
+        <p:txBody>
+          <a:bodyPr wrap="square" lIns="0" tIns="0" rIns="0" bIns="0" rtlCol="0" anchor="ctr"/>
+          <a:lstStyle/>
+          <a:p>
+            <a:pPr indent="0" marL="0">
+              <a:buNone/>
+            </a:pPr>
+            <a:r>
+              <a:rPr lang="en-US" sz="1100" b="1" dirty="0">
+                <a:solidFill>
+                  <a:srgbClr val="075985"/>
+                </a:solidFill>
+                <a:latin typeface="Calibri" pitchFamily="34" charset="0"/>
+                <a:ea typeface="Calibri" pitchFamily="34" charset="-122"/>
+                <a:cs typeface="Calibri" pitchFamily="34" charset="-120"/>
+              </a:rPr>
+              <a:t>DA COMPRENDERE OGGI</a:t>
+            </a:r>
+            <a:endParaRPr lang="en-US" sz="1100" dirty="0"/>
+          </a:p>
+        </p:txBody>
+      </p:sp>
+      <p:sp>
+        <p:nvSpPr>
           <p:cNvPr id="25" name="Slide Number Placeholder 0"/>
           <p:cNvSpPr>
             <a:spLocks noGrp="1"/>
@@ -3544,9 +3975,59 @@
           </a:ln>
         </p:spPr>
       </p:sp>
+      <p:sp>
+        <p:nvSpPr>
+          <p:cNvPr id="4" name="Shape 2"/>
+          <p:cNvSpPr/>
+          <p:nvPr/>
+        </p:nvSpPr>
+        <p:spPr>
+          <a:xfrm>
+            <a:off x="8117281" y="91440"/>
+            <a:ext cx="3525774" cy="274320"/>
+          </a:xfrm>
+          <a:prstGeom prst="rect">
+            <a:avLst/>
+          </a:prstGeom>
+          <a:solidFill>
+            <a:srgbClr val="E0F2FE"/>
+          </a:solidFill>
+          <a:ln w="12700">
+            <a:solidFill>
+              <a:srgbClr val="0369A1"/>
+            </a:solidFill>
+            <a:prstDash val="solid"/>
+          </a:ln>
+        </p:spPr>
+      </p:sp>
+      <p:sp>
+        <p:nvSpPr>
+          <p:cNvPr id="5" name="Shape 3"/>
+          <p:cNvSpPr/>
+          <p:nvPr/>
+        </p:nvSpPr>
+        <p:spPr>
+          <a:xfrm>
+            <a:off x="8117281" y="91440"/>
+            <a:ext cx="73152" cy="274320"/>
+          </a:xfrm>
+          <a:prstGeom prst="rect">
+            <a:avLst/>
+          </a:prstGeom>
+          <a:solidFill>
+            <a:srgbClr val="0369A1"/>
+          </a:solidFill>
+          <a:ln w="12700">
+            <a:solidFill>
+              <a:srgbClr val="0369A1"/>
+            </a:solidFill>
+            <a:prstDash val="solid"/>
+          </a:ln>
+        </p:spPr>
+      </p:sp>
       <p:pic>
         <p:nvPicPr>
-          <p:cNvPr id="5" name="Image 0" descr="preencoded.png">    </p:cNvPr>
+          <p:cNvPr id="6" name="Image 0" descr="preencoded.png">    </p:cNvPr>
           <p:cNvPicPr>
             <a:picLocks noChangeAspect="1"/>
           </p:cNvPicPr>
@@ -3560,6 +4041,83 @@
         </p:blipFill>
         <p:spPr>
           <a:xfrm>
+            <a:off x="8245297" y="128016"/>
+            <a:ext cx="201168" cy="201168"/>
+          </a:xfrm>
+          <a:prstGeom prst="rect">
+            <a:avLst/>
+          </a:prstGeom>
+        </p:spPr>
+      </p:pic>
+      <p:sp>
+        <p:nvSpPr>
+          <p:cNvPr id="7" name="Text 4"/>
+          <p:cNvSpPr txBox="1"/>
+          <p:nvPr/>
+        </p:nvSpPr>
+        <p:spPr>
+          <a:xfrm>
+            <a:off x="8501329" y="91440"/>
+            <a:ext cx="3105150" cy="274320"/>
+          </a:xfrm>
+          <a:prstGeom prst="rect">
+            <a:avLst/>
+          </a:prstGeom>
+          <a:noFill/>
+          <a:ln/>
+        </p:spPr>
+        <p:txBody>
+          <a:bodyPr wrap="square" lIns="0" tIns="0" rIns="0" bIns="0" rtlCol="0" anchor="ctr"/>
+          <a:lstStyle/>
+          <a:p>
+            <a:pPr indent="0" marL="0">
+              <a:buNone/>
+            </a:pPr>
+            <a:r>
+              <a:rPr lang="en-US" sz="1100" b="1" dirty="0">
+                <a:solidFill>
+                  <a:srgbClr val="075985"/>
+                </a:solidFill>
+                <a:latin typeface="Calibri" pitchFamily="34" charset="0"/>
+                <a:ea typeface="Calibri" pitchFamily="34" charset="-122"/>
+                <a:cs typeface="Calibri" pitchFamily="34" charset="-120"/>
+              </a:rPr>
+              <a:t>DA COMPRENDERE OGGI</a:t>
+            </a:r>
+            <a:pPr indent="0" marL="0">
+              <a:buNone/>
+            </a:pPr>
+            <a:r>
+              <a:rPr lang="en-US" sz="1100" dirty="0">
+                <a:solidFill>
+                  <a:srgbClr val="075985"/>
+                </a:solidFill>
+                <a:latin typeface="Calibri" pitchFamily="34" charset="0"/>
+                <a:ea typeface="Calibri" pitchFamily="34" charset="-122"/>
+                <a:cs typeface="Calibri" pitchFamily="34" charset="-120"/>
+              </a:rPr>
+              <a:t> · latch e flip-flop</a:t>
+            </a:r>
+            <a:endParaRPr lang="en-US" sz="1100" dirty="0"/>
+          </a:p>
+        </p:txBody>
+      </p:sp>
+      <p:pic>
+        <p:nvPicPr>
+          <p:cNvPr id="9" name="Image 1" descr="preencoded.png">    </p:cNvPr>
+          <p:cNvPicPr>
+            <a:picLocks noChangeAspect="1"/>
+          </p:cNvPicPr>
+          <p:nvPr/>
+        </p:nvPicPr>
+        <p:blipFill>
+          <a:blip r:embed="rId2"/>
+          <a:stretch>
+            <a:fillRect/>
+          </a:stretch>
+        </p:blipFill>
+        <p:spPr>
+          <a:xfrm>
             <a:off x="822960" y="1509613"/>
             <a:ext cx="10545775" cy="2741494"/>
           </a:xfrm>
@@ -3570,7 +4128,7 @@
       </p:pic>
       <p:sp>
         <p:nvSpPr>
-          <p:cNvPr id="6" name="Shape 2"/>
+          <p:cNvPr id="10" name="Shape 5"/>
           <p:cNvSpPr/>
           <p:nvPr/>
         </p:nvSpPr>
@@ -3595,7 +4153,7 @@
       </p:sp>
       <p:sp>
         <p:nvSpPr>
-          <p:cNvPr id="7" name="Text 3"/>
+          <p:cNvPr id="11" name="Text 6"/>
           <p:cNvSpPr txBox="1"/>
           <p:nvPr/>
         </p:nvSpPr>
@@ -3637,7 +4195,7 @@
       </p:sp>
       <p:sp>
         <p:nvSpPr>
-          <p:cNvPr id="8" name="Shape 4"/>
+          <p:cNvPr id="12" name="Shape 7"/>
           <p:cNvSpPr/>
           <p:nvPr/>
         </p:nvSpPr>
@@ -3662,7 +4220,7 @@
       </p:sp>
       <p:sp>
         <p:nvSpPr>
-          <p:cNvPr id="9" name="Text 5"/>
+          <p:cNvPr id="13" name="Text 8"/>
           <p:cNvSpPr txBox="1"/>
           <p:nvPr/>
         </p:nvSpPr>
@@ -3704,7 +4262,7 @@
       </p:sp>
       <p:sp>
         <p:nvSpPr>
-          <p:cNvPr id="10" name="Shape 6"/>
+          <p:cNvPr id="14" name="Shape 9"/>
           <p:cNvSpPr/>
           <p:nvPr/>
         </p:nvSpPr>
@@ -3729,7 +4287,7 @@
       </p:sp>
       <p:sp>
         <p:nvSpPr>
-          <p:cNvPr id="11" name="Text 7"/>
+          <p:cNvPr id="15" name="Text 10"/>
           <p:cNvSpPr txBox="1"/>
           <p:nvPr/>
         </p:nvSpPr>
@@ -4325,6 +4883,133 @@
       </p:sp>
       <p:sp>
         <p:nvSpPr>
+          <p:cNvPr id="16" name="Shape 14"/>
+          <p:cNvSpPr/>
+          <p:nvPr/>
+        </p:nvSpPr>
+        <p:spPr>
+          <a:xfrm>
+            <a:off x="8117281" y="91440"/>
+            <a:ext cx="3525774" cy="274320"/>
+          </a:xfrm>
+          <a:prstGeom prst="rect">
+            <a:avLst/>
+          </a:prstGeom>
+          <a:solidFill>
+            <a:srgbClr val="E0F2FE"/>
+          </a:solidFill>
+          <a:ln w="12700">
+            <a:solidFill>
+              <a:srgbClr val="0369A1"/>
+            </a:solidFill>
+            <a:prstDash val="solid"/>
+          </a:ln>
+        </p:spPr>
+      </p:sp>
+      <p:sp>
+        <p:nvSpPr>
+          <p:cNvPr id="17" name="Shape 15"/>
+          <p:cNvSpPr/>
+          <p:nvPr/>
+        </p:nvSpPr>
+        <p:spPr>
+          <a:xfrm>
+            <a:off x="8117281" y="91440"/>
+            <a:ext cx="73152" cy="274320"/>
+          </a:xfrm>
+          <a:prstGeom prst="rect">
+            <a:avLst/>
+          </a:prstGeom>
+          <a:solidFill>
+            <a:srgbClr val="0369A1"/>
+          </a:solidFill>
+          <a:ln w="12700">
+            <a:solidFill>
+              <a:srgbClr val="0369A1"/>
+            </a:solidFill>
+            <a:prstDash val="solid"/>
+          </a:ln>
+        </p:spPr>
+      </p:sp>
+      <p:pic>
+        <p:nvPicPr>
+          <p:cNvPr id="18" name="Image 0" descr="preencoded.png">    </p:cNvPr>
+          <p:cNvPicPr>
+            <a:picLocks noChangeAspect="1"/>
+          </p:cNvPicPr>
+          <p:nvPr/>
+        </p:nvPicPr>
+        <p:blipFill>
+          <a:blip r:embed="rId1"/>
+          <a:stretch>
+            <a:fillRect/>
+          </a:stretch>
+        </p:blipFill>
+        <p:spPr>
+          <a:xfrm>
+            <a:off x="8245297" y="128016"/>
+            <a:ext cx="201168" cy="201168"/>
+          </a:xfrm>
+          <a:prstGeom prst="rect">
+            <a:avLst/>
+          </a:prstGeom>
+        </p:spPr>
+      </p:pic>
+      <p:sp>
+        <p:nvSpPr>
+          <p:cNvPr id="19" name="Text 16"/>
+          <p:cNvSpPr txBox="1"/>
+          <p:nvPr/>
+        </p:nvSpPr>
+        <p:spPr>
+          <a:xfrm>
+            <a:off x="8501329" y="91440"/>
+            <a:ext cx="3105150" cy="274320"/>
+          </a:xfrm>
+          <a:prstGeom prst="rect">
+            <a:avLst/>
+          </a:prstGeom>
+          <a:noFill/>
+          <a:ln/>
+        </p:spPr>
+        <p:txBody>
+          <a:bodyPr wrap="square" lIns="0" tIns="0" rIns="0" bIns="0" rtlCol="0" anchor="ctr"/>
+          <a:lstStyle/>
+          <a:p>
+            <a:pPr indent="0" marL="0">
+              <a:buNone/>
+            </a:pPr>
+            <a:r>
+              <a:rPr lang="en-US" sz="1100" b="1" dirty="0">
+                <a:solidFill>
+                  <a:srgbClr val="075985"/>
+                </a:solidFill>
+                <a:latin typeface="Calibri" pitchFamily="34" charset="0"/>
+                <a:ea typeface="Calibri" pitchFamily="34" charset="-122"/>
+                <a:cs typeface="Calibri" pitchFamily="34" charset="-120"/>
+              </a:rPr>
+              <a:t>DA COMPRENDERE OGGI</a:t>
+            </a:r>
+            <a:pPr indent="0" marL="0">
+              <a:buNone/>
+            </a:pPr>
+            <a:r>
+              <a:rPr lang="en-US" sz="1100" dirty="0">
+                <a:solidFill>
+                  <a:srgbClr val="075985"/>
+                </a:solidFill>
+                <a:latin typeface="Calibri" pitchFamily="34" charset="0"/>
+                <a:ea typeface="Calibri" pitchFamily="34" charset="-122"/>
+                <a:cs typeface="Calibri" pitchFamily="34" charset="-120"/>
+              </a:rPr>
+              <a:t> · latch e flip-flop</a:t>
+            </a:r>
+            <a:endParaRPr lang="en-US" sz="1100" dirty="0"/>
+          </a:p>
+        </p:txBody>
+      </p:sp>
+      <p:sp>
+        <p:nvSpPr>
           <p:cNvPr id="25" name="Slide Number Placeholder 0"/>
           <p:cNvSpPr>
             <a:spLocks noGrp="1"/>
@@ -4464,9 +5149,59 @@
           </a:ln>
         </p:spPr>
       </p:sp>
+      <p:sp>
+        <p:nvSpPr>
+          <p:cNvPr id="4" name="Shape 2"/>
+          <p:cNvSpPr/>
+          <p:nvPr/>
+        </p:nvSpPr>
+        <p:spPr>
+          <a:xfrm>
+            <a:off x="8117281" y="91440"/>
+            <a:ext cx="3525774" cy="274320"/>
+          </a:xfrm>
+          <a:prstGeom prst="rect">
+            <a:avLst/>
+          </a:prstGeom>
+          <a:solidFill>
+            <a:srgbClr val="E0F2FE"/>
+          </a:solidFill>
+          <a:ln w="12700">
+            <a:solidFill>
+              <a:srgbClr val="0369A1"/>
+            </a:solidFill>
+            <a:prstDash val="solid"/>
+          </a:ln>
+        </p:spPr>
+      </p:sp>
+      <p:sp>
+        <p:nvSpPr>
+          <p:cNvPr id="5" name="Shape 3"/>
+          <p:cNvSpPr/>
+          <p:nvPr/>
+        </p:nvSpPr>
+        <p:spPr>
+          <a:xfrm>
+            <a:off x="8117281" y="91440"/>
+            <a:ext cx="73152" cy="274320"/>
+          </a:xfrm>
+          <a:prstGeom prst="rect">
+            <a:avLst/>
+          </a:prstGeom>
+          <a:solidFill>
+            <a:srgbClr val="0369A1"/>
+          </a:solidFill>
+          <a:ln w="12700">
+            <a:solidFill>
+              <a:srgbClr val="0369A1"/>
+            </a:solidFill>
+            <a:prstDash val="solid"/>
+          </a:ln>
+        </p:spPr>
+      </p:sp>
       <p:pic>
         <p:nvPicPr>
-          <p:cNvPr id="5" name="Image 0" descr="preencoded.png">    </p:cNvPr>
+          <p:cNvPr id="6" name="Image 0" descr="preencoded.png">    </p:cNvPr>
           <p:cNvPicPr>
             <a:picLocks noChangeAspect="1"/>
           </p:cNvPicPr>
@@ -4480,8 +5215,8 @@
         </p:blipFill>
         <p:spPr>
           <a:xfrm>
-            <a:off x="6629400" y="2370572"/>
-            <a:ext cx="4876495" cy="2208296"/>
+            <a:off x="8245297" y="128016"/>
+            <a:ext cx="201168" cy="201168"/>
           </a:xfrm>
           <a:prstGeom prst="rect">
             <a:avLst/>
@@ -4490,14 +5225,14 @@
       </p:pic>
       <p:sp>
         <p:nvSpPr>
-          <p:cNvPr id="6" name="Text 2"/>
+          <p:cNvPr id="7" name="Text 4"/>
           <p:cNvSpPr txBox="1"/>
           <p:nvPr/>
         </p:nvSpPr>
         <p:spPr>
           <a:xfrm>
-            <a:off x="6629400" y="5349240"/>
-            <a:ext cx="4876495" cy="640080"/>
+            <a:off x="8501329" y="91440"/>
+            <a:ext cx="3105150" cy="274320"/>
           </a:xfrm>
           <a:prstGeom prst="rect">
             <a:avLst/>
@@ -4509,18 +5244,95 @@
           <a:bodyPr wrap="square" lIns="0" tIns="0" rIns="0" bIns="0" rtlCol="0" anchor="ctr"/>
           <a:lstStyle/>
           <a:p>
-            <a:pPr algn="ctr" indent="0" marL="0">
+            <a:pPr indent="0" marL="0">
               <a:buNone/>
             </a:pPr>
             <a:r>
-              <a:rPr lang="en-US" sz="1350" i="1" dirty="0">
-                <a:solidFill>
-                  <a:srgbClr val="5B6B78"/>
+              <a:rPr lang="en-US" sz="1100" b="1" dirty="0">
+                <a:solidFill>
+                  <a:srgbClr val="075985"/>
                 </a:solidFill>
                 <a:latin typeface="Calibri" pitchFamily="34" charset="0"/>
                 <a:ea typeface="Calibri" pitchFamily="34" charset="-122"/>
                 <a:cs typeface="Calibri" pitchFamily="34" charset="-120"/>
               </a:rPr>
+              <a:t>DA COMPRENDERE OGGI</a:t>
+            </a:r>
+            <a:pPr indent="0" marL="0">
+              <a:buNone/>
+            </a:pPr>
+            <a:r>
+              <a:rPr lang="en-US" sz="1100" dirty="0">
+                <a:solidFill>
+                  <a:srgbClr val="075985"/>
+                </a:solidFill>
+                <a:latin typeface="Calibri" pitchFamily="34" charset="0"/>
+                <a:ea typeface="Calibri" pitchFamily="34" charset="-122"/>
+                <a:cs typeface="Calibri" pitchFamily="34" charset="-120"/>
+              </a:rPr>
+              <a:t> · latch e flip-flop</a:t>
+            </a:r>
+            <a:endParaRPr lang="en-US" sz="1100" dirty="0"/>
+          </a:p>
+        </p:txBody>
+      </p:sp>
+      <p:pic>
+        <p:nvPicPr>
+          <p:cNvPr id="9" name="Image 1" descr="preencoded.png">    </p:cNvPr>
+          <p:cNvPicPr>
+            <a:picLocks noChangeAspect="1"/>
+          </p:cNvPicPr>
+          <p:nvPr/>
+        </p:nvPicPr>
+        <p:blipFill>
+          <a:blip r:embed="rId2"/>
+          <a:stretch>
+            <a:fillRect/>
+          </a:stretch>
+        </p:blipFill>
+        <p:spPr>
+          <a:xfrm>
+            <a:off x="6629400" y="2370572"/>
+            <a:ext cx="4876495" cy="2208296"/>
+          </a:xfrm>
+          <a:prstGeom prst="rect">
+            <a:avLst/>
+          </a:prstGeom>
+        </p:spPr>
+      </p:pic>
+      <p:sp>
+        <p:nvSpPr>
+          <p:cNvPr id="10" name="Text 5"/>
+          <p:cNvSpPr txBox="1"/>
+          <p:nvPr/>
+        </p:nvSpPr>
+        <p:spPr>
+          <a:xfrm>
+            <a:off x="6629400" y="5349240"/>
+            <a:ext cx="4876495" cy="640080"/>
+          </a:xfrm>
+          <a:prstGeom prst="rect">
+            <a:avLst/>
+          </a:prstGeom>
+          <a:noFill/>
+          <a:ln/>
+        </p:spPr>
+        <p:txBody>
+          <a:bodyPr wrap="square" lIns="0" tIns="0" rIns="0" bIns="0" rtlCol="0" anchor="ctr"/>
+          <a:lstStyle/>
+          <a:p>
+            <a:pPr algn="ctr" indent="0" marL="0">
+              <a:buNone/>
+            </a:pPr>
+            <a:r>
+              <a:rPr lang="en-US" sz="1350" i="1" dirty="0">
+                <a:solidFill>
+                  <a:srgbClr val="5B6B78"/>
+                </a:solidFill>
+                <a:latin typeface="Calibri" pitchFamily="34" charset="0"/>
+                <a:ea typeface="Calibri" pitchFamily="34" charset="-122"/>
+                <a:cs typeface="Calibri" pitchFamily="34" charset="-120"/>
+              </a:rPr>
               <a:t>Un latch SR sincrono: gli ingressi di eccitazione passano per due porte AND controllate da CK</a:t>
             </a:r>
             <a:endParaRPr lang="en-US" sz="1350" dirty="0"/>
@@ -4529,7 +5341,7 @@
       </p:sp>
       <p:sp>
         <p:nvSpPr>
-          <p:cNvPr id="7" name="Shape 3"/>
+          <p:cNvPr id="11" name="Shape 6"/>
           <p:cNvSpPr/>
           <p:nvPr/>
         </p:nvSpPr>
@@ -4554,7 +5366,7 @@
       </p:sp>
       <p:sp>
         <p:nvSpPr>
-          <p:cNvPr id="8" name="Text 4"/>
+          <p:cNvPr id="12" name="Text 7"/>
           <p:cNvSpPr txBox="1"/>
           <p:nvPr/>
         </p:nvSpPr>
@@ -4596,7 +5408,7 @@
       </p:sp>
       <p:sp>
         <p:nvSpPr>
-          <p:cNvPr id="9" name="Shape 5"/>
+          <p:cNvPr id="13" name="Shape 8"/>
           <p:cNvSpPr/>
           <p:nvPr/>
         </p:nvSpPr>
@@ -4621,7 +5433,7 @@
       </p:sp>
       <p:sp>
         <p:nvSpPr>
-          <p:cNvPr id="10" name="Text 6"/>
+          <p:cNvPr id="14" name="Text 9"/>
           <p:cNvSpPr txBox="1"/>
           <p:nvPr/>
         </p:nvSpPr>
@@ -4663,7 +5475,7 @@
       </p:sp>
       <p:sp>
         <p:nvSpPr>
-          <p:cNvPr id="11" name="Shape 7"/>
+          <p:cNvPr id="15" name="Shape 10"/>
           <p:cNvSpPr/>
           <p:nvPr/>
         </p:nvSpPr>
@@ -4688,7 +5500,7 @@
       </p:sp>
       <p:sp>
         <p:nvSpPr>
-          <p:cNvPr id="12" name="Text 8"/>
+          <p:cNvPr id="16" name="Text 11"/>
           <p:cNvSpPr txBox="1"/>
           <p:nvPr/>
         </p:nvSpPr>
@@ -4770,7 +5582,7 @@
       </p:sp>
       <p:sp>
         <p:nvSpPr>
-          <p:cNvPr id="13" name="Shape 9"/>
+          <p:cNvPr id="17" name="Shape 12"/>
           <p:cNvSpPr/>
           <p:nvPr/>
         </p:nvSpPr>
@@ -4795,7 +5607,7 @@
       </p:sp>
       <p:sp>
         <p:nvSpPr>
-          <p:cNvPr id="14" name="Text 10"/>
+          <p:cNvPr id="18" name="Text 13"/>
           <p:cNvSpPr txBox="1"/>
           <p:nvPr/>
         </p:nvSpPr>
@@ -6348,6 +7160,133 @@
       </p:sp>
       <p:sp>
         <p:nvSpPr>
+          <p:cNvPr id="5" name="Shape 2"/>
+          <p:cNvSpPr/>
+          <p:nvPr/>
+        </p:nvSpPr>
+        <p:spPr>
+          <a:xfrm>
+            <a:off x="8117281" y="91440"/>
+            <a:ext cx="3525774" cy="274320"/>
+          </a:xfrm>
+          <a:prstGeom prst="rect">
+            <a:avLst/>
+          </a:prstGeom>
+          <a:solidFill>
+            <a:srgbClr val="E0F2FE"/>
+          </a:solidFill>
+          <a:ln w="12700">
+            <a:solidFill>
+              <a:srgbClr val="0369A1"/>
+            </a:solidFill>
+            <a:prstDash val="solid"/>
+          </a:ln>
+        </p:spPr>
+      </p:sp>
+      <p:sp>
+        <p:nvSpPr>
+          <p:cNvPr id="6" name="Shape 3"/>
+          <p:cNvSpPr/>
+          <p:nvPr/>
+        </p:nvSpPr>
+        <p:spPr>
+          <a:xfrm>
+            <a:off x="8117281" y="91440"/>
+            <a:ext cx="73152" cy="274320"/>
+          </a:xfrm>
+          <a:prstGeom prst="rect">
+            <a:avLst/>
+          </a:prstGeom>
+          <a:solidFill>
+            <a:srgbClr val="0369A1"/>
+          </a:solidFill>
+          <a:ln w="12700">
+            <a:solidFill>
+              <a:srgbClr val="0369A1"/>
+            </a:solidFill>
+            <a:prstDash val="solid"/>
+          </a:ln>
+        </p:spPr>
+      </p:sp>
+      <p:pic>
+        <p:nvPicPr>
+          <p:cNvPr id="7" name="Image 0" descr="preencoded.png">    </p:cNvPr>
+          <p:cNvPicPr>
+            <a:picLocks noChangeAspect="1"/>
+          </p:cNvPicPr>
+          <p:nvPr/>
+        </p:nvPicPr>
+        <p:blipFill>
+          <a:blip r:embed="rId1"/>
+          <a:stretch>
+            <a:fillRect/>
+          </a:stretch>
+        </p:blipFill>
+        <p:spPr>
+          <a:xfrm>
+            <a:off x="8245297" y="128016"/>
+            <a:ext cx="201168" cy="201168"/>
+          </a:xfrm>
+          <a:prstGeom prst="rect">
+            <a:avLst/>
+          </a:prstGeom>
+        </p:spPr>
+      </p:pic>
+      <p:sp>
+        <p:nvSpPr>
+          <p:cNvPr id="8" name="Text 4"/>
+          <p:cNvSpPr txBox="1"/>
+          <p:nvPr/>
+        </p:nvSpPr>
+        <p:spPr>
+          <a:xfrm>
+            <a:off x="8501329" y="91440"/>
+            <a:ext cx="3105150" cy="274320"/>
+          </a:xfrm>
+          <a:prstGeom prst="rect">
+            <a:avLst/>
+          </a:prstGeom>
+          <a:noFill/>
+          <a:ln/>
+        </p:spPr>
+        <p:txBody>
+          <a:bodyPr wrap="square" lIns="0" tIns="0" rIns="0" bIns="0" rtlCol="0" anchor="ctr"/>
+          <a:lstStyle/>
+          <a:p>
+            <a:pPr indent="0" marL="0">
+              <a:buNone/>
+            </a:pPr>
+            <a:r>
+              <a:rPr lang="en-US" sz="1100" b="1" dirty="0">
+                <a:solidFill>
+                  <a:srgbClr val="075985"/>
+                </a:solidFill>
+                <a:latin typeface="Calibri" pitchFamily="34" charset="0"/>
+                <a:ea typeface="Calibri" pitchFamily="34" charset="-122"/>
+                <a:cs typeface="Calibri" pitchFamily="34" charset="-120"/>
+              </a:rPr>
+              <a:t>DA COMPRENDERE OGGI</a:t>
+            </a:r>
+            <a:pPr indent="0" marL="0">
+              <a:buNone/>
+            </a:pPr>
+            <a:r>
+              <a:rPr lang="en-US" sz="1100" dirty="0">
+                <a:solidFill>
+                  <a:srgbClr val="075985"/>
+                </a:solidFill>
+                <a:latin typeface="Calibri" pitchFamily="34" charset="0"/>
+                <a:ea typeface="Calibri" pitchFamily="34" charset="-122"/>
+                <a:cs typeface="Calibri" pitchFamily="34" charset="-120"/>
+              </a:rPr>
+              <a:t> · latch e flip-flop</a:t>
+            </a:r>
+            <a:endParaRPr lang="en-US" sz="1100" dirty="0"/>
+          </a:p>
+        </p:txBody>
+      </p:sp>
+      <p:sp>
+        <p:nvSpPr>
           <p:cNvPr id="25" name="Slide Number Placeholder 0"/>
           <p:cNvSpPr>
             <a:spLocks noGrp="1"/>
@@ -7363,6 +8302,133 @@
       </p:sp>
       <p:sp>
         <p:nvSpPr>
+          <p:cNvPr id="28" name="Shape 26"/>
+          <p:cNvSpPr/>
+          <p:nvPr/>
+        </p:nvSpPr>
+        <p:spPr>
+          <a:xfrm>
+            <a:off x="8117281" y="91440"/>
+            <a:ext cx="3525774" cy="274320"/>
+          </a:xfrm>
+          <a:prstGeom prst="rect">
+            <a:avLst/>
+          </a:prstGeom>
+          <a:solidFill>
+            <a:srgbClr val="E0F2FE"/>
+          </a:solidFill>
+          <a:ln w="12700">
+            <a:solidFill>
+              <a:srgbClr val="0369A1"/>
+            </a:solidFill>
+            <a:prstDash val="solid"/>
+          </a:ln>
+        </p:spPr>
+      </p:sp>
+      <p:sp>
+        <p:nvSpPr>
+          <p:cNvPr id="29" name="Shape 27"/>
+          <p:cNvSpPr/>
+          <p:nvPr/>
+        </p:nvSpPr>
+        <p:spPr>
+          <a:xfrm>
+            <a:off x="8117281" y="91440"/>
+            <a:ext cx="73152" cy="274320"/>
+          </a:xfrm>
+          <a:prstGeom prst="rect">
+            <a:avLst/>
+          </a:prstGeom>
+          <a:solidFill>
+            <a:srgbClr val="0369A1"/>
+          </a:solidFill>
+          <a:ln w="12700">
+            <a:solidFill>
+              <a:srgbClr val="0369A1"/>
+            </a:solidFill>
+            <a:prstDash val="solid"/>
+          </a:ln>
+        </p:spPr>
+      </p:sp>
+      <p:pic>
+        <p:nvPicPr>
+          <p:cNvPr id="30" name="Image 0" descr="preencoded.png">    </p:cNvPr>
+          <p:cNvPicPr>
+            <a:picLocks noChangeAspect="1"/>
+          </p:cNvPicPr>
+          <p:nvPr/>
+        </p:nvPicPr>
+        <p:blipFill>
+          <a:blip r:embed="rId1"/>
+          <a:stretch>
+            <a:fillRect/>
+          </a:stretch>
+        </p:blipFill>
+        <p:spPr>
+          <a:xfrm>
+            <a:off x="8245297" y="128016"/>
+            <a:ext cx="201168" cy="201168"/>
+          </a:xfrm>
+          <a:prstGeom prst="rect">
+            <a:avLst/>
+          </a:prstGeom>
+        </p:spPr>
+      </p:pic>
+      <p:sp>
+        <p:nvSpPr>
+          <p:cNvPr id="31" name="Text 28"/>
+          <p:cNvSpPr txBox="1"/>
+          <p:nvPr/>
+        </p:nvSpPr>
+        <p:spPr>
+          <a:xfrm>
+            <a:off x="8501329" y="91440"/>
+            <a:ext cx="3105150" cy="274320"/>
+          </a:xfrm>
+          <a:prstGeom prst="rect">
+            <a:avLst/>
+          </a:prstGeom>
+          <a:noFill/>
+          <a:ln/>
+        </p:spPr>
+        <p:txBody>
+          <a:bodyPr wrap="square" lIns="0" tIns="0" rIns="0" bIns="0" rtlCol="0" anchor="ctr"/>
+          <a:lstStyle/>
+          <a:p>
+            <a:pPr indent="0" marL="0">
+              <a:buNone/>
+            </a:pPr>
+            <a:r>
+              <a:rPr lang="en-US" sz="1100" b="1" dirty="0">
+                <a:solidFill>
+                  <a:srgbClr val="075985"/>
+                </a:solidFill>
+                <a:latin typeface="Calibri" pitchFamily="34" charset="0"/>
+                <a:ea typeface="Calibri" pitchFamily="34" charset="-122"/>
+                <a:cs typeface="Calibri" pitchFamily="34" charset="-120"/>
+              </a:rPr>
+              <a:t>DA COMPRENDERE OGGI</a:t>
+            </a:r>
+            <a:pPr indent="0" marL="0">
+              <a:buNone/>
+            </a:pPr>
+            <a:r>
+              <a:rPr lang="en-US" sz="1100" dirty="0">
+                <a:solidFill>
+                  <a:srgbClr val="075985"/>
+                </a:solidFill>
+                <a:latin typeface="Calibri" pitchFamily="34" charset="0"/>
+                <a:ea typeface="Calibri" pitchFamily="34" charset="-122"/>
+                <a:cs typeface="Calibri" pitchFamily="34" charset="-120"/>
+              </a:rPr>
+              <a:t> · latch e flip-flop</a:t>
+            </a:r>
+            <a:endParaRPr lang="en-US" sz="1100" dirty="0"/>
+          </a:p>
+        </p:txBody>
+      </p:sp>
+      <p:sp>
+        <p:nvSpPr>
           <p:cNvPr id="25" name="Slide Number Placeholder 0"/>
           <p:cNvSpPr>
             <a:spLocks noGrp="1"/>
@@ -7502,9 +8568,59 @@
           </a:ln>
         </p:spPr>
       </p:sp>
+      <p:sp>
+        <p:nvSpPr>
+          <p:cNvPr id="4" name="Shape 2"/>
+          <p:cNvSpPr/>
+          <p:nvPr/>
+        </p:nvSpPr>
+        <p:spPr>
+          <a:xfrm>
+            <a:off x="8117281" y="91440"/>
+            <a:ext cx="3525774" cy="274320"/>
+          </a:xfrm>
+          <a:prstGeom prst="rect">
+            <a:avLst/>
+          </a:prstGeom>
+          <a:solidFill>
+            <a:srgbClr val="E0F2FE"/>
+          </a:solidFill>
+          <a:ln w="12700">
+            <a:solidFill>
+              <a:srgbClr val="0369A1"/>
+            </a:solidFill>
+            <a:prstDash val="solid"/>
+          </a:ln>
+        </p:spPr>
+      </p:sp>
+      <p:sp>
+        <p:nvSpPr>
+          <p:cNvPr id="5" name="Shape 3"/>
+          <p:cNvSpPr/>
+          <p:nvPr/>
+        </p:nvSpPr>
+        <p:spPr>
+          <a:xfrm>
+            <a:off x="8117281" y="91440"/>
+            <a:ext cx="73152" cy="274320"/>
+          </a:xfrm>
+          <a:prstGeom prst="rect">
+            <a:avLst/>
+          </a:prstGeom>
+          <a:solidFill>
+            <a:srgbClr val="0369A1"/>
+          </a:solidFill>
+          <a:ln w="12700">
+            <a:solidFill>
+              <a:srgbClr val="0369A1"/>
+            </a:solidFill>
+            <a:prstDash val="solid"/>
+          </a:ln>
+        </p:spPr>
+      </p:sp>
       <p:pic>
         <p:nvPicPr>
-          <p:cNvPr id="5" name="Image 0" descr="preencoded.png">    </p:cNvPr>
+          <p:cNvPr id="6" name="Image 0" descr="preencoded.png">    </p:cNvPr>
           <p:cNvPicPr>
             <a:picLocks noChangeAspect="1"/>
           </p:cNvPicPr>
@@ -7518,6 +8634,83 @@
         </p:blipFill>
         <p:spPr>
           <a:xfrm>
+            <a:off x="8245297" y="128016"/>
+            <a:ext cx="201168" cy="201168"/>
+          </a:xfrm>
+          <a:prstGeom prst="rect">
+            <a:avLst/>
+          </a:prstGeom>
+        </p:spPr>
+      </p:pic>
+      <p:sp>
+        <p:nvSpPr>
+          <p:cNvPr id="7" name="Text 4"/>
+          <p:cNvSpPr txBox="1"/>
+          <p:nvPr/>
+        </p:nvSpPr>
+        <p:spPr>
+          <a:xfrm>
+            <a:off x="8501329" y="91440"/>
+            <a:ext cx="3105150" cy="274320"/>
+          </a:xfrm>
+          <a:prstGeom prst="rect">
+            <a:avLst/>
+          </a:prstGeom>
+          <a:noFill/>
+          <a:ln/>
+        </p:spPr>
+        <p:txBody>
+          <a:bodyPr wrap="square" lIns="0" tIns="0" rIns="0" bIns="0" rtlCol="0" anchor="ctr"/>
+          <a:lstStyle/>
+          <a:p>
+            <a:pPr indent="0" marL="0">
+              <a:buNone/>
+            </a:pPr>
+            <a:r>
+              <a:rPr lang="en-US" sz="1100" b="1" dirty="0">
+                <a:solidFill>
+                  <a:srgbClr val="075985"/>
+                </a:solidFill>
+                <a:latin typeface="Calibri" pitchFamily="34" charset="0"/>
+                <a:ea typeface="Calibri" pitchFamily="34" charset="-122"/>
+                <a:cs typeface="Calibri" pitchFamily="34" charset="-120"/>
+              </a:rPr>
+              <a:t>DA COMPRENDERE OGGI</a:t>
+            </a:r>
+            <a:pPr indent="0" marL="0">
+              <a:buNone/>
+            </a:pPr>
+            <a:r>
+              <a:rPr lang="en-US" sz="1100" dirty="0">
+                <a:solidFill>
+                  <a:srgbClr val="075985"/>
+                </a:solidFill>
+                <a:latin typeface="Calibri" pitchFamily="34" charset="0"/>
+                <a:ea typeface="Calibri" pitchFamily="34" charset="-122"/>
+                <a:cs typeface="Calibri" pitchFamily="34" charset="-120"/>
+              </a:rPr>
+              <a:t> · latch e flip-flop</a:t>
+            </a:r>
+            <a:endParaRPr lang="en-US" sz="1100" dirty="0"/>
+          </a:p>
+        </p:txBody>
+      </p:sp>
+      <p:pic>
+        <p:nvPicPr>
+          <p:cNvPr id="9" name="Image 1" descr="preencoded.png">    </p:cNvPr>
+          <p:cNvPicPr>
+            <a:picLocks noChangeAspect="1"/>
+          </p:cNvPicPr>
+          <p:nvPr/>
+        </p:nvPicPr>
+        <p:blipFill>
+          <a:blip r:embed="rId2"/>
+          <a:stretch>
+            <a:fillRect/>
+          </a:stretch>
+        </p:blipFill>
+        <p:spPr>
+          <a:xfrm>
             <a:off x="775328" y="1463040"/>
             <a:ext cx="10641040" cy="3154680"/>
           </a:xfrm>
@@ -7528,7 +8721,7 @@
       </p:pic>
       <p:sp>
         <p:nvSpPr>
-          <p:cNvPr id="6" name="Shape 2"/>
+          <p:cNvPr id="10" name="Shape 5"/>
           <p:cNvSpPr/>
           <p:nvPr/>
         </p:nvSpPr>
@@ -7553,7 +8746,7 @@
       </p:sp>
       <p:sp>
         <p:nvSpPr>
-          <p:cNvPr id="7" name="Text 3"/>
+          <p:cNvPr id="11" name="Text 6"/>
           <p:cNvSpPr txBox="1"/>
           <p:nvPr/>
         </p:nvSpPr>
@@ -7595,7 +8788,7 @@
       </p:sp>
       <p:sp>
         <p:nvSpPr>
-          <p:cNvPr id="8" name="Shape 4"/>
+          <p:cNvPr id="12" name="Shape 7"/>
           <p:cNvSpPr/>
           <p:nvPr/>
         </p:nvSpPr>
@@ -7620,7 +8813,7 @@
       </p:sp>
       <p:sp>
         <p:nvSpPr>
-          <p:cNvPr id="9" name="Text 5"/>
+          <p:cNvPr id="13" name="Text 8"/>
           <p:cNvSpPr txBox="1"/>
           <p:nvPr/>
         </p:nvSpPr>
@@ -7662,7 +8855,7 @@
       </p:sp>
       <p:sp>
         <p:nvSpPr>
-          <p:cNvPr id="10" name="Shape 6"/>
+          <p:cNvPr id="14" name="Shape 9"/>
           <p:cNvSpPr/>
           <p:nvPr/>
         </p:nvSpPr>
@@ -7687,7 +8880,7 @@
       </p:sp>
       <p:sp>
         <p:nvSpPr>
-          <p:cNvPr id="11" name="Text 7"/>
+          <p:cNvPr id="15" name="Text 10"/>
           <p:cNvSpPr txBox="1"/>
           <p:nvPr/>
         </p:nvSpPr>
@@ -9082,6 +10275,133 @@
               <a:t>I multiplexer della Lezione 11 selezionano i registri da leggere</a:t>
             </a:r>
             <a:endParaRPr lang="en-US" sz="1500" dirty="0"/>
+          </a:p>
+        </p:txBody>
+      </p:sp>
+      <p:sp>
+        <p:nvSpPr>
+          <p:cNvPr id="40" name="Shape 38"/>
+          <p:cNvSpPr/>
+          <p:nvPr/>
+        </p:nvSpPr>
+        <p:spPr>
+          <a:xfrm>
+            <a:off x="7592009" y="91440"/>
+            <a:ext cx="4051046" cy="274320"/>
+          </a:xfrm>
+          <a:prstGeom prst="rect">
+            <a:avLst/>
+          </a:prstGeom>
+          <a:solidFill>
+            <a:srgbClr val="E0F2FE"/>
+          </a:solidFill>
+          <a:ln w="12700">
+            <a:solidFill>
+              <a:srgbClr val="0369A1"/>
+            </a:solidFill>
+            <a:prstDash val="solid"/>
+          </a:ln>
+        </p:spPr>
+      </p:sp>
+      <p:sp>
+        <p:nvSpPr>
+          <p:cNvPr id="41" name="Shape 39"/>
+          <p:cNvSpPr/>
+          <p:nvPr/>
+        </p:nvSpPr>
+        <p:spPr>
+          <a:xfrm>
+            <a:off x="7592009" y="91440"/>
+            <a:ext cx="73152" cy="274320"/>
+          </a:xfrm>
+          <a:prstGeom prst="rect">
+            <a:avLst/>
+          </a:prstGeom>
+          <a:solidFill>
+            <a:srgbClr val="0369A1"/>
+          </a:solidFill>
+          <a:ln w="12700">
+            <a:solidFill>
+              <a:srgbClr val="0369A1"/>
+            </a:solidFill>
+            <a:prstDash val="solid"/>
+          </a:ln>
+        </p:spPr>
+      </p:sp>
+      <p:pic>
+        <p:nvPicPr>
+          <p:cNvPr id="42" name="Image 0" descr="preencoded.png">    </p:cNvPr>
+          <p:cNvPicPr>
+            <a:picLocks noChangeAspect="1"/>
+          </p:cNvPicPr>
+          <p:nvPr/>
+        </p:nvPicPr>
+        <p:blipFill>
+          <a:blip r:embed="rId1"/>
+          <a:stretch>
+            <a:fillRect/>
+          </a:stretch>
+        </p:blipFill>
+        <p:spPr>
+          <a:xfrm>
+            <a:off x="7720025" y="128016"/>
+            <a:ext cx="201168" cy="201168"/>
+          </a:xfrm>
+          <a:prstGeom prst="rect">
+            <a:avLst/>
+          </a:prstGeom>
+        </p:spPr>
+      </p:pic>
+      <p:sp>
+        <p:nvSpPr>
+          <p:cNvPr id="43" name="Text 40"/>
+          <p:cNvSpPr txBox="1"/>
+          <p:nvPr/>
+        </p:nvSpPr>
+        <p:spPr>
+          <a:xfrm>
+            <a:off x="7976057" y="91440"/>
+            <a:ext cx="3630422" cy="274320"/>
+          </a:xfrm>
+          <a:prstGeom prst="rect">
+            <a:avLst/>
+          </a:prstGeom>
+          <a:noFill/>
+          <a:ln/>
+        </p:spPr>
+        <p:txBody>
+          <a:bodyPr wrap="square" lIns="0" tIns="0" rIns="0" bIns="0" rtlCol="0" anchor="ctr"/>
+          <a:lstStyle/>
+          <a:p>
+            <a:pPr indent="0" marL="0">
+              <a:buNone/>
+            </a:pPr>
+            <a:r>
+              <a:rPr lang="en-US" sz="1100" b="1" dirty="0">
+                <a:solidFill>
+                  <a:srgbClr val="075985"/>
+                </a:solidFill>
+                <a:latin typeface="Calibri" pitchFamily="34" charset="0"/>
+                <a:ea typeface="Calibri" pitchFamily="34" charset="-122"/>
+                <a:cs typeface="Calibri" pitchFamily="34" charset="-120"/>
+              </a:rPr>
+              <a:t>DA COMPRENDERE OGGI</a:t>
+            </a:r>
+            <a:pPr indent="0" marL="0">
+              <a:buNone/>
+            </a:pPr>
+            <a:r>
+              <a:rPr lang="en-US" sz="1100" dirty="0">
+                <a:solidFill>
+                  <a:srgbClr val="075985"/>
+                </a:solidFill>
+                <a:latin typeface="Calibri" pitchFamily="34" charset="0"/>
+                <a:ea typeface="Calibri" pitchFamily="34" charset="-122"/>
+                <a:cs typeface="Calibri" pitchFamily="34" charset="-120"/>
+              </a:rPr>
+              <a:t> · i registri come flip-flop</a:t>
+            </a:r>
+            <a:endParaRPr lang="en-US" sz="1100" dirty="0"/>
           </a:p>
         </p:txBody>
       </p:sp>
@@ -14894,9 +16214,59 @@
           </a:ln>
         </p:spPr>
       </p:sp>
+      <p:sp>
+        <p:nvSpPr>
+          <p:cNvPr id="4" name="Shape 2"/>
+          <p:cNvSpPr/>
+          <p:nvPr/>
+        </p:nvSpPr>
+        <p:spPr>
+          <a:xfrm>
+            <a:off x="8708212" y="91440"/>
+            <a:ext cx="2934843" cy="274320"/>
+          </a:xfrm>
+          <a:prstGeom prst="rect">
+            <a:avLst/>
+          </a:prstGeom>
+          <a:solidFill>
+            <a:srgbClr val="E0F2FE"/>
+          </a:solidFill>
+          <a:ln w="12700">
+            <a:solidFill>
+              <a:srgbClr val="0369A1"/>
+            </a:solidFill>
+            <a:prstDash val="solid"/>
+          </a:ln>
+        </p:spPr>
+      </p:sp>
+      <p:sp>
+        <p:nvSpPr>
+          <p:cNvPr id="5" name="Shape 3"/>
+          <p:cNvSpPr/>
+          <p:nvPr/>
+        </p:nvSpPr>
+        <p:spPr>
+          <a:xfrm>
+            <a:off x="8708212" y="91440"/>
+            <a:ext cx="73152" cy="274320"/>
+          </a:xfrm>
+          <a:prstGeom prst="rect">
+            <a:avLst/>
+          </a:prstGeom>
+          <a:solidFill>
+            <a:srgbClr val="0369A1"/>
+          </a:solidFill>
+          <a:ln w="12700">
+            <a:solidFill>
+              <a:srgbClr val="0369A1"/>
+            </a:solidFill>
+            <a:prstDash val="solid"/>
+          </a:ln>
+        </p:spPr>
+      </p:sp>
       <p:pic>
         <p:nvPicPr>
-          <p:cNvPr id="5" name="Image 0" descr="preencoded.png">    </p:cNvPr>
+          <p:cNvPr id="6" name="Image 0" descr="preencoded.png">    </p:cNvPr>
           <p:cNvPicPr>
             <a:picLocks noChangeAspect="1"/>
           </p:cNvPicPr>
@@ -14910,6 +16280,83 @@
         </p:blipFill>
         <p:spPr>
           <a:xfrm>
+            <a:off x="8836228" y="128016"/>
+            <a:ext cx="201168" cy="201168"/>
+          </a:xfrm>
+          <a:prstGeom prst="rect">
+            <a:avLst/>
+          </a:prstGeom>
+        </p:spPr>
+      </p:pic>
+      <p:sp>
+        <p:nvSpPr>
+          <p:cNvPr id="7" name="Text 4"/>
+          <p:cNvSpPr txBox="1"/>
+          <p:nvPr/>
+        </p:nvSpPr>
+        <p:spPr>
+          <a:xfrm>
+            <a:off x="9092260" y="91440"/>
+            <a:ext cx="2514219" cy="274320"/>
+          </a:xfrm>
+          <a:prstGeom prst="rect">
+            <a:avLst/>
+          </a:prstGeom>
+          <a:noFill/>
+          <a:ln/>
+        </p:spPr>
+        <p:txBody>
+          <a:bodyPr wrap="square" lIns="0" tIns="0" rIns="0" bIns="0" rtlCol="0" anchor="ctr"/>
+          <a:lstStyle/>
+          <a:p>
+            <a:pPr indent="0" marL="0">
+              <a:buNone/>
+            </a:pPr>
+            <a:r>
+              <a:rPr lang="en-US" sz="1100" b="1" dirty="0">
+                <a:solidFill>
+                  <a:srgbClr val="075985"/>
+                </a:solidFill>
+                <a:latin typeface="Calibri" pitchFamily="34" charset="0"/>
+                <a:ea typeface="Calibri" pitchFamily="34" charset="-122"/>
+                <a:cs typeface="Calibri" pitchFamily="34" charset="-120"/>
+              </a:rPr>
+              <a:t>DA COMPRENDERE OGGI</a:t>
+            </a:r>
+            <a:pPr indent="0" marL="0">
+              <a:buNone/>
+            </a:pPr>
+            <a:r>
+              <a:rPr lang="en-US" sz="1100" dirty="0">
+                <a:solidFill>
+                  <a:srgbClr val="075985"/>
+                </a:solidFill>
+                <a:latin typeface="Calibri" pitchFamily="34" charset="0"/>
+                <a:ea typeface="Calibri" pitchFamily="34" charset="-122"/>
+                <a:cs typeface="Calibri" pitchFamily="34" charset="-120"/>
+              </a:rPr>
+              <a:t> · il clock</a:t>
+            </a:r>
+            <a:endParaRPr lang="en-US" sz="1100" dirty="0"/>
+          </a:p>
+        </p:txBody>
+      </p:sp>
+      <p:pic>
+        <p:nvPicPr>
+          <p:cNvPr id="9" name="Image 1" descr="preencoded.png">    </p:cNvPr>
+          <p:cNvPicPr>
+            <a:picLocks noChangeAspect="1"/>
+          </p:cNvPicPr>
+          <p:nvPr/>
+        </p:nvPicPr>
+        <p:blipFill>
+          <a:blip r:embed="rId2"/>
+          <a:stretch>
+            <a:fillRect/>
+          </a:stretch>
+        </p:blipFill>
+        <p:spPr>
+          <a:xfrm>
             <a:off x="685800" y="1851799"/>
             <a:ext cx="6400800" cy="2148562"/>
           </a:xfrm>
@@ -14920,7 +16367,7 @@
       </p:pic>
       <p:sp>
         <p:nvSpPr>
-          <p:cNvPr id="6" name="Shape 2"/>
+          <p:cNvPr id="10" name="Shape 5"/>
           <p:cNvSpPr/>
           <p:nvPr/>
         </p:nvSpPr>
@@ -14945,7 +16392,7 @@
       </p:sp>
       <p:sp>
         <p:nvSpPr>
-          <p:cNvPr id="7" name="Text 3"/>
+          <p:cNvPr id="11" name="Text 6"/>
           <p:cNvSpPr txBox="1"/>
           <p:nvPr/>
         </p:nvSpPr>
@@ -14987,7 +16434,7 @@
       </p:sp>
       <p:sp>
         <p:nvSpPr>
-          <p:cNvPr id="8" name="Shape 4"/>
+          <p:cNvPr id="12" name="Shape 7"/>
           <p:cNvSpPr/>
           <p:nvPr/>
         </p:nvSpPr>
@@ -15012,7 +16459,7 @@
       </p:sp>
       <p:sp>
         <p:nvSpPr>
-          <p:cNvPr id="9" name="Text 5"/>
+          <p:cNvPr id="13" name="Text 8"/>
           <p:cNvSpPr txBox="1"/>
           <p:nvPr/>
         </p:nvSpPr>
@@ -15054,7 +16501,7 @@
       </p:sp>
       <p:sp>
         <p:nvSpPr>
-          <p:cNvPr id="10" name="Shape 6"/>
+          <p:cNvPr id="14" name="Shape 9"/>
           <p:cNvSpPr/>
           <p:nvPr/>
         </p:nvSpPr>
@@ -15079,7 +16526,7 @@
       </p:sp>
       <p:sp>
         <p:nvSpPr>
-          <p:cNvPr id="11" name="Text 7"/>
+          <p:cNvPr id="15" name="Text 10"/>
           <p:cNvSpPr txBox="1"/>
           <p:nvPr/>
         </p:nvSpPr>
@@ -15121,7 +16568,7 @@
       </p:sp>
       <p:sp>
         <p:nvSpPr>
-          <p:cNvPr id="12" name="Shape 8"/>
+          <p:cNvPr id="16" name="Shape 11"/>
           <p:cNvSpPr/>
           <p:nvPr/>
         </p:nvSpPr>
@@ -15146,7 +16593,7 @@
       </p:sp>
       <p:sp>
         <p:nvSpPr>
-          <p:cNvPr id="13" name="Text 9"/>
+          <p:cNvPr id="17" name="Text 12"/>
           <p:cNvSpPr txBox="1"/>
           <p:nvPr/>
         </p:nvSpPr>
@@ -15188,7 +16635,7 @@
       </p:sp>
       <p:sp>
         <p:nvSpPr>
-          <p:cNvPr id="14" name="Shape 10"/>
+          <p:cNvPr id="18" name="Shape 13"/>
           <p:cNvSpPr/>
           <p:nvPr/>
         </p:nvSpPr>
@@ -15213,7 +16660,7 @@
       </p:sp>
       <p:sp>
         <p:nvSpPr>
-          <p:cNvPr id="15" name="Text 11"/>
+          <p:cNvPr id="19" name="Text 14"/>
           <p:cNvSpPr txBox="1"/>
           <p:nvPr/>
         </p:nvSpPr>
@@ -15255,7 +16702,7 @@
       </p:sp>
       <p:sp>
         <p:nvSpPr>
-          <p:cNvPr id="16" name="Shape 12"/>
+          <p:cNvPr id="20" name="Shape 15"/>
           <p:cNvSpPr/>
           <p:nvPr/>
         </p:nvSpPr>
@@ -15280,7 +16727,7 @@
       </p:sp>
       <p:sp>
         <p:nvSpPr>
-          <p:cNvPr id="17" name="Text 13"/>
+          <p:cNvPr id="21" name="Text 16"/>
           <p:cNvSpPr txBox="1"/>
           <p:nvPr/>
         </p:nvSpPr>
@@ -15896,6 +17343,133 @@
       </p:sp>
       <p:sp>
         <p:nvSpPr>
+          <p:cNvPr id="16" name="Shape 14"/>
+          <p:cNvSpPr/>
+          <p:nvPr/>
+        </p:nvSpPr>
+        <p:spPr>
+          <a:xfrm>
+            <a:off x="7723327" y="91440"/>
+            <a:ext cx="3919728" cy="274320"/>
+          </a:xfrm>
+          <a:prstGeom prst="rect">
+            <a:avLst/>
+          </a:prstGeom>
+          <a:solidFill>
+            <a:srgbClr val="E0F2FE"/>
+          </a:solidFill>
+          <a:ln w="12700">
+            <a:solidFill>
+              <a:srgbClr val="0369A1"/>
+            </a:solidFill>
+            <a:prstDash val="solid"/>
+          </a:ln>
+        </p:spPr>
+      </p:sp>
+      <p:sp>
+        <p:nvSpPr>
+          <p:cNvPr id="17" name="Shape 15"/>
+          <p:cNvSpPr/>
+          <p:nvPr/>
+        </p:nvSpPr>
+        <p:spPr>
+          <a:xfrm>
+            <a:off x="7723327" y="91440"/>
+            <a:ext cx="73152" cy="274320"/>
+          </a:xfrm>
+          <a:prstGeom prst="rect">
+            <a:avLst/>
+          </a:prstGeom>
+          <a:solidFill>
+            <a:srgbClr val="0369A1"/>
+          </a:solidFill>
+          <a:ln w="12700">
+            <a:solidFill>
+              <a:srgbClr val="0369A1"/>
+            </a:solidFill>
+            <a:prstDash val="solid"/>
+          </a:ln>
+        </p:spPr>
+      </p:sp>
+      <p:pic>
+        <p:nvPicPr>
+          <p:cNvPr id="18" name="Image 0" descr="preencoded.png">    </p:cNvPr>
+          <p:cNvPicPr>
+            <a:picLocks noChangeAspect="1"/>
+          </p:cNvPicPr>
+          <p:nvPr/>
+        </p:nvPicPr>
+        <p:blipFill>
+          <a:blip r:embed="rId1"/>
+          <a:stretch>
+            <a:fillRect/>
+          </a:stretch>
+        </p:blipFill>
+        <p:spPr>
+          <a:xfrm>
+            <a:off x="7851343" y="128016"/>
+            <a:ext cx="201168" cy="201168"/>
+          </a:xfrm>
+          <a:prstGeom prst="rect">
+            <a:avLst/>
+          </a:prstGeom>
+        </p:spPr>
+      </p:pic>
+      <p:sp>
+        <p:nvSpPr>
+          <p:cNvPr id="19" name="Text 16"/>
+          <p:cNvSpPr txBox="1"/>
+          <p:nvPr/>
+        </p:nvSpPr>
+        <p:spPr>
+          <a:xfrm>
+            <a:off x="8107375" y="91440"/>
+            <a:ext cx="3499104" cy="274320"/>
+          </a:xfrm>
+          <a:prstGeom prst="rect">
+            <a:avLst/>
+          </a:prstGeom>
+          <a:noFill/>
+          <a:ln/>
+        </p:spPr>
+        <p:txBody>
+          <a:bodyPr wrap="square" lIns="0" tIns="0" rIns="0" bIns="0" rtlCol="0" anchor="ctr"/>
+          <a:lstStyle/>
+          <a:p>
+            <a:pPr indent="0" marL="0">
+              <a:buNone/>
+            </a:pPr>
+            <a:r>
+              <a:rPr lang="en-US" sz="1100" b="1" dirty="0">
+                <a:solidFill>
+                  <a:srgbClr val="075985"/>
+                </a:solidFill>
+                <a:latin typeface="Calibri" pitchFamily="34" charset="0"/>
+                <a:ea typeface="Calibri" pitchFamily="34" charset="-122"/>
+                <a:cs typeface="Calibri" pitchFamily="34" charset="-120"/>
+              </a:rPr>
+              <a:t>DA COMPRENDERE OGGI</a:t>
+            </a:r>
+            <a:pPr indent="0" marL="0">
+              <a:buNone/>
+            </a:pPr>
+            <a:r>
+              <a:rPr lang="en-US" sz="1100" dirty="0">
+                <a:solidFill>
+                  <a:srgbClr val="075985"/>
+                </a:solidFill>
+                <a:latin typeface="Calibri" pitchFamily="34" charset="0"/>
+                <a:ea typeface="Calibri" pitchFamily="34" charset="-122"/>
+                <a:cs typeface="Calibri" pitchFamily="34" charset="-120"/>
+              </a:rPr>
+              <a:t> · macchine a stati finiti</a:t>
+            </a:r>
+            <a:endParaRPr lang="en-US" sz="1100" dirty="0"/>
+          </a:p>
+        </p:txBody>
+      </p:sp>
+      <p:sp>
+        <p:nvSpPr>
           <p:cNvPr id="25" name="Slide Number Placeholder 0"/>
           <p:cNvSpPr>
             <a:spLocks noGrp="1"/>
@@ -16450,6 +18024,133 @@
       </p:sp>
       <p:sp>
         <p:nvSpPr>
+          <p:cNvPr id="16" name="Shape 14"/>
+          <p:cNvSpPr/>
+          <p:nvPr/>
+        </p:nvSpPr>
+        <p:spPr>
+          <a:xfrm>
+            <a:off x="7723327" y="91440"/>
+            <a:ext cx="3919728" cy="274320"/>
+          </a:xfrm>
+          <a:prstGeom prst="rect">
+            <a:avLst/>
+          </a:prstGeom>
+          <a:solidFill>
+            <a:srgbClr val="E0F2FE"/>
+          </a:solidFill>
+          <a:ln w="12700">
+            <a:solidFill>
+              <a:srgbClr val="0369A1"/>
+            </a:solidFill>
+            <a:prstDash val="solid"/>
+          </a:ln>
+        </p:spPr>
+      </p:sp>
+      <p:sp>
+        <p:nvSpPr>
+          <p:cNvPr id="17" name="Shape 15"/>
+          <p:cNvSpPr/>
+          <p:nvPr/>
+        </p:nvSpPr>
+        <p:spPr>
+          <a:xfrm>
+            <a:off x="7723327" y="91440"/>
+            <a:ext cx="73152" cy="274320"/>
+          </a:xfrm>
+          <a:prstGeom prst="rect">
+            <a:avLst/>
+          </a:prstGeom>
+          <a:solidFill>
+            <a:srgbClr val="0369A1"/>
+          </a:solidFill>
+          <a:ln w="12700">
+            <a:solidFill>
+              <a:srgbClr val="0369A1"/>
+            </a:solidFill>
+            <a:prstDash val="solid"/>
+          </a:ln>
+        </p:spPr>
+      </p:sp>
+      <p:pic>
+        <p:nvPicPr>
+          <p:cNvPr id="18" name="Image 0" descr="preencoded.png">    </p:cNvPr>
+          <p:cNvPicPr>
+            <a:picLocks noChangeAspect="1"/>
+          </p:cNvPicPr>
+          <p:nvPr/>
+        </p:nvPicPr>
+        <p:blipFill>
+          <a:blip r:embed="rId1"/>
+          <a:stretch>
+            <a:fillRect/>
+          </a:stretch>
+        </p:blipFill>
+        <p:spPr>
+          <a:xfrm>
+            <a:off x="7851343" y="128016"/>
+            <a:ext cx="201168" cy="201168"/>
+          </a:xfrm>
+          <a:prstGeom prst="rect">
+            <a:avLst/>
+          </a:prstGeom>
+        </p:spPr>
+      </p:pic>
+      <p:sp>
+        <p:nvSpPr>
+          <p:cNvPr id="19" name="Text 16"/>
+          <p:cNvSpPr txBox="1"/>
+          <p:nvPr/>
+        </p:nvSpPr>
+        <p:spPr>
+          <a:xfrm>
+            <a:off x="8107375" y="91440"/>
+            <a:ext cx="3499104" cy="274320"/>
+          </a:xfrm>
+          <a:prstGeom prst="rect">
+            <a:avLst/>
+          </a:prstGeom>
+          <a:noFill/>
+          <a:ln/>
+        </p:spPr>
+        <p:txBody>
+          <a:bodyPr wrap="square" lIns="0" tIns="0" rIns="0" bIns="0" rtlCol="0" anchor="ctr"/>
+          <a:lstStyle/>
+          <a:p>
+            <a:pPr indent="0" marL="0">
+              <a:buNone/>
+            </a:pPr>
+            <a:r>
+              <a:rPr lang="en-US" sz="1100" b="1" dirty="0">
+                <a:solidFill>
+                  <a:srgbClr val="075985"/>
+                </a:solidFill>
+                <a:latin typeface="Calibri" pitchFamily="34" charset="0"/>
+                <a:ea typeface="Calibri" pitchFamily="34" charset="-122"/>
+                <a:cs typeface="Calibri" pitchFamily="34" charset="-120"/>
+              </a:rPr>
+              <a:t>DA COMPRENDERE OGGI</a:t>
+            </a:r>
+            <a:pPr indent="0" marL="0">
+              <a:buNone/>
+            </a:pPr>
+            <a:r>
+              <a:rPr lang="en-US" sz="1100" dirty="0">
+                <a:solidFill>
+                  <a:srgbClr val="075985"/>
+                </a:solidFill>
+                <a:latin typeface="Calibri" pitchFamily="34" charset="0"/>
+                <a:ea typeface="Calibri" pitchFamily="34" charset="-122"/>
+                <a:cs typeface="Calibri" pitchFamily="34" charset="-120"/>
+              </a:rPr>
+              <a:t> · macchine a stati finiti</a:t>
+            </a:r>
+            <a:endParaRPr lang="en-US" sz="1100" dirty="0"/>
+          </a:p>
+        </p:txBody>
+      </p:sp>
+      <p:sp>
+        <p:nvSpPr>
           <p:cNvPr id="25" name="Slide Number Placeholder 0"/>
           <p:cNvSpPr>
             <a:spLocks noGrp="1"/>
@@ -16966,6 +18667,133 @@
       </p:sp>
       <p:sp>
         <p:nvSpPr>
+          <p:cNvPr id="9" name="Shape 7"/>
+          <p:cNvSpPr/>
+          <p:nvPr/>
+        </p:nvSpPr>
+        <p:spPr>
+          <a:xfrm>
+            <a:off x="7723327" y="91440"/>
+            <a:ext cx="3919728" cy="274320"/>
+          </a:xfrm>
+          <a:prstGeom prst="rect">
+            <a:avLst/>
+          </a:prstGeom>
+          <a:solidFill>
+            <a:srgbClr val="E0F2FE"/>
+          </a:solidFill>
+          <a:ln w="12700">
+            <a:solidFill>
+              <a:srgbClr val="0369A1"/>
+            </a:solidFill>
+            <a:prstDash val="solid"/>
+          </a:ln>
+        </p:spPr>
+      </p:sp>
+      <p:sp>
+        <p:nvSpPr>
+          <p:cNvPr id="10" name="Shape 8"/>
+          <p:cNvSpPr/>
+          <p:nvPr/>
+        </p:nvSpPr>
+        <p:spPr>
+          <a:xfrm>
+            <a:off x="7723327" y="91440"/>
+            <a:ext cx="73152" cy="274320"/>
+          </a:xfrm>
+          <a:prstGeom prst="rect">
+            <a:avLst/>
+          </a:prstGeom>
+          <a:solidFill>
+            <a:srgbClr val="0369A1"/>
+          </a:solidFill>
+          <a:ln w="12700">
+            <a:solidFill>
+              <a:srgbClr val="0369A1"/>
+            </a:solidFill>
+            <a:prstDash val="solid"/>
+          </a:ln>
+        </p:spPr>
+      </p:sp>
+      <p:pic>
+        <p:nvPicPr>
+          <p:cNvPr id="11" name="Image 0" descr="preencoded.png">    </p:cNvPr>
+          <p:cNvPicPr>
+            <a:picLocks noChangeAspect="1"/>
+          </p:cNvPicPr>
+          <p:nvPr/>
+        </p:nvPicPr>
+        <p:blipFill>
+          <a:blip r:embed="rId1"/>
+          <a:stretch>
+            <a:fillRect/>
+          </a:stretch>
+        </p:blipFill>
+        <p:spPr>
+          <a:xfrm>
+            <a:off x="7851343" y="128016"/>
+            <a:ext cx="201168" cy="201168"/>
+          </a:xfrm>
+          <a:prstGeom prst="rect">
+            <a:avLst/>
+          </a:prstGeom>
+        </p:spPr>
+      </p:pic>
+      <p:sp>
+        <p:nvSpPr>
+          <p:cNvPr id="12" name="Text 9"/>
+          <p:cNvSpPr txBox="1"/>
+          <p:nvPr/>
+        </p:nvSpPr>
+        <p:spPr>
+          <a:xfrm>
+            <a:off x="8107375" y="91440"/>
+            <a:ext cx="3499104" cy="274320"/>
+          </a:xfrm>
+          <a:prstGeom prst="rect">
+            <a:avLst/>
+          </a:prstGeom>
+          <a:noFill/>
+          <a:ln/>
+        </p:spPr>
+        <p:txBody>
+          <a:bodyPr wrap="square" lIns="0" tIns="0" rIns="0" bIns="0" rtlCol="0" anchor="ctr"/>
+          <a:lstStyle/>
+          <a:p>
+            <a:pPr indent="0" marL="0">
+              <a:buNone/>
+            </a:pPr>
+            <a:r>
+              <a:rPr lang="en-US" sz="1100" b="1" dirty="0">
+                <a:solidFill>
+                  <a:srgbClr val="075985"/>
+                </a:solidFill>
+                <a:latin typeface="Calibri" pitchFamily="34" charset="0"/>
+                <a:ea typeface="Calibri" pitchFamily="34" charset="-122"/>
+                <a:cs typeface="Calibri" pitchFamily="34" charset="-120"/>
+              </a:rPr>
+              <a:t>DA COMPRENDERE OGGI</a:t>
+            </a:r>
+            <a:pPr indent="0" marL="0">
+              <a:buNone/>
+            </a:pPr>
+            <a:r>
+              <a:rPr lang="en-US" sz="1100" dirty="0">
+                <a:solidFill>
+                  <a:srgbClr val="075985"/>
+                </a:solidFill>
+                <a:latin typeface="Calibri" pitchFamily="34" charset="0"/>
+                <a:ea typeface="Calibri" pitchFamily="34" charset="-122"/>
+                <a:cs typeface="Calibri" pitchFamily="34" charset="-120"/>
+              </a:rPr>
+              <a:t> · macchine a stati finiti</a:t>
+            </a:r>
+            <a:endParaRPr lang="en-US" sz="1100" dirty="0"/>
+          </a:p>
+        </p:txBody>
+      </p:sp>
+      <p:sp>
+        <p:nvSpPr>
           <p:cNvPr id="25" name="Slide Number Placeholder 0"/>
           <p:cNvSpPr>
             <a:spLocks noGrp="1"/>
@@ -17966,6 +19794,133 @@
       </p:sp>
       <p:sp>
         <p:nvSpPr>
+          <p:cNvPr id="26" name="Shape 24"/>
+          <p:cNvSpPr/>
+          <p:nvPr/>
+        </p:nvSpPr>
+        <p:spPr>
+          <a:xfrm>
+            <a:off x="7723327" y="91440"/>
+            <a:ext cx="3919728" cy="274320"/>
+          </a:xfrm>
+          <a:prstGeom prst="rect">
+            <a:avLst/>
+          </a:prstGeom>
+          <a:solidFill>
+            <a:srgbClr val="E0F2FE"/>
+          </a:solidFill>
+          <a:ln w="12700">
+            <a:solidFill>
+              <a:srgbClr val="0369A1"/>
+            </a:solidFill>
+            <a:prstDash val="solid"/>
+          </a:ln>
+        </p:spPr>
+      </p:sp>
+      <p:sp>
+        <p:nvSpPr>
+          <p:cNvPr id="27" name="Shape 25"/>
+          <p:cNvSpPr/>
+          <p:nvPr/>
+        </p:nvSpPr>
+        <p:spPr>
+          <a:xfrm>
+            <a:off x="7723327" y="91440"/>
+            <a:ext cx="73152" cy="274320"/>
+          </a:xfrm>
+          <a:prstGeom prst="rect">
+            <a:avLst/>
+          </a:prstGeom>
+          <a:solidFill>
+            <a:srgbClr val="0369A1"/>
+          </a:solidFill>
+          <a:ln w="12700">
+            <a:solidFill>
+              <a:srgbClr val="0369A1"/>
+            </a:solidFill>
+            <a:prstDash val="solid"/>
+          </a:ln>
+        </p:spPr>
+      </p:sp>
+      <p:pic>
+        <p:nvPicPr>
+          <p:cNvPr id="28" name="Image 0" descr="preencoded.png">    </p:cNvPr>
+          <p:cNvPicPr>
+            <a:picLocks noChangeAspect="1"/>
+          </p:cNvPicPr>
+          <p:nvPr/>
+        </p:nvPicPr>
+        <p:blipFill>
+          <a:blip r:embed="rId1"/>
+          <a:stretch>
+            <a:fillRect/>
+          </a:stretch>
+        </p:blipFill>
+        <p:spPr>
+          <a:xfrm>
+            <a:off x="7851343" y="128016"/>
+            <a:ext cx="201168" cy="201168"/>
+          </a:xfrm>
+          <a:prstGeom prst="rect">
+            <a:avLst/>
+          </a:prstGeom>
+        </p:spPr>
+      </p:pic>
+      <p:sp>
+        <p:nvSpPr>
+          <p:cNvPr id="29" name="Text 26"/>
+          <p:cNvSpPr txBox="1"/>
+          <p:nvPr/>
+        </p:nvSpPr>
+        <p:spPr>
+          <a:xfrm>
+            <a:off x="8107375" y="91440"/>
+            <a:ext cx="3499104" cy="274320"/>
+          </a:xfrm>
+          <a:prstGeom prst="rect">
+            <a:avLst/>
+          </a:prstGeom>
+          <a:noFill/>
+          <a:ln/>
+        </p:spPr>
+        <p:txBody>
+          <a:bodyPr wrap="square" lIns="0" tIns="0" rIns="0" bIns="0" rtlCol="0" anchor="ctr"/>
+          <a:lstStyle/>
+          <a:p>
+            <a:pPr indent="0" marL="0">
+              <a:buNone/>
+            </a:pPr>
+            <a:r>
+              <a:rPr lang="en-US" sz="1100" b="1" dirty="0">
+                <a:solidFill>
+                  <a:srgbClr val="075985"/>
+                </a:solidFill>
+                <a:latin typeface="Calibri" pitchFamily="34" charset="0"/>
+                <a:ea typeface="Calibri" pitchFamily="34" charset="-122"/>
+                <a:cs typeface="Calibri" pitchFamily="34" charset="-120"/>
+              </a:rPr>
+              <a:t>DA COMPRENDERE OGGI</a:t>
+            </a:r>
+            <a:pPr indent="0" marL="0">
+              <a:buNone/>
+            </a:pPr>
+            <a:r>
+              <a:rPr lang="en-US" sz="1100" dirty="0">
+                <a:solidFill>
+                  <a:srgbClr val="075985"/>
+                </a:solidFill>
+                <a:latin typeface="Calibri" pitchFamily="34" charset="0"/>
+                <a:ea typeface="Calibri" pitchFamily="34" charset="-122"/>
+                <a:cs typeface="Calibri" pitchFamily="34" charset="-120"/>
+              </a:rPr>
+              <a:t> · macchine a stati finiti</a:t>
+            </a:r>
+            <a:endParaRPr lang="en-US" sz="1100" dirty="0"/>
+          </a:p>
+        </p:txBody>
+      </p:sp>
+      <p:sp>
+        <p:nvSpPr>
           <p:cNvPr id="25" name="Slide Number Placeholder 0"/>
           <p:cNvSpPr>
             <a:spLocks noGrp="1"/>
@@ -18105,9 +20060,59 @@
           </a:ln>
         </p:spPr>
       </p:sp>
+      <p:sp>
+        <p:nvSpPr>
+          <p:cNvPr id="4" name="Shape 2"/>
+          <p:cNvSpPr/>
+          <p:nvPr/>
+        </p:nvSpPr>
+        <p:spPr>
+          <a:xfrm>
+            <a:off x="7723327" y="91440"/>
+            <a:ext cx="3919728" cy="274320"/>
+          </a:xfrm>
+          <a:prstGeom prst="rect">
+            <a:avLst/>
+          </a:prstGeom>
+          <a:solidFill>
+            <a:srgbClr val="E0F2FE"/>
+          </a:solidFill>
+          <a:ln w="12700">
+            <a:solidFill>
+              <a:srgbClr val="0369A1"/>
+            </a:solidFill>
+            <a:prstDash val="solid"/>
+          </a:ln>
+        </p:spPr>
+      </p:sp>
+      <p:sp>
+        <p:nvSpPr>
+          <p:cNvPr id="5" name="Shape 3"/>
+          <p:cNvSpPr/>
+          <p:nvPr/>
+        </p:nvSpPr>
+        <p:spPr>
+          <a:xfrm>
+            <a:off x="7723327" y="91440"/>
+            <a:ext cx="73152" cy="274320"/>
+          </a:xfrm>
+          <a:prstGeom prst="rect">
+            <a:avLst/>
+          </a:prstGeom>
+          <a:solidFill>
+            <a:srgbClr val="0369A1"/>
+          </a:solidFill>
+          <a:ln w="12700">
+            <a:solidFill>
+              <a:srgbClr val="0369A1"/>
+            </a:solidFill>
+            <a:prstDash val="solid"/>
+          </a:ln>
+        </p:spPr>
+      </p:sp>
       <p:pic>
         <p:nvPicPr>
-          <p:cNvPr id="5" name="Image 0" descr="preencoded.png">    </p:cNvPr>
+          <p:cNvPr id="6" name="Image 0" descr="preencoded.png">    </p:cNvPr>
           <p:cNvPicPr>
             <a:picLocks noChangeAspect="1"/>
           </p:cNvPicPr>
@@ -18115,6 +20120,83 @@
         </p:nvPicPr>
         <p:blipFill>
           <a:blip r:embed="rId1"/>
+          <a:stretch>
+            <a:fillRect/>
+          </a:stretch>
+        </p:blipFill>
+        <p:spPr>
+          <a:xfrm>
+            <a:off x="7851343" y="128016"/>
+            <a:ext cx="201168" cy="201168"/>
+          </a:xfrm>
+          <a:prstGeom prst="rect">
+            <a:avLst/>
+          </a:prstGeom>
+        </p:spPr>
+      </p:pic>
+      <p:sp>
+        <p:nvSpPr>
+          <p:cNvPr id="7" name="Text 4"/>
+          <p:cNvSpPr txBox="1"/>
+          <p:nvPr/>
+        </p:nvSpPr>
+        <p:spPr>
+          <a:xfrm>
+            <a:off x="8107375" y="91440"/>
+            <a:ext cx="3499104" cy="274320"/>
+          </a:xfrm>
+          <a:prstGeom prst="rect">
+            <a:avLst/>
+          </a:prstGeom>
+          <a:noFill/>
+          <a:ln/>
+        </p:spPr>
+        <p:txBody>
+          <a:bodyPr wrap="square" lIns="0" tIns="0" rIns="0" bIns="0" rtlCol="0" anchor="ctr"/>
+          <a:lstStyle/>
+          <a:p>
+            <a:pPr indent="0" marL="0">
+              <a:buNone/>
+            </a:pPr>
+            <a:r>
+              <a:rPr lang="en-US" sz="1100" b="1" dirty="0">
+                <a:solidFill>
+                  <a:srgbClr val="075985"/>
+                </a:solidFill>
+                <a:latin typeface="Calibri" pitchFamily="34" charset="0"/>
+                <a:ea typeface="Calibri" pitchFamily="34" charset="-122"/>
+                <a:cs typeface="Calibri" pitchFamily="34" charset="-120"/>
+              </a:rPr>
+              <a:t>DA COMPRENDERE OGGI</a:t>
+            </a:r>
+            <a:pPr indent="0" marL="0">
+              <a:buNone/>
+            </a:pPr>
+            <a:r>
+              <a:rPr lang="en-US" sz="1100" dirty="0">
+                <a:solidFill>
+                  <a:srgbClr val="075985"/>
+                </a:solidFill>
+                <a:latin typeface="Calibri" pitchFamily="34" charset="0"/>
+                <a:ea typeface="Calibri" pitchFamily="34" charset="-122"/>
+                <a:cs typeface="Calibri" pitchFamily="34" charset="-120"/>
+              </a:rPr>
+              <a:t> · macchine a stati finiti</a:t>
+            </a:r>
+            <a:endParaRPr lang="en-US" sz="1100" dirty="0"/>
+          </a:p>
+        </p:txBody>
+      </p:sp>
+      <p:pic>
+        <p:nvPicPr>
+          <p:cNvPr id="9" name="Image 1" descr="preencoded.png">    </p:cNvPr>
+          <p:cNvPicPr>
+            <a:picLocks noChangeAspect="1"/>
+          </p:cNvPicPr>
+          <p:nvPr/>
+        </p:nvPicPr>
+        <p:blipFill>
+          <a:blip r:embed="rId2"/>
           <a:stretch>
             <a:fillRect/>
           </a:stretch>
@@ -19192,7 +21274,7 @@
       </p:graphicFrame>
       <p:sp>
         <p:nvSpPr>
-          <p:cNvPr id="7" name="Shape 2"/>
+          <p:cNvPr id="11" name="Shape 5"/>
           <p:cNvSpPr/>
           <p:nvPr/>
         </p:nvSpPr>
@@ -19217,7 +21299,7 @@
       </p:sp>
       <p:sp>
         <p:nvSpPr>
-          <p:cNvPr id="8" name="Text 3"/>
+          <p:cNvPr id="12" name="Text 6"/>
           <p:cNvSpPr txBox="1"/>
           <p:nvPr/>
         </p:nvSpPr>
@@ -19259,7 +21341,7 @@
       </p:sp>
       <p:sp>
         <p:nvSpPr>
-          <p:cNvPr id="9" name="Shape 4"/>
+          <p:cNvPr id="13" name="Shape 7"/>
           <p:cNvSpPr/>
           <p:nvPr/>
         </p:nvSpPr>
@@ -19284,7 +21366,7 @@
       </p:sp>
       <p:sp>
         <p:nvSpPr>
-          <p:cNvPr id="10" name="Text 5"/>
+          <p:cNvPr id="14" name="Text 8"/>
           <p:cNvSpPr txBox="1"/>
           <p:nvPr/>
         </p:nvSpPr>
@@ -19326,7 +21408,7 @@
       </p:sp>
       <p:sp>
         <p:nvSpPr>
-          <p:cNvPr id="11" name="Shape 6"/>
+          <p:cNvPr id="15" name="Shape 9"/>
           <p:cNvSpPr/>
           <p:nvPr/>
         </p:nvSpPr>
@@ -19351,7 +21433,7 @@
       </p:sp>
       <p:sp>
         <p:nvSpPr>
-          <p:cNvPr id="12" name="Text 7"/>
+          <p:cNvPr id="16" name="Text 10"/>
           <p:cNvSpPr txBox="1"/>
           <p:nvPr/>
         </p:nvSpPr>
@@ -19532,9 +21614,59 @@
           </a:ln>
         </p:spPr>
       </p:sp>
+      <p:sp>
+        <p:nvSpPr>
+          <p:cNvPr id="4" name="Shape 2"/>
+          <p:cNvSpPr/>
+          <p:nvPr/>
+        </p:nvSpPr>
+        <p:spPr>
+          <a:xfrm>
+            <a:off x="8117281" y="91440"/>
+            <a:ext cx="3525774" cy="274320"/>
+          </a:xfrm>
+          <a:prstGeom prst="rect">
+            <a:avLst/>
+          </a:prstGeom>
+          <a:solidFill>
+            <a:srgbClr val="E0F2FE"/>
+          </a:solidFill>
+          <a:ln w="12700">
+            <a:solidFill>
+              <a:srgbClr val="0369A1"/>
+            </a:solidFill>
+            <a:prstDash val="solid"/>
+          </a:ln>
+        </p:spPr>
+      </p:sp>
+      <p:sp>
+        <p:nvSpPr>
+          <p:cNvPr id="5" name="Shape 3"/>
+          <p:cNvSpPr/>
+          <p:nvPr/>
+        </p:nvSpPr>
+        <p:spPr>
+          <a:xfrm>
+            <a:off x="8117281" y="91440"/>
+            <a:ext cx="73152" cy="274320"/>
+          </a:xfrm>
+          <a:prstGeom prst="rect">
+            <a:avLst/>
+          </a:prstGeom>
+          <a:solidFill>
+            <a:srgbClr val="0369A1"/>
+          </a:solidFill>
+          <a:ln w="12700">
+            <a:solidFill>
+              <a:srgbClr val="0369A1"/>
+            </a:solidFill>
+            <a:prstDash val="solid"/>
+          </a:ln>
+        </p:spPr>
+      </p:sp>
       <p:pic>
         <p:nvPicPr>
-          <p:cNvPr id="5" name="Image 0" descr="preencoded.png">    </p:cNvPr>
+          <p:cNvPr id="6" name="Image 0" descr="preencoded.png">    </p:cNvPr>
           <p:cNvPicPr>
             <a:picLocks noChangeAspect="1"/>
           </p:cNvPicPr>
@@ -19542,6 +21674,83 @@
         </p:nvPicPr>
         <p:blipFill>
           <a:blip r:embed="rId1"/>
+          <a:stretch>
+            <a:fillRect/>
+          </a:stretch>
+        </p:blipFill>
+        <p:spPr>
+          <a:xfrm>
+            <a:off x="8245297" y="128016"/>
+            <a:ext cx="201168" cy="201168"/>
+          </a:xfrm>
+          <a:prstGeom prst="rect">
+            <a:avLst/>
+          </a:prstGeom>
+        </p:spPr>
+      </p:pic>
+      <p:sp>
+        <p:nvSpPr>
+          <p:cNvPr id="7" name="Text 4"/>
+          <p:cNvSpPr txBox="1"/>
+          <p:nvPr/>
+        </p:nvSpPr>
+        <p:spPr>
+          <a:xfrm>
+            <a:off x="8501329" y="91440"/>
+            <a:ext cx="3105150" cy="274320"/>
+          </a:xfrm>
+          <a:prstGeom prst="rect">
+            <a:avLst/>
+          </a:prstGeom>
+          <a:noFill/>
+          <a:ln/>
+        </p:spPr>
+        <p:txBody>
+          <a:bodyPr wrap="square" lIns="0" tIns="0" rIns="0" bIns="0" rtlCol="0" anchor="ctr"/>
+          <a:lstStyle/>
+          <a:p>
+            <a:pPr indent="0" marL="0">
+              <a:buNone/>
+            </a:pPr>
+            <a:r>
+              <a:rPr lang="en-US" sz="1100" b="1" dirty="0">
+                <a:solidFill>
+                  <a:srgbClr val="075985"/>
+                </a:solidFill>
+                <a:latin typeface="Calibri" pitchFamily="34" charset="0"/>
+                <a:ea typeface="Calibri" pitchFamily="34" charset="-122"/>
+                <a:cs typeface="Calibri" pitchFamily="34" charset="-120"/>
+              </a:rPr>
+              <a:t>DA COMPRENDERE OGGI</a:t>
+            </a:r>
+            <a:pPr indent="0" marL="0">
+              <a:buNone/>
+            </a:pPr>
+            <a:r>
+              <a:rPr lang="en-US" sz="1100" dirty="0">
+                <a:solidFill>
+                  <a:srgbClr val="075985"/>
+                </a:solidFill>
+                <a:latin typeface="Calibri" pitchFamily="34" charset="0"/>
+                <a:ea typeface="Calibri" pitchFamily="34" charset="-122"/>
+                <a:cs typeface="Calibri" pitchFamily="34" charset="-120"/>
+              </a:rPr>
+              <a:t> · latch e flip-flop</a:t>
+            </a:r>
+            <a:endParaRPr lang="en-US" sz="1100" dirty="0"/>
+          </a:p>
+        </p:txBody>
+      </p:sp>
+      <p:pic>
+        <p:nvPicPr>
+          <p:cNvPr id="9" name="Image 1" descr="preencoded.png">    </p:cNvPr>
+          <p:cNvPicPr>
+            <a:picLocks noChangeAspect="1"/>
+          </p:cNvPicPr>
+          <p:nvPr/>
+        </p:nvPicPr>
+        <p:blipFill>
+          <a:blip r:embed="rId2"/>
           <a:stretch>
             <a:fillRect/>
           </a:stretch>
@@ -20619,7 +22828,7 @@
       </p:graphicFrame>
       <p:sp>
         <p:nvSpPr>
-          <p:cNvPr id="7" name="Shape 2"/>
+          <p:cNvPr id="11" name="Shape 5"/>
           <p:cNvSpPr/>
           <p:nvPr/>
         </p:nvSpPr>
@@ -20644,7 +22853,7 @@
       </p:sp>
       <p:sp>
         <p:nvSpPr>
-          <p:cNvPr id="8" name="Text 3"/>
+          <p:cNvPr id="12" name="Text 6"/>
           <p:cNvSpPr txBox="1"/>
           <p:nvPr/>
         </p:nvSpPr>
@@ -20686,7 +22895,7 @@
       </p:sp>
       <p:sp>
         <p:nvSpPr>
-          <p:cNvPr id="9" name="Shape 4"/>
+          <p:cNvPr id="13" name="Shape 7"/>
           <p:cNvSpPr/>
           <p:nvPr/>
         </p:nvSpPr>
@@ -20711,7 +22920,7 @@
       </p:sp>
       <p:sp>
         <p:nvSpPr>
-          <p:cNvPr id="10" name="Text 5"/>
+          <p:cNvPr id="14" name="Text 8"/>
           <p:cNvSpPr txBox="1"/>
           <p:nvPr/>
         </p:nvSpPr>
@@ -20753,7 +22962,7 @@
       </p:sp>
       <p:sp>
         <p:nvSpPr>
-          <p:cNvPr id="11" name="Shape 6"/>
+          <p:cNvPr id="15" name="Shape 9"/>
           <p:cNvSpPr/>
           <p:nvPr/>
         </p:nvSpPr>
@@ -20778,7 +22987,7 @@
       </p:sp>
       <p:sp>
         <p:nvSpPr>
-          <p:cNvPr id="12" name="Text 7"/>
+          <p:cNvPr id="16" name="Text 10"/>
           <p:cNvSpPr txBox="1"/>
           <p:nvPr/>
         </p:nvSpPr>
@@ -20820,7 +23029,7 @@
       </p:sp>
       <p:sp>
         <p:nvSpPr>
-          <p:cNvPr id="13" name="Shape 8"/>
+          <p:cNvPr id="17" name="Shape 11"/>
           <p:cNvSpPr/>
           <p:nvPr/>
         </p:nvSpPr>
@@ -20845,7 +23054,7 @@
       </p:sp>
       <p:sp>
         <p:nvSpPr>
-          <p:cNvPr id="14" name="Text 9"/>
+          <p:cNvPr id="18" name="Text 12"/>
           <p:cNvSpPr txBox="1"/>
           <p:nvPr/>
         </p:nvSpPr>
@@ -20907,7 +23116,7 @@
       </p:sp>
       <p:sp>
         <p:nvSpPr>
-          <p:cNvPr id="15" name="Shape 10"/>
+          <p:cNvPr id="19" name="Shape 13"/>
           <p:cNvSpPr/>
           <p:nvPr/>
         </p:nvSpPr>
@@ -20932,7 +23141,7 @@
       </p:sp>
       <p:sp>
         <p:nvSpPr>
-          <p:cNvPr id="16" name="Text 11"/>
+          <p:cNvPr id="20" name="Text 14"/>
           <p:cNvSpPr txBox="1"/>
           <p:nvPr/>
         </p:nvSpPr>

--- a/it/slides/13-Architettura_dei_Calcolatori-Macchine_Sequenziali.pptx
+++ b/it/slides/13-Architettura_dei_Calcolatori-Macchine_Sequenziali.pptx
@@ -126,19 +126,19 @@
   <p:extLst>
     <p:ext uri="{521415D9-36F7-43E2-AB2F-B90AF26B5E84}">
       <p14:sectionLst xmlns:p14="http://schemas.microsoft.com/office/powerpoint/2010/main">
-        <p14:section name="Apertura" id="{513bf1d2-d89e-da73-fa85-e00b63075df1}">
+        <p14:section name="Apertura" id="{8acd218e-5a4a-6cd6-6289-cd0317a67e35}">
           <p14:sldIdLst>
             <p14:sldId id="256"/>
             <p14:sldId id="257"/>
           </p14:sldIdLst>
         </p14:section>
-        <p14:section name="Tempo e stato" id="{da76efd5-0561-a0cb-437f-74d28ae8313c}">
+        <p14:section name="Tempo e stato" id="{f18e7b47-35ce-b2b1-fa31-487c28bc1b8f}">
           <p14:sldIdLst>
             <p14:sldId id="258"/>
             <p14:sldId id="259"/>
           </p14:sldIdLst>
         </p14:section>
-        <p14:section name="Macchine a stati finiti" id="{4866a830-c1a5-b1af-994f-a42a564f0513}">
+        <p14:section name="Macchine a stati finiti" id="{c4deebd0-06a5-e50a-b4d0-6a12127919f4}">
           <p14:sldIdLst>
             <p14:sldId id="260"/>
             <p14:sldId id="261"/>
@@ -146,7 +146,7 @@
             <p14:sldId id="263"/>
           </p14:sldIdLst>
         </p14:section>
-        <p14:section name="Latch" id="{05cd14e6-6e12-d678-8b1e-5d11bab9efbf}">
+        <p14:section name="Latch" id="{feff1aee-6af1-1236-e309-edb8525388dc}">
           <p14:sldIdLst>
             <p14:sldId id="264"/>
             <p14:sldId id="265"/>
@@ -155,13 +155,13 @@
             <p14:sldId id="268"/>
           </p14:sldIdLst>
         </p14:section>
-        <p14:section name="Flip-flop" id="{6e930ef1-28b3-18fc-180a-505f248ea83e}">
+        <p14:section name="Flip-flop" id="{747a8e28-fe2a-b23d-2f79-8a93c184e2cd}">
           <p14:sldIdLst>
             <p14:sldId id="269"/>
             <p14:sldId id="270"/>
           </p14:sldIdLst>
         </p14:section>
-        <p14:section name="Ritorno alla macchina" id="{245b53e0-a68e-2539-541f-7c6787a02af8}">
+        <p14:section name="Ritorno alla macchina" id="{8d776f9e-27c0-46ef-66cc-7b80a4c945b4}">
           <p14:sldIdLst>
             <p14:sldId id="271"/>
             <p14:sldId id="272"/>

--- a/it/slides/13-Architettura_dei_Calcolatori-Macchine_Sequenziali.pptx
+++ b/it/slides/13-Architettura_dei_Calcolatori-Macchine_Sequenziali.pptx
@@ -126,19 +126,19 @@
   <p:extLst>
     <p:ext uri="{521415D9-36F7-43E2-AB2F-B90AF26B5E84}">
       <p14:sectionLst xmlns:p14="http://schemas.microsoft.com/office/powerpoint/2010/main">
-        <p14:section name="Apertura" id="{8acd218e-5a4a-6cd6-6289-cd0317a67e35}">
+        <p14:section name="Apertura" id="{e022b208-34bb-58ae-ba2f-337dcacbf059}">
           <p14:sldIdLst>
             <p14:sldId id="256"/>
             <p14:sldId id="257"/>
           </p14:sldIdLst>
         </p14:section>
-        <p14:section name="Tempo e stato" id="{f18e7b47-35ce-b2b1-fa31-487c28bc1b8f}">
+        <p14:section name="Tempo e stato" id="{f813b0e4-47c1-5b19-6701-0c92aae2ee59}">
           <p14:sldIdLst>
             <p14:sldId id="258"/>
             <p14:sldId id="259"/>
           </p14:sldIdLst>
         </p14:section>
-        <p14:section name="Macchine a stati finiti" id="{c4deebd0-06a5-e50a-b4d0-6a12127919f4}">
+        <p14:section name="Macchine a stati finiti" id="{91d4bf8c-139f-21b7-f749-c279fb4ac7da}">
           <p14:sldIdLst>
             <p14:sldId id="260"/>
             <p14:sldId id="261"/>
@@ -146,7 +146,7 @@
             <p14:sldId id="263"/>
           </p14:sldIdLst>
         </p14:section>
-        <p14:section name="Latch" id="{feff1aee-6af1-1236-e309-edb8525388dc}">
+        <p14:section name="Latch" id="{edd6a9fd-f982-4ac7-f294-eb794f8b8b13}">
           <p14:sldIdLst>
             <p14:sldId id="264"/>
             <p14:sldId id="265"/>
@@ -155,13 +155,13 @@
             <p14:sldId id="268"/>
           </p14:sldIdLst>
         </p14:section>
-        <p14:section name="Flip-flop" id="{747a8e28-fe2a-b23d-2f79-8a93c184e2cd}">
+        <p14:section name="Flip-flop" id="{f7943d18-37f2-ac1e-2b44-d29f8de04ccd}">
           <p14:sldIdLst>
             <p14:sldId id="269"/>
             <p14:sldId id="270"/>
           </p14:sldIdLst>
         </p14:section>
-        <p14:section name="Ritorno alla macchina" id="{8d776f9e-27c0-46ef-66cc-7b80a4c945b4}">
+        <p14:section name="Ritorno alla macchina" id="{a79afe55-ac3c-42a1-574a-45dd9bdac678}">
           <p14:sldIdLst>
             <p14:sldId id="271"/>
             <p14:sldId id="272"/>
@@ -574,7 +574,7 @@
           <a:p>
             <a:r>
               <a:rPr lang="en-US" dirty="0"/>
-              <a:t>Comincia il terzo blocco del corso: stato e memoria. Le macchine della Lezione 11 non avevano memoria: gli stessi ingressi davano sempre le stesse uscite. Un calcolatore però ricorda: un contatore sopravvive da un frame al successivo, un gioco sa se sta mostrando il titolo o il campo di gioco. Questa lezione introduce il tempo e lo stato, il modello che descrive ogni circuito con memoria, e le memorie elementari, latch e flip-flop, con cui sono costruiti i registri del processore.
+              <a:t>Si apre il terzo blocco del corso: stato e memoria. Le macchine della Lezione 11 non avevano memoria: ingressi identici producevano sempre uscite identiche. Un calcolatore, però, ricorda: un contatore persiste da un frame al successivo, e un gioco sa se sta mostrando il titolo o il campo di gioco. Questa lezione introduce tempo e stato, il modello che descrive ogni circuito dotato di memoria, e gli elementi elementari di memorizzazione, latch e flip-flop, con cui si costruiscono i registri del processore. È il cardine concettuale tra logica e architettura.
 Stato di apprendimento: DA COMPRENDERE OGGI, alla fine di questa lezione lo spiegate, lo seguite passo passo e lo applicate da soli; DA UTILIZZARE OGGI, oggi seguite e usate la ricetta; come funziona dentro si spiega più avanti, o non fa parte del corso; DA COMPRENDERE PIÙ AVANTI, riconoscete il nome e lo scopo; lo spiega una lezione successiva. Una slide senza etichetta è contesto: una storia, un esempio, una domanda, un esercizio.
 Stato di apprendimento di questa lezione. DA COMPRENDERE OGGI: macchine a stati finiti; il clock; latch e flip-flop; i registri come flip-flop. DA UTILIZZARE OGGI: il programma completo, gli strumenti di PRG32 (si usa, non si studia, in questo corso). DA COMPRENDERE PIÙ AVANTI: niente. Una slide senza etichetta è contesto: una storia, un esempio, una domanda, un esercizio.
 Per il docente: Spirale: un gioco con una schermata del titolo è una macchina a stati finiti scritta in assembly; la lezione costruisce poi la teoria (tempo, stato, Mealy e Moore), gli elementi di memoria (latch e flip-flop), e torna ai registri e al program counter di RISC-V.</a:t>
@@ -665,7 +665,7 @@
           <a:p>
             <a:r>
               <a:rPr lang="en-US" dirty="0"/>
-              <a:t>Il latch nel tempo. S va a 1, e dopo il ritardo delle porte Q diventa 1. Poi S torna a 0 e non accade nulla: la retroazione tiene Q a 1. Questo tratto piatto è la memoria. Più tardi R va a 1, Q torna a 0, e vi resta quando R torna a 0. Seguite sul disegno i quattro istanti segnati tenendo davanti il circuito della slide precedente, e ricavate l'uscita di ogni porta.
+              <a:t>Il latch osservato nel tempo. S sale a 1, e dopo il ritardo delle porte Q diventa 1. S torna poi a 0 e nulla cambia: la retroazione tiene Q a 1. Questo tratto piatto è la memoria. Più tardi R sale a 1, Q torna a 0, e vi resta quando R torna a 0. I quattro istanti segnati vanno seguiti con il circuito della slide precedente sotto gli occhi, determinando l'uscita di ogni porta in ogni istante.
 DA COMPRENDERE OGGI: latch e flip-flop.
 Per il docente: Diagramma temporale. La presentazione originale tracciava ciascuno di questi quattro passi porta per porta su una dozzina di slide; ripercorrerli alla lavagna con il circuito della slide precedente. Il latch è un automa di Moore: la sua uscita è il suo stato.</a:t>
             </a:r>
@@ -755,7 +755,7 @@
           <a:p>
             <a:r>
               <a:rPr lang="en-US" dirty="0"/>
-              <a:t>Con S e R entrambi a 1, entrambe le porte NOR danno 0, quindi Q e il suo complemento non sono più complementari. Peggio: se poi i due ingressi tornano a 0 insieme, le porte fanno a gara, e lo stato finale dipende da quale è più veloce. Il risultato è imprevedibile, e il latch può perfino oscillare. Chi usa un latch SR deve garantire che S e R non siano mai a 1 insieme. Gli elementi JK e D sono stati inventati per eliminare il problema alla radice.
+              <a:t>Con S e R entrambi a 1, entrambe le porte NOR danno 0, quindi Q e il suo complemento non sono più complementari. Peggio ancora, se i due ingressi tornano poi a 0 contemporaneamente, le porte entrano in competizione, e lo stato finale dipende da quale è più veloce. L'esito è imprevedibile, e il latch può persino oscillare, una condizione nota in forma generale come metastabilità. Un progettista che usa un latch SR deve garantire che S e R non valgano mai 1 insieme. Gli elementi JK e D sono stati ideati per eliminare questo rischio alla radice.
 DA COMPRENDERE OGGI: latch e flip-flop.
 Per il docente: Le conclusioni della presentazione originale scambiavano set e reset in una slide: set dà Q = 1, reset dà Q = 0.</a:t>
             </a:r>
@@ -845,7 +845,7 @@
           <a:p>
             <a:r>
               <a:rPr lang="en-US" dirty="0"/>
-              <a:t>In un circuito asincrono le uscite possono cambiare ogni volta che cambia un ingresso. In uno sincrono è il clock a decidere quando. Per rendere sincrono il latch SR, S e R passano per due porte AND insieme al clock. Quando il clock vale 0 entrambe le porte danno 0 e il latch non può cambiare; quando vale 1 si comporta come il latch semplice. Il clock decide quando gli ingressi vengono ascoltati.
+              <a:t>In un circuito asincrono le uscite possono cambiare ogni volta che cambia un ingresso; in uno sincrono è il clock a decidere quando. Per rendere sincrono il latch SR, S e R passano per due porte AND insieme al clock. Quando il clock vale 0 entrambe le porte danno 0 e il latch non può cambiare; quando il clock vale 1 si comporta come il latch semplice. Il clock decide così quando gli ingressi vengono ascoltati.
 DA COMPRENDERE OGGI: latch e flip-flop.
 Per il docente: Latch sincroni e asincroni. La presentazione originale suggerisce un simulatore: de-iitr.vlabs.ac.in/exp/truth-tables-flip-flops.</a:t>
             </a:r>
@@ -935,7 +935,7 @@
           <a:p>
             <a:r>
               <a:rPr lang="en-US" dirty="0"/>
-              <a:t>Due miglioramenti del latch. Nel latch JK le uscite sono riportate alle porte di ingresso, così che set e reset interni non possano mai valere 1 insieme; la combinazione J = K = 1, invece di essere vietata, inverte l'uscita: la fa commutare. Il latch D ha un solo ingresso: D va al set e la sua negazione al reset, quindi l'uscita prende semplicemente il valore di D finché il clock è attivo. D sta per delay, ritardo, o per dato.
+              <a:t>Due perfezionamenti del latch. Nel latch JK le uscite sono riportate alle porte di ingresso, così che set e reset interni non possano mai valere 1 insieme; la combinazione J = K = 1, invece di essere vietata, inverte l'uscita, il che si chiama commutazione. Il latch D ha un solo ingresso: D pilota il set e la sua negazione il reset, quindi l'uscita segue semplicemente D finché il clock è attivo. D sta per delay, o data.
 DA COMPRENDERE OGGI: latch e flip-flop.
 Per il docente: JK: le uscite sono riportate alle porte di ingresso, S = J . Q' e R = K . Q; poiché Q e Q' sono complementari, S e R non possono mai valere entrambi 1. D: un solo ingresso va a S e, attraverso un invertitore, a R, quindi sono possibili solo i casi S = 0, R = 1 e S = 1, R = 0.</a:t>
             </a:r>
@@ -1025,7 +1025,7 @@
           <a:p>
             <a:r>
               <a:rPr lang="en-US" dirty="0"/>
-              <a:t>Il flip-flop master-slave è fatto di due latch in serie, controllati da livelli opposti del clock. Quando il clock vale 0 il master è aperto e segue l'ingresso, mentre lo slave è chiuso. Quando il clock passa a 1 il master si chiude, conservando ciò che aveva, e lo slave si apre e lo mostra. I due non sono mai trasparenti insieme, quindi l'ingresso non può mai correre dritto fino all'uscita. L'effetto è che l'uscita cambia solo sul fronte di salita: il flip-flop è sensibile al fronte.
+              <a:t>Il flip-flop master-slave consiste di due latch in serie, abilitati da livelli opposti del clock. Quando il clock vale 0 il master è trasparente e segue l'ingresso, mentre lo slave è opaco. Quando il clock sale a 1 il master si chiude, trattenendo il suo contenuto, e lo slave si apre e lo presenta. I due non sono mai trasparenti contemporaneamente, quindi l'ingresso non può mai propagarsi direttamente all'uscita. L'effetto è che l'uscita cambia solo sul fronte di salita: il flip-flop è attivato sul fronte.
 DA COMPRENDERE OGGI: latch e flip-flop.
 Per il docente: Flip-flop master-slave. La presentazione originale mostrava la versione JK, fatta di due latch JK sincroni; la versione D è quella usata nei registri di un processore.</a:t>
             </a:r>
@@ -1115,7 +1115,7 @@
           <a:p>
             <a:r>
               <a:rPr lang="en-US" dirty="0"/>
-              <a:t>La differenza, vista sulle forme d'onda. Il clock e l'ingresso D sono gli stessi per entrambi. L'uscita del latch segue D per tutta la fase alta del clock: cambia a metà di una fase. L'uscita del flip-flop cambia solo sui fronti di salita, prendendo il valore che D ha in quell'istante; gli impulsi brevi di D tra due fronti sono ignorati. L'uscita del flip-flop è ferma per un intero periodo, che è esattamente ciò che serve a un registro di stato.
+              <a:t>La differenza resa visibile sulle forme d'onda. Il clock e l'ingresso D sono identici per entrambi gli elementi. L'uscita del latch segue D per tutta la fase alta del clock, e può quindi cambiare a metà di una fase. L'uscita del flip-flop cambia solo sui fronti di salita, assumendo il valore che D ha in quell'istante; brevi impulsi di D tra due fronti vengono ignorati. L'uscita del flip-flop è stabile per un intero periodo, che è esattamente la proprietà richiesta a un registro di stato.
 DA COMPRENDERE OGGI: latch e flip-flop.
 Per il docente: Sensibile al livello contro sensibile al fronte. Le forme d'onda sono calcolate, non disegnate a mano: l'uscita del latch cambia a metà di una fase alta, quella del flip-flop solo sui fronti di salita.</a:t>
             </a:r>
@@ -1205,7 +1205,7 @@
           <a:p>
             <a:r>
               <a:rPr lang="en-US" dirty="0"/>
-              <a:t>Un registro è una fila di flip-flop con un clock comune: un flip-flop per bit. Con un segnale di abilitazione al caricamento prende un nuovo valore solo quando gli è chiesto, e altrimenti conserva il vecchio. RISC-V ha trentadue registri di trentadue bit: 1024 flip-flop. Ora le due macchine della Lezione 11 trovano il loro posto: il decodificatore pilotato dal campo rd attiva l'abilitazione di un solo registro, e i multiplexer selezionano i registri da leggere.
+              <a:t>Un registro è una fila di flip-flop che condividono un clock, un flip-flop per bit. Con un segnale di abilitazione al caricamento accetta un nuovo valore solo su richiesta e altrimenti conserva quello vecchio. RISC-V ha trentadue registri di trentadue bit, quindi 1.024 flip-flop. Le due macchine della Lezione 11 trovano ora il loro posto: il decoder pilotato dal campo rd attiva il caricamento di un solo registro, e i multiplexer selezionano quali registri si leggono. Il banco dei registri è così una sintesi del combinatorio e del sequenziale.
 DA COMPRENDERE OGGI: i registri come flip-flop.
 Per il docente: La presentazione originale usava come esempio il 74273 (otto flip-flop D, un clock e un clear). Registri, registri a scorrimento, bus e buffer a tre stati sono l'argomento della prossima lezione.</a:t>
             </a:r>
@@ -1295,8 +1295,8 @@
           <a:p>
             <a:r>
               <a:rPr lang="en-US" dirty="0"/>
-              <a:t>Ricordate dove si scrive l'uscita nei due tipi di diagramma. In una macchina di Moore sta dentro i nodi: appartiene allo stato, e l'ingresso non c'entra.
-Guardate la tabella del latch SR: quale riga ha entrambi gli ingressi a 0? È la riga della memoria. La retroazione conserva il valore memorizzato, qualunque fosse.
+              <a:t>Per la prima domanda si ricorda dove si scrive l'uscita in ciascun tipo di diagramma. In una macchina di Moore sta dentro i nodi: appartiene allo stato, e l'ingresso non vi entra.
+Per la seconda si consulta la tabella del latch SR cercando la riga con entrambi gli ingressi a 0. È la riga della memoria: la retroazione conserva il valore memorizzato, qualunque esso sia.
 Per il docente: 1. Risposta: B. Moore: w va da S a U. In una macchina di Mealy l'uscita dipende dallo stato e dall'ingresso.
 2. Risposta: C. S = R = 0 è la condizione di mantenimento: la retroazione conserva il valore memorizzato.</a:t>
             </a:r>
@@ -1386,8 +1386,8 @@
           <a:p>
             <a:r>
               <a:rPr lang="en-US" dirty="0"/>
-              <a:t>Entrambi gli elementi memorizzano un bit ed entrambi hanno un clock. La differenza è quando ascoltano: il latch per tutto il livello attivo, il flip-flop solo nell'istante di un fronte.
-A una macchina con N stati servono abbastanza variabili di stato da dare a ogni stato un codice diverso: il più piccolo k tale che 2 alla k sia almeno N. È la formula dei codici a lunghezza fissa della Lezione 11.
+              <a:t>Per la prima domanda: entrambi gli elementi memorizzano un bit ed entrambi hanno un clock. La differenza sta in quando rispondono: il latch per tutto il livello attivo, il flip-flop solo nell'istante di un fronte.
+Per la seconda, una macchina con N stati richiede abbastanza variabili di stato da dare a ogni stato un codice distinto: il più piccolo k tale che 2^k sia almeno N. È la formula dei codici a lunghezza fissa della Lezione 11.
 Per il docente: 1. Risposta: C. Il latch è trasparente per tutto il livello attivo del clock; il flip-flop campiona D solo sul fronte.
 2. Risposta: B. ceil(log2 10) = 4 variabili di stato, con il codice binario di lunghezza minima della Lezione 11. Ne servirebbero dieci con un codice one-hot.</a:t>
             </a:r>
@@ -1477,7 +1477,7 @@
           <a:p>
             <a:r>
               <a:rPr lang="en-US" dirty="0"/>
-              <a:t>Dodici termini. Feedback è la retroazione. Rising e falling edge sono il fronte di salita e di discesa. Level-triggered ed edge-triggered, sensibile al livello e sensibile al fronte, dicono quando un elemento di memoria ascolta. Present state e next state sono i due valori attorno a un fronte di clock. Latch e flip-flop non si traducono; la parola italiana generale è bistabile.</a:t>
+              <a:t>Dodici termini. Feedback è retroazione. Il rising e il falling edge sono il fronte di salita e il fronte di discesa. Level-triggered ed edge-triggered specificano quando un elemento di memoria risponde. Stato presente e stato successivo sono i due valori ai due lati di un fronte di clock. Latch e flip-flop non si traducono; il termine generale italiano è bistabile.</a:t>
             </a:r>
             <a:endParaRPr lang="en-US" dirty="0"/>
           </a:p>
@@ -1565,7 +1565,7 @@
           <a:p>
             <a:r>
               <a:rPr lang="en-US" dirty="0"/>
-              <a:t>Sei obiettivi. Spiegare perché un circuito sequenziale ha bisogno dei concetti di tempo e di stato. Definire una macchina a stati finiti e distinguere Mealy da Moore. Descrivere una macchina con una tabella e con un diagramma degli stati. Spiegare come un latch SR ricorda un bit e perché una combinazione dei suoi ingressi è vietata. Distinguere latch e flip-flop, livello e fronte. E riconoscere registri, contatori e program counter come macchine sequenziali.</a:t>
+              <a:t>Sei risultati di apprendimento. Spiegare perché un circuito sequenziale richiede i concetti di tempo e di stato. Definire una macchina a stati finiti e distinguere i modelli di Mealy e di Moore. Descrivere una macchina con una tabella degli stati e con un diagramma degli stati, e passare dall'uno all'altro. Spiegare come un latch SR memorizza un bit e perché una combinazione di ingresso è vietata. Distinguere i latch dai flip-flop, l'attivazione a livello da quella sul fronte. E riconoscere registri, contatori e program counter come macchine sequenziali.</a:t>
             </a:r>
             <a:endParaRPr lang="en-US" dirty="0"/>
           </a:p>
@@ -1653,7 +1653,7 @@
           <a:p>
             <a:r>
               <a:rPr lang="en-US" dirty="0"/>
-              <a:t>Cinque conclusioni. I circuiti digitali sono combinatori o sequenziali, e per i secondi contano il tempo e lo stato. Una macchina sequenziale realizza un automa a stati finiti, del tipo di Mealy o di Moore. Latch e flip-flop sono le memorie elementari, ed è la retroazione a far sì che un circuito ricordi. Il clock decide quando: i latch ascoltano durante un livello, i flip-flop su un fronte. Registri, contatori, program counter e processore sono macchine sequenziali costruite attorno a reti combinatorie.
+              <a:t>Cinque conclusioni. I circuiti digitali sono combinatori o sequenziali, e per i secondi tempo e stato sono essenziali. Una macchina sequenziale realizza un automa a stati finiti, di tipo Mealy o Moore. Latch e flip-flop sono le memorie elementari, e la retroazione è ciò che permette a un circuito di ricordare. Il clock decide quando: i latch rispondono durante un livello, i flip-flop su un fronte. Registri, contatori, il program counter e il processore stesso sono macchine sequenziali costruite attorno a reti combinatorie. La prossima lezione assembla i registri nelle macchine elementari del percorso dei dati.
 Stato di apprendimento, riepilogo. DA COMPRENDERE OGGI: macchine a stati finiti; il clock; latch e flip-flop; i registri come flip-flop. DA UTILIZZARE OGGI: il programma completo, gli strumenti di PRG32 (si usa, non si studia, in questo corso). DA COMPRENDERE PIÙ AVANTI: niente. Una slide senza etichetta è contesto: una storia, un esempio, una domanda, un esercizio.
 Per il docente: Prossima lezione: le macchine elementari per l'architettura: registri, registri a scorrimento, bus e buffer a tre stati.</a:t>
             </a:r>
@@ -1743,7 +1743,7 @@
           <a:p>
             <a:r>
               <a:rPr lang="en-US" dirty="0"/>
-              <a:t>Il clock è un segnale che alterna regolarmente 0 e 1. Il disegno ne nomina le parti: il periodo T, il tempo alto e il tempo basso, il fronte di salita, dove passa da 0 a 1, e il fronte di discesa. La frequenza è il numero di periodi al secondo, uno diviso T. I circuiti sincroni cambiano stato su uno dei due fronti. Per il kit: 160 MHz significano un periodo di 6,25 nanosecondi, e ogni rete combinatoria del chip deve assestarsi entro quel tempo.
+              <a:t>Il clock è un segnale che alterna regolarmente tra 0 e 1. Il disegno ne indica le caratteristiche: il periodo T, i tempi alto e basso, il fronte di salita, dove passa da 0 a 1, e il fronte di discesa. La frequenza è il numero di periodi al secondo, 1/T. I circuiti sincroni cambiano stato su uno dei due fronti. Per il kit, 160 MHz corrispondono a un periodo di 6,25 nanosecondi, e ogni rete combinatoria del chip deve assestarsi entro quell'intervallo: il cammino critico della Lezione 11 pone così un limite superiore alla frequenza di clock.
 DA COMPRENDERE OGGI: il clock.
 Per il docente: Fronte di salita, fronte di discesa, periodo TCK, TH e TL nella slide originale. Il legame con la Lezione 11: il periodo deve superare il percorso critico. In un gioco PRG32 il frame fa da clock, molto più lento.</a:t>
             </a:r>
@@ -1833,7 +1833,7 @@
           <a:p>
             <a:r>
               <a:rPr lang="en-US" dirty="0"/>
-              <a:t>Lo stato è una sintesi di tutta la storia precedente degli ingressi: tutto ciò che il circuito deve sapere del passato per comportarsi correttamente da qui in poi. È conservato da variabili di stato. Una funzione di transizione calcola lo stato prossimo dallo stato presente e dagli ingressi presenti, e lo stato si aggiorna una volta per ciclo di clock. La formula a destra lo dice in modo compatto. Per memorizzare lo stato servono elementi con due condizioni stabili: latch e flip-flop.
+              <a:t>Lo stato è un riassunto dell'intera storia passata degli ingressi: ciò che il circuito deve sapere del passato per comportarsi correttamente da qui in avanti. È contenuto nelle variabili di stato. Una funzione di transizione calcola lo stato successivo dallo stato presente e dagli ingressi presenti, e lo stato si aggiorna una volta per ciclo di clock, come la formula a destra dice in forma compatta. La nozione di stato è un'astrazione potente: una storia illimitata è sostituita da una quantità finita di informazione. Memorizzarla richiede elementi con due condizioni stabili, latch e flip-flop.
 DA COMPRENDERE OGGI: macchine a stati finiti.
 Per il docente: Nel riscaldamento: una variabile di stato (la parola state), la funzione di transizione è game_update, il clock è il frame.</a:t>
             </a:r>
@@ -1923,7 +1923,7 @@
           <a:p>
             <a:r>
               <a:rPr lang="en-US" dirty="0"/>
-              <a:t>La definizione formale. Una macchina sequenziale è fatta di cinque cose: un alfabeto di ingresso I e un alfabeto di uscita U, insiemi finiti di simboli; un insieme finito di stati S; una funzione stato prossimo, che a ogni coppia stato-ingresso fa corrispondere uno stato prossimo; e una funzione di uscita. Confrontatela con il riscaldamento: l'ingresso è «A premuto o no», gli stati sono TITLE, PLAY e OVER, la funzione stato prossimo è il codice di game_update, e l'uscita è la schermata.
+              <a:t>La definizione formale. Una macchina sequenziale è specificata da cinque componenti: un alfabeto di ingresso I e un alfabeto di uscita U, entrambi insiemi finiti di simboli; un insieme finito di stati S; una funzione di stato successivo, che assegna uno stato successivo a ogni coppia di stato e ingresso; e una funzione di uscita. Il riscaldamento istanzia la definizione: l'ingresso è "A premuto o no", gli stati sono TITLE, PLAY e OVER, la funzione di stato successivo è il codice di game_update, e l'uscita è lo schermo.
 DA COMPRENDERE OGGI: macchine a stati finiti.
 Per il docente: In inglese: finite-state automaton; sequential machine. Con k variabili di stato gli stati sono al più 2^k. La slide originale scriveva le funzioni con segni di appartenenza: qui si usano le frecce corrette.</a:t>
             </a:r>
@@ -2013,7 +2013,7 @@
           <a:p>
             <a:r>
               <a:rPr lang="en-US" dirty="0"/>
-              <a:t>L'uscita si può definire in due modi. In una macchina di Mealy l'uscita dipende dallo stato e dall'ingresso: si scrive sulle transizioni, e può reagire a un ingresso nello stesso ciclo. In una macchina di Moore l'uscita dipende dal solo stato: si scrive dentro gli stati e cambia solo quando cambia lo stato. Il gioco del riscaldamento è una macchina di Moore: ogni stato ha la sua schermata. I due modelli sono equivalenti, anche se il numero di stati può essere diverso.
+              <a:t>Ci sono due modi di definire l'uscita. In una macchina di Mealy l'uscita dipende sia dallo stato sia dall'ingresso; si scrive sulle transizioni e può rispondere a un ingresso nello stesso ciclo. In una macchina di Moore l'uscita dipende solo dallo stato; si scrive dentro gli stati e cambia solo quando cambia lo stato. Il gioco del riscaldamento è una macchina di Moore, perché ogni stato ha la sua schermata. I due modelli hanno la stessa potenza espressiva, anche se il numero di stati richiesti può differire.
 DA COMPRENDERE OGGI: macchine a stati finiti.
 Per il docente: Ogni macchina di Mealy ha una macchina di Moore equivalente e viceversa, eventualmente con un numero diverso di stati.</a:t>
             </a:r>
@@ -2103,7 +2103,7 @@
           <a:p>
             <a:r>
               <a:rPr lang="en-US" dirty="0"/>
-              <a:t>L'architettura generale di ogni macchina sequenziale. Una rete combinatoria calcola lo stato prossimo e le uscite a partire dagli ingressi e dallo stato presente. Un registro di flip-flop conserva lo stato presente. A ogni fronte del clock lo stato prossimo diventa lo stato presente. L'anello dalla rete al registro e ritorno è ciò che rende possibile la memoria, e il registro è ciò che tiene l'anello sotto controllo: i valori fanno un giro per ciclo, mai più in fretta. Tutta la Lezione 11 vive nel riquadro superiore.
+              <a:t>L'architettura generale di ogni macchina sequenziale. Una rete combinatoria calcola lo stato successivo e le uscite dagli ingressi e dallo stato presente; un registro di flip-flop contiene lo stato presente; a ogni fronte di clock lo stato successivo diventa lo stato presente. L'anello dalla rete al registro e ritorno è ciò che rende possibile la memoria, e il registro è ciò che disciplina l'anello: i valori circolano una volta per ciclo, mai più in fretta. Ogni macchina della Lezione 11 appartiene al blocco superiore. Questo schema, con il contenuto adatto, descrive il processore stesso.
 DA COMPRENDERE OGGI: macchine a stati finiti.
 Per il docente: Rete combinatoria e registri di stato. Il riscaldamento ha esattamente questa forma: game_update è il riquadro superiore, la parola state è il registro, il frame è il clock.</a:t>
             </a:r>
@@ -2193,7 +2193,7 @@
           <a:p>
             <a:r>
               <a:rPr lang="en-US" dirty="0"/>
-              <a:t>Le due descrizioni equivalenti di una macchina, per un esempio di Mealy con quattro stati. Nella tabella degli stati ogni riga è uno stato presente e ogni colonna un simbolo di ingresso; la cella dà lo stato prossimo e, dopo la barra, l'uscita. Nel diagramma degli stati ogni stato è un nodo e ogni transizione una freccia etichettata ingresso barra uscita. Esercitatevi a passare dall'una all'altro: prendete la riga di s0 e trovatene nel disegno le due frecce.
+              <a:t>Due descrizioni equivalenti di una macchina, illustrate da un esempio di Mealy a quattro stati. Nella tabella degli stati ogni riga è uno stato presente e ogni colonna un simbolo di ingresso; ogni cella dà lo stato successivo e, dopo la barra, l'uscita. Nel diagramma degli stati ogni stato è un nodo e ogni transizione una freccia etichettata ingresso/uscita. Il passaggio tra le due va esercitato: si prende la riga di s0 e se ne individuano le due frecce nel disegno.
 DA COMPRENDERE OGGI: macchine a stati finiti.
 Per il docente: Tabella degli stati e diagramma degli stati: G(V, E, L) con V i nodi (stati), E gli archi (transizioni) e L le etichette. L'esempio è quello della presentazione originale.</a:t>
             </a:r>
@@ -2283,7 +2283,7 @@
           <a:p>
             <a:r>
               <a:rPr lang="en-US" dirty="0"/>
-              <a:t>Il latch SR: due porte NOR, ciascuna con l'uscita collegata a un ingresso dell'altra. S, per set, porta Q a 1; R, per reset, porta Q a 0. Con entrambi a 0 il latch conserva l'ultimo valore: ricorda quale ingresso è stato a 1 più di recente. La tabella riassume i quattro casi, e l'ultimo è vietato. Per via della retroazione Q dipende da se stesso: in un circuito con un anello un segnale è una forma d'onda nel tempo e non un singolo valore.
+              <a:t>Il latch SR consiste di due porte NOR, ciascuna con l'uscita collegata a un ingresso dell'altra. S, per set, porta Q a 1; R, per reset, porta Q a 0. Con entrambi a 0 il latch conserva il suo ultimo valore: ricorda quale ingresso è stato 1 più di recente. La tabella riassume i quattro casi, l'ultimo dei quali è vietato. A causa della retroazione, Q dipende da sé stesso: in un circuito con un anello un segnale va inteso come una forma d'onda nel tempo, non come un singolo valore.
 DA COMPRENDERE OGGI: latch e flip-flop.
 Per il docente: Q = (R + Q')' e Q' = (S + Q)'. Tagliando il filo di retroazione il latch diventa una semplice rete combinatoria di due NOR: così lo analizzava, caso per caso, la presentazione originale. Lo stesso latch si può costruire con due porte NAND e ingressi attivi bassi.</a:t>
             </a:r>
@@ -3363,7 +3363,7 @@
                 <a:ea typeface="Calibri" pitchFamily="34" charset="-122"/>
                 <a:cs typeface="Calibri" pitchFamily="34" charset="-120"/>
               </a:rPr>
-              <a:t>13-Architettura_dei_Calcolatori-Macchine_Sequenziali-Codice.pptx</a:t>
+              <a:t>13-Architettura_dei_Calcolatori-Macchine_Sequenziali-Lab.pptx</a:t>
             </a:r>
             <a:endParaRPr lang="en-US" sz="1300" dirty="0"/>
           </a:p>

--- a/it/slides/13-Architettura_dei_Calcolatori-Macchine_Sequenziali.pptx
+++ b/it/slides/13-Architettura_dei_Calcolatori-Macchine_Sequenziali.pptx
@@ -126,19 +126,19 @@
   <p:extLst>
     <p:ext uri="{521415D9-36F7-43E2-AB2F-B90AF26B5E84}">
       <p14:sectionLst xmlns:p14="http://schemas.microsoft.com/office/powerpoint/2010/main">
-        <p14:section name="Apertura" id="{e022b208-34bb-58ae-ba2f-337dcacbf059}">
+        <p14:section name="Apertura" id="{39d73d94-ec78-e433-c5ad-8b8c693baa18}">
           <p14:sldIdLst>
             <p14:sldId id="256"/>
             <p14:sldId id="257"/>
           </p14:sldIdLst>
         </p14:section>
-        <p14:section name="Tempo e stato" id="{f813b0e4-47c1-5b19-6701-0c92aae2ee59}">
+        <p14:section name="Tempo e stato" id="{9f03a4b5-0790-c1e4-d67b-80950c9b8ad5}">
           <p14:sldIdLst>
             <p14:sldId id="258"/>
             <p14:sldId id="259"/>
           </p14:sldIdLst>
         </p14:section>
-        <p14:section name="Macchine a stati finiti" id="{91d4bf8c-139f-21b7-f749-c279fb4ac7da}">
+        <p14:section name="Macchine a stati finiti" id="{59375d32-a5dd-35ba-ab9e-d79af72c5159}">
           <p14:sldIdLst>
             <p14:sldId id="260"/>
             <p14:sldId id="261"/>
@@ -146,7 +146,7 @@
             <p14:sldId id="263"/>
           </p14:sldIdLst>
         </p14:section>
-        <p14:section name="Latch" id="{edd6a9fd-f982-4ac7-f294-eb794f8b8b13}">
+        <p14:section name="Latch" id="{b762b109-591b-b5db-1033-8d9e8426d967}">
           <p14:sldIdLst>
             <p14:sldId id="264"/>
             <p14:sldId id="265"/>
@@ -155,13 +155,13 @@
             <p14:sldId id="268"/>
           </p14:sldIdLst>
         </p14:section>
-        <p14:section name="Flip-flop" id="{f7943d18-37f2-ac1e-2b44-d29f8de04ccd}">
+        <p14:section name="Flip-flop" id="{3277b367-952c-a80e-810c-8a064adc455f}">
           <p14:sldIdLst>
             <p14:sldId id="269"/>
             <p14:sldId id="270"/>
           </p14:sldIdLst>
         </p14:section>
-        <p14:section name="Ritorno alla macchina" id="{a79afe55-ac3c-42a1-574a-45dd9bdac678}">
+        <p14:section name="Ritorno alla macchina" id="{1bc0d6a3-8ad2-8ff4-5add-e898518d82d3}">
           <p14:sldIdLst>
             <p14:sldId id="271"/>
             <p14:sldId id="272"/>

--- a/it/slides/13-Architettura_dei_Calcolatori-Macchine_Sequenziali.pptx
+++ b/it/slides/13-Architettura_dei_Calcolatori-Macchine_Sequenziali.pptx
@@ -126,19 +126,19 @@
   <p:extLst>
     <p:ext uri="{521415D9-36F7-43E2-AB2F-B90AF26B5E84}">
       <p14:sectionLst xmlns:p14="http://schemas.microsoft.com/office/powerpoint/2010/main">
-        <p14:section name="Apertura" id="{39d73d94-ec78-e433-c5ad-8b8c693baa18}">
+        <p14:section name="Apertura" id="{3c7c9da9-d20b-b92c-acd2-aa3eb2e7e937}">
           <p14:sldIdLst>
             <p14:sldId id="256"/>
             <p14:sldId id="257"/>
           </p14:sldIdLst>
         </p14:section>
-        <p14:section name="Tempo e stato" id="{9f03a4b5-0790-c1e4-d67b-80950c9b8ad5}">
+        <p14:section name="Tempo e stato" id="{13550ebf-1be0-8ad9-b5ef-6fdff9dcf154}">
           <p14:sldIdLst>
             <p14:sldId id="258"/>
             <p14:sldId id="259"/>
           </p14:sldIdLst>
         </p14:section>
-        <p14:section name="Macchine a stati finiti" id="{59375d32-a5dd-35ba-ab9e-d79af72c5159}">
+        <p14:section name="Macchine a stati finiti" id="{0433c135-4209-fa83-b824-7d159def8ea7}">
           <p14:sldIdLst>
             <p14:sldId id="260"/>
             <p14:sldId id="261"/>
@@ -146,7 +146,7 @@
             <p14:sldId id="263"/>
           </p14:sldIdLst>
         </p14:section>
-        <p14:section name="Latch" id="{b762b109-591b-b5db-1033-8d9e8426d967}">
+        <p14:section name="Latch" id="{3485bfde-e26e-0d01-4efc-ebd198c80829}">
           <p14:sldIdLst>
             <p14:sldId id="264"/>
             <p14:sldId id="265"/>
@@ -155,13 +155,13 @@
             <p14:sldId id="268"/>
           </p14:sldIdLst>
         </p14:section>
-        <p14:section name="Flip-flop" id="{3277b367-952c-a80e-810c-8a064adc455f}">
+        <p14:section name="Flip-flop" id="{12b4fe57-14f9-7b1c-08c8-045a4f7a4c0e}">
           <p14:sldIdLst>
             <p14:sldId id="269"/>
             <p14:sldId id="270"/>
           </p14:sldIdLst>
         </p14:section>
-        <p14:section name="Ritorno alla macchina" id="{1bc0d6a3-8ad2-8ff4-5add-e898518d82d3}">
+        <p14:section name="Ritorno alla macchina" id="{913ea39a-cd9b-de98-8354-c8ef1be67262}">
           <p14:sldIdLst>
             <p14:sldId id="271"/>
             <p14:sldId id="272"/>
@@ -577,6 +577,7 @@
               <a:t>Si apre il terzo blocco del corso: stato e memoria. Le macchine della Lezione 11 non avevano memoria: ingressi identici producevano sempre uscite identiche. Un calcolatore, però, ricorda: un contatore persiste da un frame al successivo, e un gioco sa se sta mostrando il titolo o il campo di gioco. Questa lezione introduce tempo e stato, il modello che descrive ogni circuito dotato di memoria, e gli elementi elementari di memorizzazione, latch e flip-flop, con cui si costruiscono i registri del processore. È il cardine concettuale tra logica e architettura.
 Stato di apprendimento: DA COMPRENDERE OGGI, alla fine di questa lezione lo spiegate, lo seguite passo passo e lo applicate da soli; DA UTILIZZARE OGGI, oggi seguite e usate la ricetta; come funziona dentro si spiega più avanti, o non fa parte del corso; DA COMPRENDERE PIÙ AVANTI, riconoscete il nome e lo scopo; lo spiega una lezione successiva. Una slide senza etichetta è contesto: una storia, un esempio, una domanda, un esercizio.
 Stato di apprendimento di questa lezione. DA COMPRENDERE OGGI: macchine a stati finiti; il clock; latch e flip-flop; i registri come flip-flop. DA UTILIZZARE OGGI: il programma completo, gli strumenti di PRG32 (si usa, non si studia, in questo corso). DA COMPRENDERE PIÙ AVANTI: niente. Una slide senza etichetta è contesto: una storia, un esempio, una domanda, un esercizio.
+Percorso. I risultati di oggi: (1) descrivere una macchina a stati finiti con un diagramma degli stati; (2) spiegare il clock e perché un circuito deve stabilizzarsi entro un periodo; (3) distinguere un latch da un flip-flop e costruire un registro. Si appoggia su: solo ciò che ha preparato la Lezione 01. Prossimo passo: Lezione 14, Macchine elementari: registri e bus.
 Per il docente: Spirale: un gioco con una schermata del titolo è una macchina a stati finiti scritta in assembly; la lezione costruisce poi la teoria (tempo, stato, Mealy e Moore), gli elementi di memoria (latch e flip-flop), e torna ai registri e al program counter di RISC-V.</a:t>
             </a:r>
             <a:endParaRPr lang="en-US" dirty="0"/>
@@ -1654,7 +1655,7 @@
             <a:r>
               <a:rPr lang="en-US" dirty="0"/>
               <a:t>Cinque conclusioni. I circuiti digitali sono combinatori o sequenziali, e per i secondi tempo e stato sono essenziali. Una macchina sequenziale realizza un automa a stati finiti, di tipo Mealy o Moore. Latch e flip-flop sono le memorie elementari, e la retroazione è ciò che permette a un circuito di ricordare. Il clock decide quando: i latch rispondono durante un livello, i flip-flop su un fronte. Registri, contatori, il program counter e il processore stesso sono macchine sequenziali costruite attorno a reti combinatorie. La prossima lezione assembla i registri nelle macchine elementari del percorso dei dati.
-Stato di apprendimento, riepilogo. DA COMPRENDERE OGGI: macchine a stati finiti; il clock; latch e flip-flop; i registri come flip-flop. DA UTILIZZARE OGGI: il programma completo, gli strumenti di PRG32 (si usa, non si studia, in questo corso). DA COMPRENDERE PIÙ AVANTI: niente. Una slide senza etichetta è contesto: una storia, un esempio, una domanda, un esercizio.
+Stato di apprendimento, riepilogo. DA COMPRENDERE OGGI: macchine a stati finiti; il clock; latch e flip-flop; i registri come flip-flop. DA UTILIZZARE OGGI: il programma completo, gli strumenti di PRG32 (si usa, non si studia, in questo corso). DA COMPRENDERE PIÙ AVANTI: niente. Una slide senza etichetta è contesto: una storia, un esempio, una domanda, un esercizio. Il filo della lezione: Un registro è fatto di flip-flop che campionano su un fronte del clock: è così che il contatore della Lezione 02 sopravviveva da un frame all'altro, in hardware. Prossimo passo: come i registri si scambiano i dati. Biglietto d'uscita (da due a quattro minuti, da soli, su carta): 1. Il clock del kit va a 160 MHz. Qual è il suo periodo, e perché ogni rete combinatoria tra due registri deve stabilizzarsi entro quel tempo? 2. Qual è la differenza tra un latch D e un flip-flop D, e quale dei due permette di leggere e scrivere un registro nello stesso ciclo di clock in sicurezza?
 Per il docente: Prossima lezione: le macchine elementari per l'architettura: registri, registri a scorrimento, bus e buffer a tre stati.</a:t>
             </a:r>
             <a:endParaRPr lang="en-US" dirty="0"/>
